--- a/AI토플_오프라인동기화_전략.pptx
+++ b/AI토플_오프라인동기화_전략.pptx
@@ -3158,7 +3158,7 @@
         </p:nvSpPr>
         <p:spPr>
           <a:xfrm>
-            <a:off x="1005840" y="1828800"/>
+            <a:off x="1005840" y="1783080"/>
             <a:ext cx="10058400" cy="320040"/>
           </a:xfrm>
           <a:prstGeom prst="rect">
@@ -3184,7 +3184,7 @@
                 </a:solidFill>
                 <a:latin typeface="Menlo"/>
               </a:rPr>
-              <a:t>SMEAG STUDYGROUND · 데이터 전략</a:t>
+              <a:t>SMEAG STUDYGROUND · 데이터 전략 · REV 2</a:t>
             </a:r>
           </a:p>
         </p:txBody>
@@ -3197,8 +3197,8 @@
         </p:nvSpPr>
         <p:spPr>
           <a:xfrm>
-            <a:off x="1005840" y="2286000"/>
-            <a:ext cx="9692640" cy="1737360"/>
+            <a:off x="1005840" y="2240280"/>
+            <a:ext cx="10058400" cy="1737360"/>
           </a:xfrm>
           <a:prstGeom prst="rect">
             <a:avLst/>
@@ -3223,7 +3223,7 @@
                 </a:solidFill>
                 <a:latin typeface="Apple SD Gothic Neo"/>
               </a:rPr>
-              <a:t>인터넷이 없는 교실에서</a:t>
+              <a:t>시험이 끝나고 3분,</a:t>
             </a:r>
           </a:p>
           <a:p>
@@ -3239,7 +3239,7 @@
                 </a:solidFill>
                 <a:latin typeface="Apple SD Gothic Neo"/>
               </a:rPr>
-              <a:t>답안을 잃지 않는 법</a:t>
+              <a:t>그 안에 답안을 회수한다</a:t>
             </a:r>
           </a:p>
         </p:txBody>
@@ -3252,7 +3252,7 @@
         </p:nvCxnSpPr>
         <p:spPr>
           <a:xfrm>
-            <a:off x="1005840" y="4251960"/>
+            <a:off x="1005840" y="4206240"/>
             <a:ext cx="2834640" cy="0"/>
           </a:xfrm>
           <a:prstGeom prst="line">
@@ -3287,8 +3287,8 @@
         </p:nvSpPr>
         <p:spPr>
           <a:xfrm>
-            <a:off x="1005840" y="4526280"/>
-            <a:ext cx="7863840" cy="1188720"/>
+            <a:off x="1005840" y="4480560"/>
+            <a:ext cx="8595360" cy="1280160"/>
           </a:xfrm>
           <a:prstGeom prst="rect">
             <a:avLst/>
@@ -3313,7 +3313,7 @@
                 </a:solidFill>
                 <a:latin typeface="Apple SD Gothic Neo"/>
               </a:rPr>
-              <a:t>시험은 완전 오프라인에서 치른다. 답안은 학생 PC의 로컬 DB에 정본으로 남고,</a:t>
+              <a:t>시험은 인터넷을 끊고 치른다. 답안은 학생 PC의 로컬 DB에 쌓이고,</a:t>
             </a:r>
           </a:p>
           <a:p>
@@ -3329,7 +3329,7 @@
                 </a:solidFill>
                 <a:latin typeface="Apple SD Gothic Neo"/>
               </a:rPr>
-              <a:t>인터넷이 돌아오는 순간 Supabase로 자동 개통된다.</a:t>
+              <a:t>종료 직후 회선을 열면 30대가 한꺼번에 Supabase로 올린다.</a:t>
             </a:r>
           </a:p>
           <a:p>
@@ -3345,7 +3345,7 @@
                 </a:solidFill>
                 <a:latin typeface="Apple SD Gothic Neo"/>
               </a:rPr>
-              <a:t>선생님과 관리자는 “누가 어디까지 올라왔는지”를 화면에서 본다.</a:t>
+              <a:t>공용 PC에 아무것도 남기지 않는 것까지가 한 세트다.</a:t>
             </a:r>
           </a:p>
         </p:txBody>
@@ -3378,13 +3378,13 @@
               </a:lnSpc>
             </a:pPr>
             <a:r>
-              <a:rPr sz="1000" b="0">
-                <a:solidFill>
-                  <a:srgbClr val="78837F"/>
+              <a:rPr sz="1050" b="0">
+                <a:solidFill>
+                  <a:srgbClr val="0B6E5F"/>
                 </a:solidFill>
                 <a:latin typeface="Menlo"/>
               </a:rPr>
-              <a:t>현재 코드베이스 실측 기준 — exam-sync.js · exam-store.js · app/js/sync.js · supabase/schema.sql</a:t>
+              <a:t>교실 허브(별도 서버)는 만들지 않는다 — 인터넷이 평소에는 되는 것으로 확인됨</a:t>
             </a:r>
           </a:p>
         </p:txBody>
@@ -3601,7 +3601,7 @@
                 </a:solidFill>
                 <a:latin typeface="Apple SD Gothic Neo"/>
               </a:rPr>
-              <a:t>각 단계가 끝나는 시점마다 실제로 시험을 칠 수 있는 상태여야 한다. 뒤 단계는 안전 마진을 더할 뿐이다.</a:t>
+              <a:t>각 단계가 끝나는 시점마다 실제로 시험을 칠 수 있는 상태여야 한다. 허브를 빼면서 한 단계가 줄었다.</a:t>
             </a:r>
           </a:p>
         </p:txBody>
@@ -3616,7 +3616,7 @@
         </p:nvGraphicFramePr>
         <p:xfrm>
           <a:off x="685800" y="2148840"/>
-          <a:ext cx="10789920" cy="3602736"/>
+          <a:ext cx="10789920" cy="3419856"/>
         </p:xfrm>
         <a:graphic>
           <a:graphicData uri="http://schemas.openxmlformats.org/drawingml/2006/table">
@@ -3624,8 +3624,8 @@
               <a:tblPr firstRow="0" bandRow="0"/>
               <a:tblGrid>
                 <a:gridCol w="640080"/>
-                <a:gridCol w="2651760"/>
-                <a:gridCol w="4572000"/>
+                <a:gridCol w="2834640"/>
+                <a:gridCol w="4389120"/>
                 <a:gridCol w="2926080"/>
               </a:tblGrid>
               <a:tr h="310896">
@@ -3738,7 +3738,7 @@
                   </a:tcPr>
                 </a:tc>
               </a:tr>
-              <a:tr h="658368">
+              <a:tr h="777240">
                 <a:tc>
                   <a:txBody>
                     <a:bodyPr wrap="square"/>
@@ -3784,6 +3784,7 @@
                           <a:latin typeface="Apple SD Gothic Neo"/>
                         </a:rPr>
                         <a:t>동기화 경로 단일화
++ 고아 큐 회수
 + 영구 저장소 승격</a:t>
                       </a:r>
                     </a:p>
@@ -3811,8 +3812,8 @@
                           </a:solidFill>
                           <a:latin typeface="Apple SD Gothic Neo"/>
                         </a:rPr>
-                        <a:t>오프라인 시험을 치고, 인터넷이 돌아오면
-답안이 Supabase 에 자동으로 올라간다.</a:t>
+                        <a:t>오프라인 시험을 치고, 회선을 열면
+그 PC 에 남은 모든 회차가 자동으로 올라간다.</a:t>
                       </a:r>
                     </a:p>
                   </a:txBody>
@@ -3839,8 +3840,8 @@
                           </a:solidFill>
                           <a:latin typeface="Apple SD Gothic Neo"/>
                         </a:rPr>
-                        <a:t>exam-sync.js 어댑터 분리
-exam-store.js persist 요청</a:t>
+                        <a:t>exam-sync.js 어댑터 정리
+exam-store.js 전체 스캔 · persist</a:t>
                       </a:r>
                     </a:p>
                   </a:txBody>
@@ -3851,7 +3852,7 @@
                   </a:tcPr>
                 </a:tc>
               </a:tr>
-              <a:tr h="658368">
+              <a:tr h="777240">
                 <a:tc>
                   <a:txBody>
                     <a:bodyPr wrap="square"/>
@@ -3870,6 +3871,119 @@
                           <a:latin typeface="Apple SD Gothic Neo"/>
                         </a:rPr>
                         <a:t>2</a:t>
+                      </a:r>
+                    </a:p>
+                  </a:txBody>
+                  <a:tcPr marL="91440" marR="91440" marT="45720" marB="45720" anchor="ctr">
+                    <a:solidFill>
+                      <a:srgbClr val="FFFFFF"/>
+                    </a:solidFill>
+                  </a:tcPr>
+                </a:tc>
+                <a:tc>
+                  <a:txBody>
+                    <a:bodyPr wrap="square"/>
+                    <a:lstStyle/>
+                    <a:p>
+                      <a:pPr algn="l">
+                        <a:lnSpc>
+                          <a:spcPct val="120000"/>
+                        </a:lnSpc>
+                      </a:pPr>
+                      <a:r>
+                        <a:rPr sz="1000" b="0">
+                          <a:solidFill>
+                            <a:srgbClr val="4E5A57"/>
+                          </a:solidFill>
+                          <a:latin typeface="Apple SD Gothic Neo"/>
+                        </a:rPr>
+                        <a:t>완료 게이트 + 감독관 현황판
++ 로컬 자동 삭제</a:t>
+                      </a:r>
+                    </a:p>
+                  </a:txBody>
+                  <a:tcPr marL="91440" marR="91440" marT="45720" marB="45720" anchor="ctr">
+                    <a:solidFill>
+                      <a:srgbClr val="FFFFFF"/>
+                    </a:solidFill>
+                  </a:tcPr>
+                </a:tc>
+                <a:tc>
+                  <a:txBody>
+                    <a:bodyPr wrap="square"/>
+                    <a:lstStyle/>
+                    <a:p>
+                      <a:pPr algn="l">
+                        <a:lnSpc>
+                          <a:spcPct val="120000"/>
+                        </a:lnSpc>
+                      </a:pPr>
+                      <a:r>
+                        <a:rPr sz="1000" b="0">
+                          <a:solidFill>
+                            <a:srgbClr val="4E5A57"/>
+                          </a:solidFill>
+                          <a:latin typeface="Apple SD Gothic Neo"/>
+                        </a:rPr>
+                        <a:t>회수창이 성립한다. 학생은 완료를 보고 나가고,
+PC 에는 아무것도 남지 않는다.</a:t>
+                      </a:r>
+                    </a:p>
+                  </a:txBody>
+                  <a:tcPr marL="91440" marR="91440" marT="45720" marB="45720" anchor="ctr">
+                    <a:solidFill>
+                      <a:srgbClr val="FFFFFF"/>
+                    </a:solidFill>
+                  </a:tcPr>
+                </a:tc>
+                <a:tc>
+                  <a:txBody>
+                    <a:bodyPr wrap="square"/>
+                    <a:lstStyle/>
+                    <a:p>
+                      <a:pPr algn="l">
+                        <a:lnSpc>
+                          <a:spcPct val="120000"/>
+                        </a:lnSpc>
+                      </a:pPr>
+                      <a:r>
+                        <a:rPr sz="1000" b="0">
+                          <a:solidFill>
+                            <a:srgbClr val="4E5A57"/>
+                          </a:solidFill>
+                          <a:latin typeface="Apple SD Gothic Neo"/>
+                        </a:rPr>
+                        <a:t>종료 화면
+감독관 화면 신규</a:t>
+                      </a:r>
+                    </a:p>
+                  </a:txBody>
+                  <a:tcPr marL="91440" marR="91440" marT="45720" marB="45720" anchor="ctr">
+                    <a:solidFill>
+                      <a:srgbClr val="FFFFFF"/>
+                    </a:solidFill>
+                  </a:tcPr>
+                </a:tc>
+              </a:tr>
+              <a:tr h="777240">
+                <a:tc>
+                  <a:txBody>
+                    <a:bodyPr wrap="square"/>
+                    <a:lstStyle/>
+                    <a:p>
+                      <a:pPr algn="l">
+                        <a:lnSpc>
+                          <a:spcPct val="120000"/>
+                        </a:lnSpc>
+                      </a:pPr>
+                      <a:r>
+                        <a:rPr sz="1000" b="1">
+                          <a:solidFill>
+                            <a:srgbClr val="101715"/>
+                          </a:solidFill>
+                          <a:latin typeface="Apple SD Gothic Neo"/>
+                        </a:rPr>
+                        <a:t>3</a:t>
                       </a:r>
                     </a:p>
                   </a:txBody>
@@ -3925,7 +4039,7 @@
                           <a:latin typeface="Apple SD Gothic Neo"/>
                         </a:rPr>
                         <a:t>선생님이 “우리 반 30명 중 28명 동기화 완료,
-2명 미제출”을 화면에서 본다. 요구사항 충족 지점.</a:t>
+2명 미제출”을 본다. 요구사항 충족 지점.</a:t>
                       </a:r>
                     </a:p>
                   </a:txBody>
@@ -3964,120 +4078,7 @@
                   </a:tcPr>
                 </a:tc>
               </a:tr>
-              <a:tr h="658368">
-                <a:tc>
-                  <a:txBody>
-                    <a:bodyPr wrap="square"/>
-                    <a:lstStyle/>
-                    <a:p>
-                      <a:pPr algn="l">
-                        <a:lnSpc>
-                          <a:spcPct val="120000"/>
-                        </a:lnSpc>
-                      </a:pPr>
-                      <a:r>
-                        <a:rPr sz="1000" b="1">
-                          <a:solidFill>
-                            <a:srgbClr val="101715"/>
-                          </a:solidFill>
-                          <a:latin typeface="Apple SD Gothic Neo"/>
-                        </a:rPr>
-                        <a:t>3</a:t>
-                      </a:r>
-                    </a:p>
-                  </a:txBody>
-                  <a:tcPr marL="91440" marR="91440" marT="45720" marB="45720" anchor="ctr">
-                    <a:solidFill>
-                      <a:srgbClr val="FFFFFF"/>
-                    </a:solidFill>
-                  </a:tcPr>
-                </a:tc>
-                <a:tc>
-                  <a:txBody>
-                    <a:bodyPr wrap="square"/>
-                    <a:lstStyle/>
-                    <a:p>
-                      <a:pPr algn="l">
-                        <a:lnSpc>
-                          <a:spcPct val="120000"/>
-                        </a:lnSpc>
-                      </a:pPr>
-                      <a:r>
-                        <a:rPr sz="1000" b="0">
-                          <a:solidFill>
-                            <a:srgbClr val="4E5A57"/>
-                          </a:solidFill>
-                          <a:latin typeface="Apple SD Gothic Neo"/>
-                        </a:rPr>
-                        <a:t>서버 재채점
-+ 잠정/확정 분리</a:t>
-                      </a:r>
-                    </a:p>
-                  </a:txBody>
-                  <a:tcPr marL="91440" marR="91440" marT="45720" marB="45720" anchor="ctr">
-                    <a:solidFill>
-                      <a:srgbClr val="FFFFFF"/>
-                    </a:solidFill>
-                  </a:tcPr>
-                </a:tc>
-                <a:tc>
-                  <a:txBody>
-                    <a:bodyPr wrap="square"/>
-                    <a:lstStyle/>
-                    <a:p>
-                      <a:pPr algn="l">
-                        <a:lnSpc>
-                          <a:spcPct val="120000"/>
-                        </a:lnSpc>
-                      </a:pPr>
-                      <a:r>
-                        <a:rPr sz="1000" b="0">
-                          <a:solidFill>
-                            <a:srgbClr val="4E5A57"/>
-                          </a:solidFill>
-                          <a:latin typeface="Apple SD Gothic Neo"/>
-                        </a:rPr>
-                        <a:t>성적표가 서버 계산값 위에 서고,
-로컬 조작이 드러난다.</a:t>
-                      </a:r>
-                    </a:p>
-                  </a:txBody>
-                  <a:tcPr marL="91440" marR="91440" marT="45720" marB="45720" anchor="ctr">
-                    <a:solidFill>
-                      <a:srgbClr val="FFFFFF"/>
-                    </a:solidFill>
-                  </a:tcPr>
-                </a:tc>
-                <a:tc>
-                  <a:txBody>
-                    <a:bodyPr wrap="square"/>
-                    <a:lstStyle/>
-                    <a:p>
-                      <a:pPr algn="l">
-                        <a:lnSpc>
-                          <a:spcPct val="120000"/>
-                        </a:lnSpc>
-                      </a:pPr>
-                      <a:r>
-                        <a:rPr sz="1000" b="0">
-                          <a:solidFill>
-                            <a:srgbClr val="4E5A57"/>
-                          </a:solidFill>
-                          <a:latin typeface="Apple SD Gothic Neo"/>
-                        </a:rPr>
-                        <a:t>채점 파이프라인
-toefl_attempts 컬럼 추가</a:t>
-                      </a:r>
-                    </a:p>
-                  </a:txBody>
-                  <a:tcPr marL="91440" marR="91440" marT="45720" marB="45720" anchor="ctr">
-                    <a:solidFill>
-                      <a:srgbClr val="FFFFFF"/>
-                    </a:solidFill>
-                  </a:tcPr>
-                </a:tc>
-              </a:tr>
-              <a:tr h="658368">
+              <a:tr h="777240">
                 <a:tc>
                   <a:txBody>
                     <a:bodyPr wrap="square"/>
@@ -4122,7 +4123,8 @@
                           </a:solidFill>
                           <a:latin typeface="Apple SD Gothic Neo"/>
                         </a:rPr>
-                        <a:t>교실 허브 (B안)</a:t>
+                        <a:t>서버 재채점
++ 미제출 수동 재업로드</a:t>
                       </a:r>
                     </a:p>
                   </a:txBody>
@@ -4149,8 +4151,8 @@
                           </a:solidFill>
                           <a:latin typeface="Apple SD Gothic Neo"/>
                         </a:rPr>
-                        <a:t>학생 PC 가 초기화돼도 답안이 살아남고,
-오프라인 중에도 진행 현황판이 돈다.</a:t>
+                        <a:t>성적표가 서버 계산값 위에 서고, 포기된 녹음을
+관리자가 직접 다시 올릴 수 있다.</a:t>
                       </a:r>
                     </a:p>
                   </a:txBody>
@@ -4177,121 +4179,8 @@
                           </a:solidFill>
                           <a:latin typeface="Apple SD Gothic Neo"/>
                         </a:rPr>
-                        <a:t>FastAPI + SQLite 허브
-단말 목적지 탐색</a:t>
-                      </a:r>
-                    </a:p>
-                  </a:txBody>
-                  <a:tcPr marL="91440" marR="91440" marT="45720" marB="45720" anchor="ctr">
-                    <a:solidFill>
-                      <a:srgbClr val="FFFFFF"/>
-                    </a:solidFill>
-                  </a:tcPr>
-                </a:tc>
-              </a:tr>
-              <a:tr h="658368">
-                <a:tc>
-                  <a:txBody>
-                    <a:bodyPr wrap="square"/>
-                    <a:lstStyle/>
-                    <a:p>
-                      <a:pPr algn="l">
-                        <a:lnSpc>
-                          <a:spcPct val="120000"/>
-                        </a:lnSpc>
-                      </a:pPr>
-                      <a:r>
-                        <a:rPr sz="1000" b="1">
-                          <a:solidFill>
-                            <a:srgbClr val="101715"/>
-                          </a:solidFill>
-                          <a:latin typeface="Apple SD Gothic Neo"/>
-                        </a:rPr>
-                        <a:t>5</a:t>
-                      </a:r>
-                    </a:p>
-                  </a:txBody>
-                  <a:tcPr marL="91440" marR="91440" marT="45720" marB="45720" anchor="ctr">
-                    <a:solidFill>
-                      <a:srgbClr val="FFFFFF"/>
-                    </a:solidFill>
-                  </a:tcPr>
-                </a:tc>
-                <a:tc>
-                  <a:txBody>
-                    <a:bodyPr wrap="square"/>
-                    <a:lstStyle/>
-                    <a:p>
-                      <a:pPr algn="l">
-                        <a:lnSpc>
-                          <a:spcPct val="120000"/>
-                        </a:lnSpc>
-                      </a:pPr>
-                      <a:r>
-                        <a:rPr sz="1000" b="0">
-                          <a:solidFill>
-                            <a:srgbClr val="4E5A57"/>
-                          </a:solidFill>
-                          <a:latin typeface="Apple SD Gothic Neo"/>
-                        </a:rPr>
-                        <a:t>미제출 수동 재업로드
-· 운영 도구</a:t>
-                      </a:r>
-                    </a:p>
-                  </a:txBody>
-                  <a:tcPr marL="91440" marR="91440" marT="45720" marB="45720" anchor="ctr">
-                    <a:solidFill>
-                      <a:srgbClr val="FFFFFF"/>
-                    </a:solidFill>
-                  </a:tcPr>
-                </a:tc>
-                <a:tc>
-                  <a:txBody>
-                    <a:bodyPr wrap="square"/>
-                    <a:lstStyle/>
-                    <a:p>
-                      <a:pPr algn="l">
-                        <a:lnSpc>
-                          <a:spcPct val="120000"/>
-                        </a:lnSpc>
-                      </a:pPr>
-                      <a:r>
-                        <a:rPr sz="1000" b="0">
-                          <a:solidFill>
-                            <a:srgbClr val="4E5A57"/>
-                          </a:solidFill>
-                          <a:latin typeface="Apple SD Gothic Neo"/>
-                        </a:rPr>
-                        <a:t>포기된 녹음을 관리자가 직접 다시 올린다.
-사고 후 복구 경로가 생긴다.</a:t>
-                      </a:r>
-                    </a:p>
-                  </a:txBody>
-                  <a:tcPr marL="91440" marR="91440" marT="45720" marB="45720" anchor="ctr">
-                    <a:solidFill>
-                      <a:srgbClr val="FFFFFF"/>
-                    </a:solidFill>
-                  </a:tcPr>
-                </a:tc>
-                <a:tc>
-                  <a:txBody>
-                    <a:bodyPr wrap="square"/>
-                    <a:lstStyle/>
-                    <a:p>
-                      <a:pPr algn="l">
-                        <a:lnSpc>
-                          <a:spcPct val="120000"/>
-                        </a:lnSpc>
-                      </a:pPr>
-                      <a:r>
-                        <a:rPr sz="1000" b="0">
-                          <a:solidFill>
-                            <a:srgbClr val="4E5A57"/>
-                          </a:solidFill>
-                          <a:latin typeface="Apple SD Gothic Neo"/>
-                        </a:rPr>
-                        <a:t>관리자 화면
-허브 내보내기</a:t>
+                        <a:t>채점 파이프라인
+관리자 화면</a:t>
                       </a:r>
                     </a:p>
                   </a:txBody>
@@ -4340,7 +4229,7 @@
                 </a:solidFill>
                 <a:latin typeface="Apple SD Gothic Neo"/>
               </a:rPr>
-              <a:t>단계 2 가 끝나는 시점이 “선생님과 관리자가 자동 채점 완료를 화면에서 본다”가 성립하는 지점이다.</a:t>
+              <a:t>단계 3 이 끝나는 시점이 “선생님과 관리자가 자동 채점 완료를 화면에서 본다”가 성립하는 지점이다.</a:t>
             </a:r>
           </a:p>
         </p:txBody>
@@ -4444,7 +4333,7 @@
                 </a:solidFill>
                 <a:latin typeface="Apple SD Gothic Neo"/>
               </a:rPr>
-              <a:t>코딩 전에 정해야 할 것</a:t>
+              <a:t>코딩 전에 확인할 것</a:t>
             </a:r>
           </a:p>
         </p:txBody>
@@ -4610,13 +4499,13 @@
               </a:lnSpc>
             </a:pPr>
             <a:r>
-              <a:rPr sz="1450" b="1">
+              <a:rPr sz="1400" b="1">
                 <a:solidFill>
                   <a:srgbClr val="101715"/>
                 </a:solidFill>
                 <a:latin typeface="Apple SD Gothic Neo"/>
               </a:rPr>
-              <a:t>교실 허브(B안)를 채택하는가</a:t>
+              <a:t>시험용 PC 가 시크릿/게스트 모드나 복원 프로그램으로 관리되는가</a:t>
             </a:r>
           </a:p>
         </p:txBody>
@@ -4655,23 +4544,7 @@
                 </a:solidFill>
                 <a:latin typeface="Apple SD Gothic Neo"/>
               </a:rPr>
-              <a:t>시험장에 공유기와 선생님 노트북을 둘 수 있는지가 전부다.</a:t>
-            </a:r>
-          </a:p>
-          <a:p>
-            <a:pPr algn="l">
-              <a:lnSpc>
-                <a:spcPct val="145000"/>
-              </a:lnSpc>
-            </a:pPr>
-            <a:r>
-              <a:rPr sz="1150" b="0">
-                <a:solidFill>
-                  <a:srgbClr val="4E5A57"/>
-                </a:solidFill>
-                <a:latin typeface="Apple SD Gothic Neo"/>
-              </a:rPr>
-              <a:t>못 두면 단계 4를 빼고 운영 규칙으로 대체한다.</a:t>
+              <a:t>유일하게 남은 치명 위험이다. 그렇다면 시험용 브라우저 프로필을 예외로 빼는 세팅이 선행되어야 한다.</a:t>
             </a:r>
           </a:p>
         </p:txBody>
@@ -4763,13 +4636,13 @@
               </a:lnSpc>
             </a:pPr>
             <a:r>
-              <a:rPr sz="1450" b="1">
+              <a:rPr sz="1400" b="1">
                 <a:solidFill>
                   <a:srgbClr val="101715"/>
                 </a:solidFill>
                 <a:latin typeface="Apple SD Gothic Neo"/>
               </a:rPr>
-              <a:t>학생 계정을 언제 발급하는가</a:t>
+              <a:t>시험 종료 후 학생을 3분 붙잡아둘 수 있는가</a:t>
             </a:r>
           </a:p>
         </p:txBody>
@@ -4808,23 +4681,7 @@
                 </a:solidFill>
                 <a:latin typeface="Apple SD Gothic Neo"/>
               </a:rPr>
-              <a:t>시험 전날 온라인 시점에 미리 만들어 캐시하는 방식을 전제로 썼다.</a:t>
-            </a:r>
-          </a:p>
-          <a:p>
-            <a:pPr algn="l">
-              <a:lnSpc>
-                <a:spcPct val="145000"/>
-              </a:lnSpc>
-            </a:pPr>
-            <a:r>
-              <a:rPr sz="1150" b="0">
-                <a:solidFill>
-                  <a:srgbClr val="4E5A57"/>
-                </a:solidFill>
-                <a:latin typeface="Apple SD Gothic Neo"/>
-              </a:rPr>
-              <a:t>시험 당일 처음 만나는 학생이 있다면 다른 식별 방식이 필요하다.</a:t>
+              <a:t>안 되면 회수는 다음 부팅 회수에 전적으로 의존하게 되고, 그만큼 답안이 PC 에 남는 시간이 길어진다.</a:t>
             </a:r>
           </a:p>
         </p:txBody>
@@ -4916,13 +4773,13 @@
               </a:lnSpc>
             </a:pPr>
             <a:r>
-              <a:rPr sz="1450" b="1">
+              <a:rPr sz="1400" b="1">
                 <a:solidFill>
                   <a:srgbClr val="101715"/>
                 </a:solidFill>
                 <a:latin typeface="Apple SD Gothic Neo"/>
               </a:rPr>
-              <a:t>한 교실 규모와 녹음 총량</a:t>
+              <a:t>학생 계정을 언제 발급하는가</a:t>
             </a:r>
           </a:p>
         </p:txBody>
@@ -4961,23 +4818,7 @@
                 </a:solidFill>
                 <a:latin typeface="Apple SD Gothic Neo"/>
               </a:rPr>
-              <a:t>30명 × 스피킹 4문항 × 45초면 대략 수백 MB.</a:t>
-            </a:r>
-          </a:p>
-          <a:p>
-            <a:pPr algn="l">
-              <a:lnSpc>
-                <a:spcPct val="145000"/>
-              </a:lnSpc>
-            </a:pPr>
-            <a:r>
-              <a:rPr sz="1150" b="0">
-                <a:solidFill>
-                  <a:srgbClr val="4E5A57"/>
-                </a:solidFill>
-                <a:latin typeface="Apple SD Gothic Neo"/>
-              </a:rPr>
-              <a:t>업로드 창(시험 후 몇 분 안에 끝나야 하는지)에 따라 허브의 필요성이 갈린다.</a:t>
+              <a:t>시험 전날 온라인 시점에 미리 만들어 캐시하는 방식을 전제로 썼다. 당일 처음 만나는 학생이 있다면 다른 식별 방식이 필요하다.</a:t>
             </a:r>
           </a:p>
         </p:txBody>
@@ -5069,7 +4910,7 @@
               </a:lnSpc>
             </a:pPr>
             <a:r>
-              <a:rPr sz="1450" b="1">
+              <a:rPr sz="1400" b="1">
                 <a:solidFill>
                   <a:srgbClr val="101715"/>
                 </a:solidFill>
@@ -5114,7 +4955,7 @@
                 </a:solidFill>
                 <a:latin typeface="Apple SD Gothic Neo"/>
               </a:rPr>
-              <a:t>07 슬라이드의 anon 키 건과 직결된다.</a:t>
+              <a:t>08 슬라이드의 anon 키 건과 직결된다.</a:t>
             </a:r>
           </a:p>
         </p:txBody>
@@ -5238,7 +5079,7 @@
                 </a:solidFill>
                 <a:latin typeface="Menlo"/>
               </a:rPr>
-              <a:t>FOUNDATION</a:t>
+              <a:t>GIVEN</a:t>
             </a:r>
           </a:p>
         </p:txBody>
@@ -5277,7 +5118,7 @@
                 </a:solidFill>
                 <a:latin typeface="Apple SD Gothic Neo"/>
               </a:rPr>
-              <a:t>세 가지 원칙</a:t>
+              <a:t>확정된 전제</a:t>
             </a:r>
           </a:p>
         </p:txBody>
@@ -5364,8 +5205,8 @@
         </p:nvSpPr>
         <p:spPr>
           <a:xfrm>
-            <a:off x="685800" y="1920240"/>
-            <a:ext cx="3429000" cy="3291840"/>
+            <a:off x="685800" y="1828800"/>
+            <a:ext cx="3429000" cy="2286000"/>
           </a:xfrm>
           <a:prstGeom prst="roundRect">
             <a:avLst>
@@ -5412,7 +5253,7 @@
         </p:nvSpPr>
         <p:spPr>
           <a:xfrm>
-            <a:off x="978408" y="2212848"/>
+            <a:off x="978408" y="2084831"/>
             <a:ext cx="2834640" cy="228600"/>
           </a:xfrm>
           <a:prstGeom prst="rect">
@@ -5438,7 +5279,7 @@
                 </a:solidFill>
                 <a:latin typeface="Menlo"/>
               </a:rPr>
-              <a:t>원칙 1</a:t>
+              <a:t>회선</a:t>
             </a:r>
           </a:p>
         </p:txBody>
@@ -5451,8 +5292,8 @@
         </p:nvSpPr>
         <p:spPr>
           <a:xfrm>
-            <a:off x="978408" y="2578608"/>
-            <a:ext cx="2880360" cy="914400"/>
+            <a:off x="978408" y="2377440"/>
+            <a:ext cx="2880360" cy="685800"/>
           </a:xfrm>
           <a:prstGeom prst="rect">
             <a:avLst/>
@@ -5471,13 +5312,13 @@
               </a:lnSpc>
             </a:pPr>
             <a:r>
-              <a:rPr sz="1600" b="1">
+              <a:rPr sz="1500" b="1">
                 <a:solidFill>
                   <a:srgbClr val="101715"/>
                 </a:solidFill>
                 <a:latin typeface="Apple SD Gothic Neo"/>
               </a:rPr>
-              <a:t>네트워크는 절대</a:t>
+              <a:t>인터넷은 있다</a:t>
             </a:r>
           </a:p>
           <a:p>
@@ -5487,13 +5328,13 @@
               </a:lnSpc>
             </a:pPr>
             <a:r>
-              <a:rPr sz="1600" b="1">
+              <a:rPr sz="1500" b="1">
                 <a:solidFill>
                   <a:srgbClr val="101715"/>
                 </a:solidFill>
                 <a:latin typeface="Apple SD Gothic Neo"/>
               </a:rPr>
-              <a:t>시험을 멈추지 않는다</a:t>
+              <a:t>— 시험 중에만 끊는다</a:t>
             </a:r>
           </a:p>
         </p:txBody>
@@ -5506,8 +5347,8 @@
         </p:nvSpPr>
         <p:spPr>
           <a:xfrm>
-            <a:off x="978408" y="3657600"/>
-            <a:ext cx="2880360" cy="1371600"/>
+            <a:off x="978408" y="3200400"/>
+            <a:ext cx="2880360" cy="914400"/>
           </a:xfrm>
           <a:prstGeom prst="rect">
             <a:avLst/>
@@ -5522,65 +5363,65 @@
           <a:p>
             <a:pPr algn="l">
               <a:lnSpc>
-                <a:spcPct val="145000"/>
-              </a:lnSpc>
-            </a:pPr>
-            <a:r>
-              <a:rPr sz="1150" b="0">
+                <a:spcPct val="140000"/>
+              </a:lnSpc>
+            </a:pPr>
+            <a:r>
+              <a:rPr sz="1100" b="0">
                 <a:solidFill>
                   <a:srgbClr val="4E5A57"/>
                 </a:solidFill>
                 <a:latin typeface="Apple SD Gothic Neo"/>
               </a:rPr>
-              <a:t>모든 쓰기는 로컬에 먼저 기록되고,</a:t>
-            </a:r>
-          </a:p>
-          <a:p>
-            <a:pPr algn="l">
-              <a:lnSpc>
-                <a:spcPct val="145000"/>
-              </a:lnSpc>
-            </a:pPr>
-            <a:r>
-              <a:rPr sz="1150" b="0">
+              <a:t>부정행위 방지를 위한 차단이지</a:t>
+            </a:r>
+          </a:p>
+          <a:p>
+            <a:pPr algn="l">
+              <a:lnSpc>
+                <a:spcPct val="140000"/>
+              </a:lnSpc>
+            </a:pPr>
+            <a:r>
+              <a:rPr sz="1100" b="0">
                 <a:solidFill>
                   <a:srgbClr val="4E5A57"/>
                 </a:solidFill>
                 <a:latin typeface="Apple SD Gothic Neo"/>
               </a:rPr>
-              <a:t>업로드는 그 뒤에 따라붙는 별개의 일이다.</a:t>
-            </a:r>
-          </a:p>
-          <a:p>
-            <a:pPr algn="l">
-              <a:lnSpc>
-                <a:spcPct val="145000"/>
-              </a:lnSpc>
-            </a:pPr>
-            <a:r>
-              <a:rPr sz="1150" b="0">
+              <a:t>회선 부재가 아니다. 종료 직후</a:t>
+            </a:r>
+          </a:p>
+          <a:p>
+            <a:pPr algn="l">
+              <a:lnSpc>
+                <a:spcPct val="140000"/>
+              </a:lnSpc>
+            </a:pPr>
+            <a:r>
+              <a:rPr sz="1100" b="0">
                 <a:solidFill>
                   <a:srgbClr val="4E5A57"/>
                 </a:solidFill>
                 <a:latin typeface="Apple SD Gothic Neo"/>
               </a:rPr>
-              <a:t>업로드 실패는 시험 화면에</a:t>
-            </a:r>
-          </a:p>
-          <a:p>
-            <a:pPr algn="l">
-              <a:lnSpc>
-                <a:spcPct val="145000"/>
-              </a:lnSpc>
-            </a:pPr>
-            <a:r>
-              <a:rPr sz="1150" b="0">
+              <a:t>그 자리에서 다시 열 수 있다.</a:t>
+            </a:r>
+          </a:p>
+          <a:p>
+            <a:pPr algn="l">
+              <a:lnSpc>
+                <a:spcPct val="140000"/>
+              </a:lnSpc>
+            </a:pPr>
+            <a:r>
+              <a:rPr sz="1100" b="0">
                 <a:solidFill>
                   <a:srgbClr val="4E5A57"/>
                 </a:solidFill>
                 <a:latin typeface="Apple SD Gothic Neo"/>
               </a:rPr>
-              <a:t>어떤 영향도 주지 않는다.</a:t>
+              <a:t>→ 교실 서버는 필요 없다.</a:t>
             </a:r>
           </a:p>
         </p:txBody>
@@ -5593,8 +5434,8 @@
         </p:nvSpPr>
         <p:spPr>
           <a:xfrm>
-            <a:off x="4361688" y="1920240"/>
-            <a:ext cx="3429000" cy="3291840"/>
+            <a:off x="4361688" y="1828800"/>
+            <a:ext cx="3429000" cy="2286000"/>
           </a:xfrm>
           <a:prstGeom prst="roundRect">
             <a:avLst>
@@ -5641,7 +5482,7 @@
         </p:nvSpPr>
         <p:spPr>
           <a:xfrm>
-            <a:off x="4654296" y="2212848"/>
+            <a:off x="4654296" y="2084831"/>
             <a:ext cx="2834640" cy="228600"/>
           </a:xfrm>
           <a:prstGeom prst="rect">
@@ -5667,7 +5508,7 @@
                 </a:solidFill>
                 <a:latin typeface="Menlo"/>
               </a:rPr>
-              <a:t>원칙 2</a:t>
+              <a:t>단말</a:t>
             </a:r>
           </a:p>
         </p:txBody>
@@ -5680,8 +5521,8 @@
         </p:nvSpPr>
         <p:spPr>
           <a:xfrm>
-            <a:off x="4654296" y="2578608"/>
-            <a:ext cx="2880360" cy="914400"/>
+            <a:off x="4654296" y="2377440"/>
+            <a:ext cx="2880360" cy="685800"/>
           </a:xfrm>
           <a:prstGeom prst="rect">
             <a:avLst/>
@@ -5700,13 +5541,13 @@
               </a:lnSpc>
             </a:pPr>
             <a:r>
-              <a:rPr sz="1600" b="1">
+              <a:rPr sz="1500" b="1">
                 <a:solidFill>
                   <a:srgbClr val="101715"/>
                 </a:solidFill>
                 <a:latin typeface="Apple SD Gothic Neo"/>
               </a:rPr>
-              <a:t>답안의 정본은 로컬이다</a:t>
+              <a:t>학원 공용 PC</a:t>
             </a:r>
           </a:p>
           <a:p>
@@ -5716,13 +5557,13 @@
               </a:lnSpc>
             </a:pPr>
             <a:r>
-              <a:rPr sz="1600" b="1">
+              <a:rPr sz="1500" b="1">
                 <a:solidFill>
                   <a:srgbClr val="101715"/>
                 </a:solidFill>
                 <a:latin typeface="Apple SD Gothic Neo"/>
               </a:rPr>
-              <a:t>— 동기화될 때까지</a:t>
+              <a:t>· 다음 반이 바로 들어온다</a:t>
             </a:r>
           </a:p>
         </p:txBody>
@@ -5735,8 +5576,8 @@
         </p:nvSpPr>
         <p:spPr>
           <a:xfrm>
-            <a:off x="4654296" y="3657600"/>
-            <a:ext cx="2880360" cy="1371600"/>
+            <a:off x="4654296" y="3200400"/>
+            <a:ext cx="2880360" cy="914400"/>
           </a:xfrm>
           <a:prstGeom prst="rect">
             <a:avLst/>
@@ -5751,65 +5592,65 @@
           <a:p>
             <a:pPr algn="l">
               <a:lnSpc>
-                <a:spcPct val="145000"/>
-              </a:lnSpc>
-            </a:pPr>
-            <a:r>
-              <a:rPr sz="1150" b="0">
+                <a:spcPct val="140000"/>
+              </a:lnSpc>
+            </a:pPr>
+            <a:r>
+              <a:rPr sz="1100" b="0">
                 <a:solidFill>
                   <a:srgbClr val="4E5A57"/>
                 </a:solidFill>
                 <a:latin typeface="Apple SD Gothic Neo"/>
               </a:rPr>
-              <a:t>Supabase에 synced 로 확인받기 전에는</a:t>
-            </a:r>
-          </a:p>
-          <a:p>
-            <a:pPr algn="l">
-              <a:lnSpc>
-                <a:spcPct val="145000"/>
-              </a:lnSpc>
-            </a:pPr>
-            <a:r>
-              <a:rPr sz="1150" b="0">
+              <a:t>회수 시간이 넉넉하지 않고,</a:t>
+            </a:r>
+          </a:p>
+          <a:p>
+            <a:pPr algn="l">
+              <a:lnSpc>
+                <a:spcPct val="140000"/>
+              </a:lnSpc>
+            </a:pPr>
+            <a:r>
+              <a:rPr sz="1100" b="0">
                 <a:solidFill>
                   <a:srgbClr val="4E5A57"/>
                 </a:solidFill>
                 <a:latin typeface="Apple SD Gothic Neo"/>
               </a:rPr>
-              <a:t>로컬 데이터를 지우지 않는다.</a:t>
-            </a:r>
-          </a:p>
-          <a:p>
-            <a:pPr algn="l">
-              <a:lnSpc>
-                <a:spcPct val="145000"/>
-              </a:lnSpc>
-            </a:pPr>
-            <a:r>
-              <a:rPr sz="1150" b="0">
+              <a:t>PC에 앞 반 데이터가 남으면 안 된다.</a:t>
+            </a:r>
+          </a:p>
+          <a:p>
+            <a:pPr algn="l">
+              <a:lnSpc>
+                <a:spcPct val="140000"/>
+              </a:lnSpc>
+            </a:pPr>
+            <a:r>
+              <a:rPr sz="1100" b="0">
                 <a:solidFill>
                   <a:srgbClr val="4E5A57"/>
                 </a:solidFill>
                 <a:latin typeface="Apple SD Gothic Neo"/>
               </a:rPr>
-              <a:t>캐시 삭제·앱 재설치로 날아가지 않도록</a:t>
-            </a:r>
-          </a:p>
-          <a:p>
-            <a:pPr algn="l">
-              <a:lnSpc>
-                <a:spcPct val="145000"/>
-              </a:lnSpc>
-            </a:pPr>
-            <a:r>
-              <a:rPr sz="1150" b="0">
+              <a:t>회수와 삭제가 모두</a:t>
+            </a:r>
+          </a:p>
+          <a:p>
+            <a:pPr algn="l">
+              <a:lnSpc>
+                <a:spcPct val="140000"/>
+              </a:lnSpc>
+            </a:pPr>
+            <a:r>
+              <a:rPr sz="1100" b="0">
                 <a:solidFill>
                   <a:srgbClr val="4E5A57"/>
                 </a:solidFill>
                 <a:latin typeface="Apple SD Gothic Neo"/>
               </a:rPr>
-              <a:t>영구 저장소로 승격한다.</a:t>
+              <a:t>자동이어야 한다.</a:t>
             </a:r>
           </a:p>
         </p:txBody>
@@ -5822,8 +5663,8 @@
         </p:nvSpPr>
         <p:spPr>
           <a:xfrm>
-            <a:off x="8037575" y="1920240"/>
-            <a:ext cx="3429000" cy="3291840"/>
+            <a:off x="8037575" y="1828800"/>
+            <a:ext cx="3429000" cy="2286000"/>
           </a:xfrm>
           <a:prstGeom prst="roundRect">
             <a:avLst>
@@ -5870,7 +5711,7 @@
         </p:nvSpPr>
         <p:spPr>
           <a:xfrm>
-            <a:off x="8330183" y="2212848"/>
+            <a:off x="8330183" y="2084831"/>
             <a:ext cx="2834640" cy="228600"/>
           </a:xfrm>
           <a:prstGeom prst="rect">
@@ -5896,7 +5737,7 @@
                 </a:solidFill>
                 <a:latin typeface="Menlo"/>
               </a:rPr>
-              <a:t>원칙 3</a:t>
+              <a:t>용량</a:t>
             </a:r>
           </a:p>
         </p:txBody>
@@ -5909,8 +5750,8 @@
         </p:nvSpPr>
         <p:spPr>
           <a:xfrm>
-            <a:off x="8330183" y="2578608"/>
-            <a:ext cx="2880360" cy="914400"/>
+            <a:off x="8330183" y="2377440"/>
+            <a:ext cx="2880360" cy="685800"/>
           </a:xfrm>
           <a:prstGeom prst="rect">
             <a:avLst/>
@@ -5929,13 +5770,13 @@
               </a:lnSpc>
             </a:pPr>
             <a:r>
-              <a:rPr sz="1600" b="1">
+              <a:rPr sz="1500" b="1">
                 <a:solidFill>
                   <a:srgbClr val="101715"/>
                 </a:solidFill>
                 <a:latin typeface="Apple SD Gothic Neo"/>
               </a:rPr>
-              <a:t>같은 것을 두 번 보내도</a:t>
+              <a:t>녹음은 작다</a:t>
             </a:r>
           </a:p>
           <a:p>
@@ -5945,13 +5786,13 @@
               </a:lnSpc>
             </a:pPr>
             <a:r>
-              <a:rPr sz="1600" b="1">
+              <a:rPr sz="1500" b="1">
                 <a:solidFill>
                   <a:srgbClr val="101715"/>
                 </a:solidFill>
                 <a:latin typeface="Apple SD Gothic Neo"/>
               </a:rPr>
-              <a:t>안전해야 한다</a:t>
+              <a:t>— 병목이 아니다</a:t>
             </a:r>
           </a:p>
         </p:txBody>
@@ -5964,8 +5805,8 @@
         </p:nvSpPr>
         <p:spPr>
           <a:xfrm>
-            <a:off x="8330183" y="3657600"/>
-            <a:ext cx="2880360" cy="1371600"/>
+            <a:off x="8330183" y="3200400"/>
+            <a:ext cx="2880360" cy="914400"/>
           </a:xfrm>
           <a:prstGeom prst="rect">
             <a:avLst/>
@@ -5980,79 +5821,127 @@
           <a:p>
             <a:pPr algn="l">
               <a:lnSpc>
-                <a:spcPct val="145000"/>
-              </a:lnSpc>
-            </a:pPr>
-            <a:r>
-              <a:rPr sz="1150" b="0">
+                <a:spcPct val="140000"/>
+              </a:lnSpc>
+            </a:pPr>
+            <a:r>
+              <a:rPr sz="1100" b="0">
                 <a:solidFill>
                   <a:srgbClr val="4E5A57"/>
                 </a:solidFill>
                 <a:latin typeface="Apple SD Gothic Neo"/>
               </a:rPr>
-              <a:t>ID를 단말에서 UUID로 만들고</a:t>
-            </a:r>
-          </a:p>
-          <a:p>
-            <a:pPr algn="l">
-              <a:lnSpc>
-                <a:spcPct val="145000"/>
-              </a:lnSpc>
-            </a:pPr>
-            <a:r>
-              <a:rPr sz="1150" b="0">
+              <a:t>1인 5분 10초, 2.5–5 MB.</a:t>
+            </a:r>
+          </a:p>
+          <a:p>
+            <a:pPr algn="l">
+              <a:lnSpc>
+                <a:spcPct val="140000"/>
+              </a:lnSpc>
+            </a:pPr>
+            <a:r>
+              <a:rPr sz="1100" b="0">
                 <a:solidFill>
                   <a:srgbClr val="4E5A57"/>
                 </a:solidFill>
                 <a:latin typeface="Apple SD Gothic Neo"/>
               </a:rPr>
-              <a:t>서버는 전부 upsert 한다.</a:t>
-            </a:r>
-          </a:p>
-          <a:p>
-            <a:pPr algn="l">
-              <a:lnSpc>
-                <a:spcPct val="145000"/>
-              </a:lnSpc>
-            </a:pPr>
-            <a:r>
-              <a:rPr sz="1150" b="0">
+              <a:t>30명이면 75–150 MB.</a:t>
+            </a:r>
+          </a:p>
+          <a:p>
+            <a:pPr algn="l">
+              <a:lnSpc>
+                <a:spcPct val="140000"/>
+              </a:lnSpc>
+            </a:pPr>
+            <a:r>
+              <a:rPr sz="1100" b="0">
                 <a:solidFill>
                   <a:srgbClr val="4E5A57"/>
                 </a:solidFill>
                 <a:latin typeface="Apple SD Gothic Neo"/>
               </a:rPr>
-              <a:t>재시도·중복 전송·순서 역전이</a:t>
-            </a:r>
-          </a:p>
-          <a:p>
-            <a:pPr algn="l">
-              <a:lnSpc>
-                <a:spcPct val="145000"/>
-              </a:lnSpc>
-            </a:pPr>
-            <a:r>
-              <a:rPr sz="1150" b="0">
+              <a:t>판단 근거에서</a:t>
+            </a:r>
+          </a:p>
+          <a:p>
+            <a:pPr algn="l">
+              <a:lnSpc>
+                <a:spcPct val="140000"/>
+              </a:lnSpc>
+            </a:pPr>
+            <a:r>
+              <a:rPr sz="1100" b="0">
                 <a:solidFill>
                   <a:srgbClr val="4E5A57"/>
                 </a:solidFill>
                 <a:latin typeface="Apple SD Gothic Neo"/>
               </a:rPr>
-              <a:t>데이터를 깨뜨리지 못한다.</a:t>
-            </a:r>
-          </a:p>
-        </p:txBody>
-      </p:sp>
-      <p:sp>
-        <p:nvSpPr>
-          <p:cNvPr id="18" name="TextBox 17"/>
+              <a:t>제외해도 된다.</a:t>
+            </a:r>
+          </a:p>
+        </p:txBody>
+      </p:sp>
+      <p:sp>
+        <p:nvSpPr>
+          <p:cNvPr id="18" name="Rounded Rectangle 17"/>
+          <p:cNvSpPr/>
+          <p:nvPr/>
+        </p:nvSpPr>
+        <p:spPr>
+          <a:xfrm>
+            <a:off x="685800" y="4434840"/>
+            <a:ext cx="2606040" cy="1051560"/>
+          </a:xfrm>
+          <a:prstGeom prst="roundRect">
+            <a:avLst>
+              <a:gd name="adj" fmla="val 8000"/>
+            </a:avLst>
+          </a:prstGeom>
+          <a:solidFill>
+            <a:srgbClr val="FFFFFF"/>
+          </a:solidFill>
+          <a:ln w="12700">
+            <a:solidFill>
+              <a:srgbClr val="D2DAD7"/>
+            </a:solidFill>
+          </a:ln>
+          <a:effectLst/>
+        </p:spPr>
+        <p:style>
+          <a:lnRef idx="1">
+            <a:schemeClr val="accent1"/>
+          </a:lnRef>
+          <a:fillRef idx="3">
+            <a:schemeClr val="accent1"/>
+          </a:fillRef>
+          <a:effectRef idx="2">
+            <a:schemeClr val="accent1"/>
+          </a:effectRef>
+          <a:fontRef idx="minor">
+            <a:schemeClr val="lt1"/>
+          </a:fontRef>
+        </p:style>
+        <p:txBody>
+          <a:bodyPr rtlCol="0" anchor="ctr" wrap="square"/>
+          <a:lstStyle/>
+          <a:p>
+            <a:pPr algn="ctr"/>
+          </a:p>
+        </p:txBody>
+      </p:sp>
+      <p:sp>
+        <p:nvSpPr>
+          <p:cNvPr id="19" name="TextBox 18"/>
           <p:cNvSpPr txBox="1"/>
           <p:nvPr/>
         </p:nvSpPr>
         <p:spPr>
           <a:xfrm>
-            <a:off x="685800" y="6199632"/>
-            <a:ext cx="10789920" cy="365760"/>
+            <a:off x="914400" y="4599432"/>
+            <a:ext cx="2194560" cy="201168"/>
           </a:xfrm>
           <a:prstGeom prst="rect">
             <a:avLst/>
@@ -6071,13 +5960,625 @@
               </a:lnSpc>
             </a:pPr>
             <a:r>
+              <a:rPr sz="900" b="0" spc="100">
+                <a:solidFill>
+                  <a:srgbClr val="78837F"/>
+                </a:solidFill>
+                <a:latin typeface="Menlo"/>
+              </a:rPr>
+              <a:t>1인 녹음 시간</a:t>
+            </a:r>
+          </a:p>
+        </p:txBody>
+      </p:sp>
+      <p:sp>
+        <p:nvSpPr>
+          <p:cNvPr id="20" name="TextBox 19"/>
+          <p:cNvSpPr txBox="1"/>
+          <p:nvPr/>
+        </p:nvSpPr>
+        <p:spPr>
+          <a:xfrm>
+            <a:off x="914400" y="4828032"/>
+            <a:ext cx="2194560" cy="320040"/>
+          </a:xfrm>
+          <a:prstGeom prst="rect">
+            <a:avLst/>
+          </a:prstGeom>
+          <a:noFill/>
+        </p:spPr>
+        <p:txBody>
+          <a:bodyPr wrap="square" lIns="0" rIns="0" tIns="0" bIns="0" anchor="t">
+            <a:spAutoFit/>
+          </a:bodyPr>
+          <a:lstStyle/>
+          <a:p>
+            <a:pPr algn="l">
+              <a:lnSpc>
+                <a:spcPct val="135000"/>
+              </a:lnSpc>
+            </a:pPr>
+            <a:r>
+              <a:rPr sz="1900" b="1">
+                <a:solidFill>
+                  <a:srgbClr val="101715"/>
+                </a:solidFill>
+                <a:latin typeface="Apple SD Gothic Neo"/>
+              </a:rPr>
+              <a:t>5분 10초</a:t>
+            </a:r>
+          </a:p>
+        </p:txBody>
+      </p:sp>
+      <p:sp>
+        <p:nvSpPr>
+          <p:cNvPr id="21" name="TextBox 20"/>
+          <p:cNvSpPr txBox="1"/>
+          <p:nvPr/>
+        </p:nvSpPr>
+        <p:spPr>
+          <a:xfrm>
+            <a:off x="914400" y="5175504"/>
+            <a:ext cx="2240280" cy="228600"/>
+          </a:xfrm>
+          <a:prstGeom prst="rect">
+            <a:avLst/>
+          </a:prstGeom>
+          <a:noFill/>
+        </p:spPr>
+        <p:txBody>
+          <a:bodyPr wrap="square" lIns="0" rIns="0" tIns="0" bIns="0" anchor="t">
+            <a:spAutoFit/>
+          </a:bodyPr>
+          <a:lstStyle/>
+          <a:p>
+            <a:pPr algn="l">
+              <a:lnSpc>
+                <a:spcPct val="135000"/>
+              </a:lnSpc>
+            </a:pPr>
+            <a:r>
+              <a:rPr sz="850" b="0">
+                <a:solidFill>
+                  <a:srgbClr val="4E5A57"/>
+                </a:solidFill>
+                <a:latin typeface="Apple SD Gothic Neo"/>
+              </a:rPr>
+              <a:t>SR 12문항 + Interview 4문항</a:t>
+            </a:r>
+          </a:p>
+        </p:txBody>
+      </p:sp>
+      <p:sp>
+        <p:nvSpPr>
+          <p:cNvPr id="22" name="Rounded Rectangle 21"/>
+          <p:cNvSpPr/>
+          <p:nvPr/>
+        </p:nvSpPr>
+        <p:spPr>
+          <a:xfrm>
+            <a:off x="3429000" y="4434840"/>
+            <a:ext cx="2606040" cy="1051560"/>
+          </a:xfrm>
+          <a:prstGeom prst="roundRect">
+            <a:avLst>
+              <a:gd name="adj" fmla="val 8000"/>
+            </a:avLst>
+          </a:prstGeom>
+          <a:solidFill>
+            <a:srgbClr val="FFFFFF"/>
+          </a:solidFill>
+          <a:ln w="12700">
+            <a:solidFill>
+              <a:srgbClr val="D2DAD7"/>
+            </a:solidFill>
+          </a:ln>
+          <a:effectLst/>
+        </p:spPr>
+        <p:style>
+          <a:lnRef idx="1">
+            <a:schemeClr val="accent1"/>
+          </a:lnRef>
+          <a:fillRef idx="3">
+            <a:schemeClr val="accent1"/>
+          </a:fillRef>
+          <a:effectRef idx="2">
+            <a:schemeClr val="accent1"/>
+          </a:effectRef>
+          <a:fontRef idx="minor">
+            <a:schemeClr val="lt1"/>
+          </a:fontRef>
+        </p:style>
+        <p:txBody>
+          <a:bodyPr rtlCol="0" anchor="ctr" wrap="square"/>
+          <a:lstStyle/>
+          <a:p>
+            <a:pPr algn="ctr"/>
+          </a:p>
+        </p:txBody>
+      </p:sp>
+      <p:sp>
+        <p:nvSpPr>
+          <p:cNvPr id="23" name="TextBox 22"/>
+          <p:cNvSpPr txBox="1"/>
+          <p:nvPr/>
+        </p:nvSpPr>
+        <p:spPr>
+          <a:xfrm>
+            <a:off x="3657600" y="4599432"/>
+            <a:ext cx="2194560" cy="201168"/>
+          </a:xfrm>
+          <a:prstGeom prst="rect">
+            <a:avLst/>
+          </a:prstGeom>
+          <a:noFill/>
+        </p:spPr>
+        <p:txBody>
+          <a:bodyPr wrap="square" lIns="0" rIns="0" tIns="0" bIns="0" anchor="t">
+            <a:spAutoFit/>
+          </a:bodyPr>
+          <a:lstStyle/>
+          <a:p>
+            <a:pPr algn="l">
+              <a:lnSpc>
+                <a:spcPct val="135000"/>
+              </a:lnSpc>
+            </a:pPr>
+            <a:r>
+              <a:rPr sz="900" b="0" spc="100">
+                <a:solidFill>
+                  <a:srgbClr val="78837F"/>
+                </a:solidFill>
+                <a:latin typeface="Menlo"/>
+              </a:rPr>
+              <a:t>1인 용량</a:t>
+            </a:r>
+          </a:p>
+        </p:txBody>
+      </p:sp>
+      <p:sp>
+        <p:nvSpPr>
+          <p:cNvPr id="24" name="TextBox 23"/>
+          <p:cNvSpPr txBox="1"/>
+          <p:nvPr/>
+        </p:nvSpPr>
+        <p:spPr>
+          <a:xfrm>
+            <a:off x="3657600" y="4828032"/>
+            <a:ext cx="2194560" cy="320040"/>
+          </a:xfrm>
+          <a:prstGeom prst="rect">
+            <a:avLst/>
+          </a:prstGeom>
+          <a:noFill/>
+        </p:spPr>
+        <p:txBody>
+          <a:bodyPr wrap="square" lIns="0" rIns="0" tIns="0" bIns="0" anchor="t">
+            <a:spAutoFit/>
+          </a:bodyPr>
+          <a:lstStyle/>
+          <a:p>
+            <a:pPr algn="l">
+              <a:lnSpc>
+                <a:spcPct val="135000"/>
+              </a:lnSpc>
+            </a:pPr>
+            <a:r>
+              <a:rPr sz="1900" b="1">
+                <a:solidFill>
+                  <a:srgbClr val="101715"/>
+                </a:solidFill>
+                <a:latin typeface="Apple SD Gothic Neo"/>
+              </a:rPr>
+              <a:t>2.5–5 MB</a:t>
+            </a:r>
+          </a:p>
+        </p:txBody>
+      </p:sp>
+      <p:sp>
+        <p:nvSpPr>
+          <p:cNvPr id="25" name="TextBox 24"/>
+          <p:cNvSpPr txBox="1"/>
+          <p:nvPr/>
+        </p:nvSpPr>
+        <p:spPr>
+          <a:xfrm>
+            <a:off x="3657600" y="5175504"/>
+            <a:ext cx="2240280" cy="228600"/>
+          </a:xfrm>
+          <a:prstGeom prst="rect">
+            <a:avLst/>
+          </a:prstGeom>
+          <a:noFill/>
+        </p:spPr>
+        <p:txBody>
+          <a:bodyPr wrap="square" lIns="0" rIns="0" tIns="0" bIns="0" anchor="t">
+            <a:spAutoFit/>
+          </a:bodyPr>
+          <a:lstStyle/>
+          <a:p>
+            <a:pPr algn="l">
+              <a:lnSpc>
+                <a:spcPct val="135000"/>
+              </a:lnSpc>
+            </a:pPr>
+            <a:r>
+              <a:rPr sz="850" b="0">
+                <a:solidFill>
+                  <a:srgbClr val="4E5A57"/>
+                </a:solidFill>
+                <a:latin typeface="Apple SD Gothic Neo"/>
+              </a:rPr>
+              <a:t>Opus, 브라우저 기본 비트레이트</a:t>
+            </a:r>
+          </a:p>
+        </p:txBody>
+      </p:sp>
+      <p:sp>
+        <p:nvSpPr>
+          <p:cNvPr id="26" name="Rounded Rectangle 25"/>
+          <p:cNvSpPr/>
+          <p:nvPr/>
+        </p:nvSpPr>
+        <p:spPr>
+          <a:xfrm>
+            <a:off x="6172200" y="4434840"/>
+            <a:ext cx="2606040" cy="1051560"/>
+          </a:xfrm>
+          <a:prstGeom prst="roundRect">
+            <a:avLst>
+              <a:gd name="adj" fmla="val 8000"/>
+            </a:avLst>
+          </a:prstGeom>
+          <a:solidFill>
+            <a:srgbClr val="FFFFFF"/>
+          </a:solidFill>
+          <a:ln w="12700">
+            <a:solidFill>
+              <a:srgbClr val="D2DAD7"/>
+            </a:solidFill>
+          </a:ln>
+          <a:effectLst/>
+        </p:spPr>
+        <p:style>
+          <a:lnRef idx="1">
+            <a:schemeClr val="accent1"/>
+          </a:lnRef>
+          <a:fillRef idx="3">
+            <a:schemeClr val="accent1"/>
+          </a:fillRef>
+          <a:effectRef idx="2">
+            <a:schemeClr val="accent1"/>
+          </a:effectRef>
+          <a:fontRef idx="minor">
+            <a:schemeClr val="lt1"/>
+          </a:fontRef>
+        </p:style>
+        <p:txBody>
+          <a:bodyPr rtlCol="0" anchor="ctr" wrap="square"/>
+          <a:lstStyle/>
+          <a:p>
+            <a:pPr algn="ctr"/>
+          </a:p>
+        </p:txBody>
+      </p:sp>
+      <p:sp>
+        <p:nvSpPr>
+          <p:cNvPr id="27" name="TextBox 26"/>
+          <p:cNvSpPr txBox="1"/>
+          <p:nvPr/>
+        </p:nvSpPr>
+        <p:spPr>
+          <a:xfrm>
+            <a:off x="6400800" y="4599432"/>
+            <a:ext cx="2194560" cy="201168"/>
+          </a:xfrm>
+          <a:prstGeom prst="rect">
+            <a:avLst/>
+          </a:prstGeom>
+          <a:noFill/>
+        </p:spPr>
+        <p:txBody>
+          <a:bodyPr wrap="square" lIns="0" rIns="0" tIns="0" bIns="0" anchor="t">
+            <a:spAutoFit/>
+          </a:bodyPr>
+          <a:lstStyle/>
+          <a:p>
+            <a:pPr algn="l">
+              <a:lnSpc>
+                <a:spcPct val="135000"/>
+              </a:lnSpc>
+            </a:pPr>
+            <a:r>
+              <a:rPr sz="900" b="0" spc="100">
+                <a:solidFill>
+                  <a:srgbClr val="78837F"/>
+                </a:solidFill>
+                <a:latin typeface="Menlo"/>
+              </a:rPr>
+              <a:t>30명 총량</a:t>
+            </a:r>
+          </a:p>
+        </p:txBody>
+      </p:sp>
+      <p:sp>
+        <p:nvSpPr>
+          <p:cNvPr id="28" name="TextBox 27"/>
+          <p:cNvSpPr txBox="1"/>
+          <p:nvPr/>
+        </p:nvSpPr>
+        <p:spPr>
+          <a:xfrm>
+            <a:off x="6400800" y="4828032"/>
+            <a:ext cx="2194560" cy="320040"/>
+          </a:xfrm>
+          <a:prstGeom prst="rect">
+            <a:avLst/>
+          </a:prstGeom>
+          <a:noFill/>
+        </p:spPr>
+        <p:txBody>
+          <a:bodyPr wrap="square" lIns="0" rIns="0" tIns="0" bIns="0" anchor="t">
+            <a:spAutoFit/>
+          </a:bodyPr>
+          <a:lstStyle/>
+          <a:p>
+            <a:pPr algn="l">
+              <a:lnSpc>
+                <a:spcPct val="135000"/>
+              </a:lnSpc>
+            </a:pPr>
+            <a:r>
+              <a:rPr sz="1900" b="1">
+                <a:solidFill>
+                  <a:srgbClr val="101715"/>
+                </a:solidFill>
+                <a:latin typeface="Apple SD Gothic Neo"/>
+              </a:rPr>
+              <a:t>75–150 MB</a:t>
+            </a:r>
+          </a:p>
+        </p:txBody>
+      </p:sp>
+      <p:sp>
+        <p:nvSpPr>
+          <p:cNvPr id="29" name="TextBox 28"/>
+          <p:cNvSpPr txBox="1"/>
+          <p:nvPr/>
+        </p:nvSpPr>
+        <p:spPr>
+          <a:xfrm>
+            <a:off x="6400800" y="5175504"/>
+            <a:ext cx="2240280" cy="228600"/>
+          </a:xfrm>
+          <a:prstGeom prst="rect">
+            <a:avLst/>
+          </a:prstGeom>
+          <a:noFill/>
+        </p:spPr>
+        <p:txBody>
+          <a:bodyPr wrap="square" lIns="0" rIns="0" tIns="0" bIns="0" anchor="t">
+            <a:spAutoFit/>
+          </a:bodyPr>
+          <a:lstStyle/>
+          <a:p>
+            <a:pPr algn="l">
+              <a:lnSpc>
+                <a:spcPct val="135000"/>
+              </a:lnSpc>
+            </a:pPr>
+            <a:r>
+              <a:rPr sz="850" b="0">
+                <a:solidFill>
+                  <a:srgbClr val="4E5A57"/>
+                </a:solidFill>
+                <a:latin typeface="Apple SD Gothic Neo"/>
+              </a:rPr>
+              <a:t>답안 텍스트는 무시해도 될 크기</a:t>
+            </a:r>
+          </a:p>
+        </p:txBody>
+      </p:sp>
+      <p:sp>
+        <p:nvSpPr>
+          <p:cNvPr id="30" name="Rounded Rectangle 29"/>
+          <p:cNvSpPr/>
+          <p:nvPr/>
+        </p:nvSpPr>
+        <p:spPr>
+          <a:xfrm>
+            <a:off x="8915400" y="4434840"/>
+            <a:ext cx="2606040" cy="1051560"/>
+          </a:xfrm>
+          <a:prstGeom prst="roundRect">
+            <a:avLst>
+              <a:gd name="adj" fmla="val 8000"/>
+            </a:avLst>
+          </a:prstGeom>
+          <a:solidFill>
+            <a:srgbClr val="FFFFFF"/>
+          </a:solidFill>
+          <a:ln w="12700">
+            <a:solidFill>
+              <a:srgbClr val="D2DAD7"/>
+            </a:solidFill>
+          </a:ln>
+          <a:effectLst/>
+        </p:spPr>
+        <p:style>
+          <a:lnRef idx="1">
+            <a:schemeClr val="accent1"/>
+          </a:lnRef>
+          <a:fillRef idx="3">
+            <a:schemeClr val="accent1"/>
+          </a:fillRef>
+          <a:effectRef idx="2">
+            <a:schemeClr val="accent1"/>
+          </a:effectRef>
+          <a:fontRef idx="minor">
+            <a:schemeClr val="lt1"/>
+          </a:fontRef>
+        </p:style>
+        <p:txBody>
+          <a:bodyPr rtlCol="0" anchor="ctr" wrap="square"/>
+          <a:lstStyle/>
+          <a:p>
+            <a:pPr algn="ctr"/>
+          </a:p>
+        </p:txBody>
+      </p:sp>
+      <p:sp>
+        <p:nvSpPr>
+          <p:cNvPr id="31" name="TextBox 30"/>
+          <p:cNvSpPr txBox="1"/>
+          <p:nvPr/>
+        </p:nvSpPr>
+        <p:spPr>
+          <a:xfrm>
+            <a:off x="9144000" y="4599432"/>
+            <a:ext cx="2194560" cy="201168"/>
+          </a:xfrm>
+          <a:prstGeom prst="rect">
+            <a:avLst/>
+          </a:prstGeom>
+          <a:noFill/>
+        </p:spPr>
+        <p:txBody>
+          <a:bodyPr wrap="square" lIns="0" rIns="0" tIns="0" bIns="0" anchor="t">
+            <a:spAutoFit/>
+          </a:bodyPr>
+          <a:lstStyle/>
+          <a:p>
+            <a:pPr algn="l">
+              <a:lnSpc>
+                <a:spcPct val="135000"/>
+              </a:lnSpc>
+            </a:pPr>
+            <a:r>
+              <a:rPr sz="900" b="0" spc="100">
+                <a:solidFill>
+                  <a:srgbClr val="78837F"/>
+                </a:solidFill>
+                <a:latin typeface="Menlo"/>
+              </a:rPr>
+              <a:t>업로드 소요</a:t>
+            </a:r>
+          </a:p>
+        </p:txBody>
+      </p:sp>
+      <p:sp>
+        <p:nvSpPr>
+          <p:cNvPr id="32" name="TextBox 31"/>
+          <p:cNvSpPr txBox="1"/>
+          <p:nvPr/>
+        </p:nvSpPr>
+        <p:spPr>
+          <a:xfrm>
+            <a:off x="9144000" y="4828032"/>
+            <a:ext cx="2194560" cy="320040"/>
+          </a:xfrm>
+          <a:prstGeom prst="rect">
+            <a:avLst/>
+          </a:prstGeom>
+          <a:noFill/>
+        </p:spPr>
+        <p:txBody>
+          <a:bodyPr wrap="square" lIns="0" rIns="0" tIns="0" bIns="0" anchor="t">
+            <a:spAutoFit/>
+          </a:bodyPr>
+          <a:lstStyle/>
+          <a:p>
+            <a:pPr algn="l">
+              <a:lnSpc>
+                <a:spcPct val="135000"/>
+              </a:lnSpc>
+            </a:pPr>
+            <a:r>
+              <a:rPr sz="1900" b="1">
+                <a:solidFill>
+                  <a:srgbClr val="101715"/>
+                </a:solidFill>
+                <a:latin typeface="Apple SD Gothic Neo"/>
+              </a:rPr>
+              <a:t>2–3분</a:t>
+            </a:r>
+          </a:p>
+        </p:txBody>
+      </p:sp>
+      <p:sp>
+        <p:nvSpPr>
+          <p:cNvPr id="33" name="TextBox 32"/>
+          <p:cNvSpPr txBox="1"/>
+          <p:nvPr/>
+        </p:nvSpPr>
+        <p:spPr>
+          <a:xfrm>
+            <a:off x="9144000" y="5175504"/>
+            <a:ext cx="2240280" cy="228600"/>
+          </a:xfrm>
+          <a:prstGeom prst="rect">
+            <a:avLst/>
+          </a:prstGeom>
+          <a:noFill/>
+        </p:spPr>
+        <p:txBody>
+          <a:bodyPr wrap="square" lIns="0" rIns="0" tIns="0" bIns="0" anchor="t">
+            <a:spAutoFit/>
+          </a:bodyPr>
+          <a:lstStyle/>
+          <a:p>
+            <a:pPr algn="l">
+              <a:lnSpc>
+                <a:spcPct val="135000"/>
+              </a:lnSpc>
+            </a:pPr>
+            <a:r>
+              <a:rPr sz="850" b="0">
+                <a:solidFill>
+                  <a:srgbClr val="4E5A57"/>
+                </a:solidFill>
+                <a:latin typeface="Apple SD Gothic Neo"/>
+              </a:rPr>
+              <a:t>업링크 10 Mbps 기준</a:t>
+            </a:r>
+          </a:p>
+        </p:txBody>
+      </p:sp>
+      <p:sp>
+        <p:nvSpPr>
+          <p:cNvPr id="34" name="TextBox 33"/>
+          <p:cNvSpPr txBox="1"/>
+          <p:nvPr/>
+        </p:nvSpPr>
+        <p:spPr>
+          <a:xfrm>
+            <a:off x="685800" y="6199632"/>
+            <a:ext cx="10789920" cy="365760"/>
+          </a:xfrm>
+          <a:prstGeom prst="rect">
+            <a:avLst/>
+          </a:prstGeom>
+          <a:noFill/>
+        </p:spPr>
+        <p:txBody>
+          <a:bodyPr wrap="square" lIns="0" rIns="0" tIns="0" bIns="0" anchor="t">
+            <a:spAutoFit/>
+          </a:bodyPr>
+          <a:lstStyle/>
+          <a:p>
+            <a:pPr algn="l">
+              <a:lnSpc>
+                <a:spcPct val="135000"/>
+              </a:lnSpc>
+            </a:pPr>
+            <a:r>
               <a:rPr sz="1050" b="0">
                 <a:solidFill>
                   <a:srgbClr val="78837F"/>
                 </a:solidFill>
                 <a:latin typeface="Apple SD Gothic Neo"/>
               </a:rPr>
-              <a:t>이 셋은 트레이드오프가 아니라 전제다. 어느 하나가 깨지면 나머지 설계가 의미를 잃는다.</a:t>
+              <a:t>숫자가 이렇게 나오는 이상 설계 질문은 “어떻게 옮길 것인가”가 아니라 “누가, 언제 올리는 버튼을 누르는가” 하나로 좁혀진다.</a:t>
             </a:r>
           </a:p>
         </p:txBody>
@@ -6142,7 +6643,7 @@
                 </a:solidFill>
                 <a:latin typeface="Menlo"/>
               </a:rPr>
-              <a:t>ARCHITECTURE</a:t>
+              <a:t>TIMELINE</a:t>
             </a:r>
           </a:p>
         </p:txBody>
@@ -6181,7 +6682,7 @@
                 </a:solidFill>
                 <a:latin typeface="Apple SD Gothic Neo"/>
               </a:rPr>
-              <a:t>데이터가 지나가는 길</a:t>
+              <a:t>회수창 — 시험 종료 후 3분</a:t>
             </a:r>
           </a:p>
         </p:txBody>
@@ -6294,398 +6795,29 @@
                 </a:solidFill>
                 <a:latin typeface="Apple SD Gothic Neo"/>
               </a:rPr>
-              <a:t>답안 한 건은 네 개의 보관소를 지난다. 각 구간은 앞 구간이 확인을 돌려줄 때까지 자기 사본을 버리지 않는다.</a:t>
-            </a:r>
-          </a:p>
-        </p:txBody>
-      </p:sp>
-      <p:sp>
-        <p:nvSpPr>
-          <p:cNvPr id="7" name="TextBox 6"/>
-          <p:cNvSpPr txBox="1"/>
-          <p:nvPr/>
-        </p:nvSpPr>
-        <p:spPr>
-          <a:xfrm>
-            <a:off x="685800" y="2029968"/>
-            <a:ext cx="2926080" cy="228600"/>
-          </a:xfrm>
-          <a:prstGeom prst="rect">
-            <a:avLst/>
-          </a:prstGeom>
-          <a:noFill/>
-        </p:spPr>
-        <p:txBody>
-          <a:bodyPr wrap="square" lIns="0" rIns="0" tIns="0" bIns="0" anchor="t">
-            <a:spAutoFit/>
-          </a:bodyPr>
-          <a:lstStyle/>
-          <a:p>
-            <a:pPr algn="l">
-              <a:lnSpc>
-                <a:spcPct val="135000"/>
-              </a:lnSpc>
-            </a:pPr>
-            <a:r>
-              <a:rPr sz="950" b="0" spc="120">
-                <a:solidFill>
-                  <a:srgbClr val="78837F"/>
-                </a:solidFill>
-                <a:latin typeface="Menlo"/>
-              </a:rPr>
-              <a:t>① 응시 단말 · 오프라인</a:t>
-            </a:r>
-          </a:p>
-        </p:txBody>
-      </p:sp>
-      <p:sp>
-        <p:nvSpPr>
-          <p:cNvPr id="8" name="Rounded Rectangle 7"/>
-          <p:cNvSpPr/>
-          <p:nvPr/>
-        </p:nvSpPr>
-        <p:spPr>
-          <a:xfrm>
-            <a:off x="685800" y="2331720"/>
-            <a:ext cx="2606040" cy="2514600"/>
-          </a:xfrm>
-          <a:prstGeom prst="roundRect">
-            <a:avLst>
-              <a:gd name="adj" fmla="val 8000"/>
-            </a:avLst>
-          </a:prstGeom>
-          <a:noFill/>
-          <a:ln w="15875">
-            <a:solidFill>
-              <a:srgbClr val="101715"/>
-            </a:solidFill>
-          </a:ln>
-          <a:effectLst/>
-        </p:spPr>
-        <p:style>
-          <a:lnRef idx="1">
-            <a:schemeClr val="accent1"/>
-          </a:lnRef>
-          <a:fillRef idx="3">
-            <a:schemeClr val="accent1"/>
-          </a:fillRef>
-          <a:effectRef idx="2">
-            <a:schemeClr val="accent1"/>
-          </a:effectRef>
-          <a:fontRef idx="minor">
-            <a:schemeClr val="lt1"/>
-          </a:fontRef>
-        </p:style>
-        <p:txBody>
-          <a:bodyPr rtlCol="0" anchor="ctr" wrap="square"/>
-          <a:lstStyle/>
-          <a:p>
-            <a:pPr algn="ctr"/>
-          </a:p>
-        </p:txBody>
-      </p:sp>
-      <p:sp>
-        <p:nvSpPr>
-          <p:cNvPr id="9" name="Rounded Rectangle 8"/>
-          <p:cNvSpPr/>
-          <p:nvPr/>
-        </p:nvSpPr>
-        <p:spPr>
-          <a:xfrm>
-            <a:off x="868680" y="2496312"/>
-            <a:ext cx="2240280" cy="256032"/>
-          </a:xfrm>
-          <a:prstGeom prst="roundRect">
-            <a:avLst>
-              <a:gd name="adj" fmla="val 8000"/>
-            </a:avLst>
-          </a:prstGeom>
-          <a:noFill/>
-          <a:ln>
-            <a:noFill/>
-          </a:ln>
-          <a:effectLst/>
-        </p:spPr>
-        <p:style>
-          <a:lnRef idx="1">
-            <a:schemeClr val="accent1"/>
-          </a:lnRef>
-          <a:fillRef idx="3">
-            <a:schemeClr val="accent1"/>
-          </a:fillRef>
-          <a:effectRef idx="2">
-            <a:schemeClr val="accent1"/>
-          </a:effectRef>
-          <a:fontRef idx="minor">
-            <a:schemeClr val="lt1"/>
-          </a:fontRef>
-        </p:style>
-        <p:txBody>
-          <a:bodyPr rtlCol="0" anchor="ctr" wrap="square" lIns="128016" rIns="128016" tIns="54864" bIns="54864"/>
-          <a:lstStyle/>
-          <a:p>
-            <a:pPr algn="l">
-              <a:lnSpc>
-                <a:spcPct val="125000"/>
-              </a:lnSpc>
-            </a:pPr>
-            <a:r>
-              <a:rPr sz="1150" b="1">
-                <a:solidFill>
-                  <a:srgbClr val="101715"/>
-                </a:solidFill>
-                <a:latin typeface="Apple SD Gothic Neo"/>
-              </a:rPr>
-              <a:t>학생 PC · PWA (×30)</a:t>
-            </a:r>
-          </a:p>
-        </p:txBody>
-      </p:sp>
-      <p:sp>
-        <p:nvSpPr>
-          <p:cNvPr id="10" name="Rounded Rectangle 9"/>
-          <p:cNvSpPr/>
-          <p:nvPr/>
-        </p:nvSpPr>
-        <p:spPr>
-          <a:xfrm>
-            <a:off x="868680" y="2834639"/>
-            <a:ext cx="2240280" cy="566928"/>
-          </a:xfrm>
-          <a:prstGeom prst="roundRect">
-            <a:avLst>
-              <a:gd name="adj" fmla="val 8000"/>
-            </a:avLst>
-          </a:prstGeom>
-          <a:solidFill>
-            <a:srgbClr val="E4E9E7"/>
-          </a:solidFill>
-          <a:ln>
-            <a:noFill/>
-          </a:ln>
-          <a:effectLst/>
-        </p:spPr>
-        <p:style>
-          <a:lnRef idx="1">
-            <a:schemeClr val="accent1"/>
-          </a:lnRef>
-          <a:fillRef idx="3">
-            <a:schemeClr val="accent1"/>
-          </a:fillRef>
-          <a:effectRef idx="2">
-            <a:schemeClr val="accent1"/>
-          </a:effectRef>
-          <a:fontRef idx="minor">
-            <a:schemeClr val="lt1"/>
-          </a:fontRef>
-        </p:style>
-        <p:txBody>
-          <a:bodyPr rtlCol="0" anchor="ctr" wrap="square" lIns="128016" rIns="128016" tIns="54864" bIns="54864"/>
-          <a:lstStyle/>
-          <a:p>
-            <a:pPr algn="l">
-              <a:lnSpc>
-                <a:spcPct val="125000"/>
-              </a:lnSpc>
-            </a:pPr>
-            <a:r>
-              <a:rPr sz="1050" b="0">
-                <a:solidFill>
-                  <a:srgbClr val="101715"/>
-                </a:solidFill>
-                <a:latin typeface="Apple SD Gothic Neo"/>
-              </a:rPr>
-              <a:t>IndexedDB — 답안 · 녹음</a:t>
-            </a:r>
-          </a:p>
-          <a:p>
-            <a:pPr algn="l">
-              <a:lnSpc>
-                <a:spcPct val="125000"/>
-              </a:lnSpc>
-            </a:pPr>
-            <a:r>
-              <a:rPr sz="900" b="0">
-                <a:solidFill>
-                  <a:srgbClr val="78837F"/>
-                </a:solidFill>
-                <a:latin typeface="Apple SD Gothic Neo"/>
-              </a:rPr>
-              <a:t>문항 저장 즉시 기록</a:t>
-            </a:r>
-          </a:p>
-        </p:txBody>
-      </p:sp>
-      <p:sp>
-        <p:nvSpPr>
-          <p:cNvPr id="11" name="Rounded Rectangle 10"/>
-          <p:cNvSpPr/>
-          <p:nvPr/>
-        </p:nvSpPr>
-        <p:spPr>
-          <a:xfrm>
-            <a:off x="868680" y="3493008"/>
-            <a:ext cx="2240280" cy="566928"/>
-          </a:xfrm>
-          <a:prstGeom prst="roundRect">
-            <a:avLst>
-              <a:gd name="adj" fmla="val 8000"/>
-            </a:avLst>
-          </a:prstGeom>
-          <a:solidFill>
-            <a:srgbClr val="E4E9E7"/>
-          </a:solidFill>
-          <a:ln>
-            <a:noFill/>
-          </a:ln>
-          <a:effectLst/>
-        </p:spPr>
-        <p:style>
-          <a:lnRef idx="1">
-            <a:schemeClr val="accent1"/>
-          </a:lnRef>
-          <a:fillRef idx="3">
-            <a:schemeClr val="accent1"/>
-          </a:fillRef>
-          <a:effectRef idx="2">
-            <a:schemeClr val="accent1"/>
-          </a:effectRef>
-          <a:fontRef idx="minor">
-            <a:schemeClr val="lt1"/>
-          </a:fontRef>
-        </p:style>
-        <p:txBody>
-          <a:bodyPr rtlCol="0" anchor="ctr" wrap="square" lIns="128016" rIns="128016" tIns="54864" bIns="54864"/>
-          <a:lstStyle/>
-          <a:p>
-            <a:pPr algn="l">
-              <a:lnSpc>
-                <a:spcPct val="125000"/>
-              </a:lnSpc>
-            </a:pPr>
-            <a:r>
-              <a:rPr sz="1050" b="0">
-                <a:solidFill>
-                  <a:srgbClr val="101715"/>
-                </a:solidFill>
-                <a:latin typeface="Apple SD Gothic Neo"/>
-              </a:rPr>
-              <a:t>Outbox 큐</a:t>
-            </a:r>
-          </a:p>
-          <a:p>
-            <a:pPr algn="l">
-              <a:lnSpc>
-                <a:spcPct val="125000"/>
-              </a:lnSpc>
-            </a:pPr>
-            <a:r>
-              <a:rPr sz="900" b="0">
-                <a:solidFill>
-                  <a:srgbClr val="78837F"/>
-                </a:solidFill>
-                <a:latin typeface="Apple SD Gothic Neo"/>
-              </a:rPr>
-              <a:t>보낼 것만 순번(seq)으로 적재</a:t>
-            </a:r>
-          </a:p>
-        </p:txBody>
-      </p:sp>
-      <p:sp>
-        <p:nvSpPr>
-          <p:cNvPr id="12" name="Rounded Rectangle 11"/>
-          <p:cNvSpPr/>
-          <p:nvPr/>
-        </p:nvSpPr>
-        <p:spPr>
-          <a:xfrm>
-            <a:off x="868680" y="4151376"/>
-            <a:ext cx="2240280" cy="530352"/>
-          </a:xfrm>
-          <a:prstGeom prst="roundRect">
-            <a:avLst>
-              <a:gd name="adj" fmla="val 8000"/>
-            </a:avLst>
-          </a:prstGeom>
-          <a:noFill/>
-          <a:ln w="12700">
+              <a:t>업로드는 학생 브라우저 안에서만 돈다. 학생이 창을 닫고 나가면 그 답안은 잠든다.</a:t>
+            </a:r>
+          </a:p>
+        </p:txBody>
+      </p:sp>
+      <p:cxnSp>
+        <p:nvCxnSpPr>
+          <p:cNvPr id="7" name="Connector 6"/>
+          <p:cNvCxnSpPr/>
+          <p:nvPr/>
+        </p:nvCxnSpPr>
+        <p:spPr>
+          <a:xfrm>
+            <a:off x="777240" y="3703320"/>
+            <a:ext cx="10698480" cy="0"/>
+          </a:xfrm>
+          <a:prstGeom prst="line">
+            <a:avLst/>
+          </a:prstGeom>
+          <a:ln w="19050">
             <a:solidFill>
               <a:srgbClr val="D2DAD7"/>
             </a:solidFill>
-            <a:prstDash val="dash"/>
-          </a:ln>
-          <a:effectLst/>
-        </p:spPr>
-        <p:style>
-          <a:lnRef idx="1">
-            <a:schemeClr val="accent1"/>
-          </a:lnRef>
-          <a:fillRef idx="3">
-            <a:schemeClr val="accent1"/>
-          </a:fillRef>
-          <a:effectRef idx="2">
-            <a:schemeClr val="accent1"/>
-          </a:effectRef>
-          <a:fontRef idx="minor">
-            <a:schemeClr val="lt1"/>
-          </a:fontRef>
-        </p:style>
-        <p:txBody>
-          <a:bodyPr rtlCol="0" anchor="ctr" wrap="square" lIns="128016" rIns="128016" tIns="54864" bIns="54864"/>
-          <a:lstStyle/>
-          <a:p>
-            <a:pPr algn="l">
-              <a:lnSpc>
-                <a:spcPct val="125000"/>
-              </a:lnSpc>
-            </a:pPr>
-            <a:r>
-              <a:rPr sz="1050" b="0">
-                <a:solidFill>
-                  <a:srgbClr val="101715"/>
-                </a:solidFill>
-                <a:latin typeface="Apple SD Gothic Neo"/>
-              </a:rPr>
-              <a:t>로컬 자동채점</a:t>
-            </a:r>
-          </a:p>
-          <a:p>
-            <a:pPr algn="l">
-              <a:lnSpc>
-                <a:spcPct val="125000"/>
-              </a:lnSpc>
-            </a:pPr>
-            <a:r>
-              <a:rPr sz="900" b="0">
-                <a:solidFill>
-                  <a:srgbClr val="78837F"/>
-                </a:solidFill>
-                <a:latin typeface="Apple SD Gothic Neo"/>
-              </a:rPr>
-              <a:t>R/L/문장배열 → 잠정 점수</a:t>
-            </a:r>
-          </a:p>
-        </p:txBody>
-      </p:sp>
-      <p:cxnSp>
-        <p:nvCxnSpPr>
-          <p:cNvPr id="13" name="Connector 12"/>
-          <p:cNvCxnSpPr/>
-          <p:nvPr/>
-        </p:nvCxnSpPr>
-        <p:spPr>
-          <a:xfrm>
-            <a:off x="3291840" y="3566160"/>
-            <a:ext cx="411480" cy="0"/>
-          </a:xfrm>
-          <a:prstGeom prst="line">
-            <a:avLst/>
-          </a:prstGeom>
-          <a:ln w="15875">
-            <a:solidFill>
-              <a:srgbClr val="101715"/>
-            </a:solidFill>
-            <a:tailEnd type="triangle" w="med" len="med"/>
           </a:ln>
         </p:spPr>
         <p:style>
@@ -6705,61 +6837,24 @@
       </p:cxnSp>
       <p:sp>
         <p:nvSpPr>
-          <p:cNvPr id="14" name="TextBox 13"/>
-          <p:cNvSpPr txBox="1"/>
-          <p:nvPr/>
-        </p:nvSpPr>
-        <p:spPr>
-          <a:xfrm>
-            <a:off x="3703320" y="2029968"/>
-            <a:ext cx="2926080" cy="228600"/>
-          </a:xfrm>
-          <a:prstGeom prst="rect">
-            <a:avLst/>
-          </a:prstGeom>
-          <a:noFill/>
-        </p:spPr>
-        <p:txBody>
-          <a:bodyPr wrap="square" lIns="0" rIns="0" tIns="0" bIns="0" anchor="t">
-            <a:spAutoFit/>
-          </a:bodyPr>
-          <a:lstStyle/>
-          <a:p>
-            <a:pPr algn="l">
-              <a:lnSpc>
-                <a:spcPct val="135000"/>
-              </a:lnSpc>
-            </a:pPr>
-            <a:r>
-              <a:rPr sz="950" b="0" spc="120">
-                <a:solidFill>
-                  <a:srgbClr val="78837F"/>
-                </a:solidFill>
-                <a:latin typeface="Menlo"/>
-              </a:rPr>
-              <a:t>② 교실 허브 · LAN</a:t>
-            </a:r>
-          </a:p>
-        </p:txBody>
-      </p:sp>
-      <p:sp>
-        <p:nvSpPr>
-          <p:cNvPr id="15" name="Rounded Rectangle 14"/>
+          <p:cNvPr id="8" name="Rounded Rectangle 7"/>
           <p:cNvSpPr/>
           <p:nvPr/>
         </p:nvSpPr>
         <p:spPr>
           <a:xfrm>
-            <a:off x="3703320" y="2331720"/>
-            <a:ext cx="2606040" cy="2514600"/>
+            <a:off x="777240" y="2240280"/>
+            <a:ext cx="3246120" cy="1234440"/>
           </a:xfrm>
           <a:prstGeom prst="roundRect">
             <a:avLst>
               <a:gd name="adj" fmla="val 8000"/>
             </a:avLst>
           </a:prstGeom>
-          <a:noFill/>
-          <a:ln w="15875">
+          <a:solidFill>
+            <a:srgbClr val="E4E9E7"/>
+          </a:solidFill>
+          <a:ln w="14604">
             <a:solidFill>
               <a:srgbClr val="101715"/>
             </a:solidFill>
@@ -6781,30 +6876,75 @@
           </a:fontRef>
         </p:style>
         <p:txBody>
-          <a:bodyPr rtlCol="0" anchor="ctr" wrap="square"/>
-          <a:lstStyle/>
-          <a:p>
-            <a:pPr algn="ctr"/>
-          </a:p>
-        </p:txBody>
-      </p:sp>
-      <p:sp>
-        <p:nvSpPr>
-          <p:cNvPr id="16" name="Rounded Rectangle 15"/>
+          <a:bodyPr rtlCol="0" anchor="ctr" wrap="square" lIns="128016" rIns="128016" tIns="54864" bIns="54864"/>
+          <a:lstStyle/>
+          <a:p>
+            <a:pPr algn="l">
+              <a:lnSpc>
+                <a:spcPct val="125000"/>
+              </a:lnSpc>
+            </a:pPr>
+            <a:r>
+              <a:rPr sz="1250" b="1">
+                <a:solidFill>
+                  <a:srgbClr val="101715"/>
+                </a:solidFill>
+                <a:latin typeface="Apple SD Gothic Neo"/>
+              </a:rPr>
+              <a:t>시험 중 — 인터넷 차단</a:t>
+            </a:r>
+          </a:p>
+          <a:p>
+            <a:pPr algn="l">
+              <a:lnSpc>
+                <a:spcPct val="125000"/>
+              </a:lnSpc>
+            </a:pPr>
+            <a:r>
+              <a:rPr sz="1050" b="0">
+                <a:solidFill>
+                  <a:srgbClr val="4E5A57"/>
+                </a:solidFill>
+                <a:latin typeface="Apple SD Gothic Neo"/>
+              </a:rPr>
+              <a:t>답안·녹음이 로컬 큐에 쌓인다</a:t>
+            </a:r>
+          </a:p>
+          <a:p>
+            <a:pPr algn="l">
+              <a:lnSpc>
+                <a:spcPct val="125000"/>
+              </a:lnSpc>
+            </a:pPr>
+            <a:r>
+              <a:rPr sz="1050" b="0">
+                <a:solidFill>
+                  <a:srgbClr val="4E5A57"/>
+                </a:solidFill>
+                <a:latin typeface="Apple SD Gothic Neo"/>
+              </a:rPr>
+              <a:t>업로드 시도 0회 · 시험에 영향 0</a:t>
+            </a:r>
+          </a:p>
+        </p:txBody>
+      </p:sp>
+      <p:sp>
+        <p:nvSpPr>
+          <p:cNvPr id="9" name="Oval 8"/>
           <p:cNvSpPr/>
           <p:nvPr/>
         </p:nvSpPr>
         <p:spPr>
           <a:xfrm>
-            <a:off x="3886200" y="2496312"/>
-            <a:ext cx="2240280" cy="256032"/>
-          </a:xfrm>
-          <a:prstGeom prst="roundRect">
-            <a:avLst>
-              <a:gd name="adj" fmla="val 8000"/>
-            </a:avLst>
-          </a:prstGeom>
-          <a:noFill/>
+            <a:off x="713232" y="3639312"/>
+            <a:ext cx="128016" cy="128016"/>
+          </a:xfrm>
+          <a:prstGeom prst="ellipse">
+            <a:avLst/>
+          </a:prstGeom>
+          <a:solidFill>
+            <a:srgbClr val="101715"/>
+          </a:solidFill>
           <a:ln>
             <a:noFill/>
           </a:ln>
@@ -6825,44 +6965,68 @@
           </a:fontRef>
         </p:style>
         <p:txBody>
-          <a:bodyPr rtlCol="0" anchor="ctr" wrap="square" lIns="128016" rIns="128016" tIns="54864" bIns="54864"/>
-          <a:lstStyle/>
-          <a:p>
-            <a:pPr algn="l">
-              <a:lnSpc>
-                <a:spcPct val="125000"/>
-              </a:lnSpc>
-            </a:pPr>
-            <a:r>
-              <a:rPr sz="1150" b="1">
-                <a:solidFill>
-                  <a:srgbClr val="101715"/>
-                </a:solidFill>
-                <a:latin typeface="Apple SD Gothic Neo"/>
-              </a:rPr>
-              <a:t>선생님 노트북 1대</a:t>
-            </a:r>
-          </a:p>
-        </p:txBody>
-      </p:sp>
-      <p:sp>
-        <p:nvSpPr>
-          <p:cNvPr id="17" name="Rounded Rectangle 16"/>
+          <a:bodyPr rtlCol="0" anchor="ctr"/>
+          <a:lstStyle/>
+          <a:p>
+            <a:pPr algn="ctr"/>
+          </a:p>
+        </p:txBody>
+      </p:sp>
+      <p:sp>
+        <p:nvSpPr>
+          <p:cNvPr id="10" name="TextBox 9"/>
+          <p:cNvSpPr txBox="1"/>
+          <p:nvPr/>
+        </p:nvSpPr>
+        <p:spPr>
+          <a:xfrm>
+            <a:off x="411480" y="3840480"/>
+            <a:ext cx="731520" cy="228600"/>
+          </a:xfrm>
+          <a:prstGeom prst="rect">
+            <a:avLst/>
+          </a:prstGeom>
+          <a:noFill/>
+        </p:spPr>
+        <p:txBody>
+          <a:bodyPr wrap="square" lIns="0" rIns="0" tIns="0" bIns="0" anchor="t">
+            <a:spAutoFit/>
+          </a:bodyPr>
+          <a:lstStyle/>
+          <a:p>
+            <a:pPr algn="ctr">
+              <a:lnSpc>
+                <a:spcPct val="135000"/>
+              </a:lnSpc>
+            </a:pPr>
+            <a:r>
+              <a:rPr sz="1000" b="0">
+                <a:solidFill>
+                  <a:srgbClr val="78837F"/>
+                </a:solidFill>
+                <a:latin typeface="Apple SD Gothic Neo"/>
+              </a:rPr>
+              <a:t>시작</a:t>
+            </a:r>
+          </a:p>
+        </p:txBody>
+      </p:sp>
+      <p:sp>
+        <p:nvSpPr>
+          <p:cNvPr id="11" name="Oval 10"/>
           <p:cNvSpPr/>
           <p:nvPr/>
         </p:nvSpPr>
         <p:spPr>
           <a:xfrm>
-            <a:off x="3886200" y="2834639"/>
-            <a:ext cx="2240280" cy="566928"/>
-          </a:xfrm>
-          <a:prstGeom prst="roundRect">
-            <a:avLst>
-              <a:gd name="adj" fmla="val 8000"/>
-            </a:avLst>
+            <a:off x="4233672" y="3621024"/>
+            <a:ext cx="164592" cy="164592"/>
+          </a:xfrm>
+          <a:prstGeom prst="ellipse">
+            <a:avLst/>
           </a:prstGeom>
           <a:solidFill>
-            <a:srgbClr val="E4E9E7"/>
+            <a:srgbClr val="101715"/>
           </a:solidFill>
           <a:ln>
             <a:noFill/>
@@ -6884,52 +7048,101 @@
           </a:fontRef>
         </p:style>
         <p:txBody>
-          <a:bodyPr rtlCol="0" anchor="ctr" wrap="square" lIns="128016" rIns="128016" tIns="54864" bIns="54864"/>
-          <a:lstStyle/>
-          <a:p>
-            <a:pPr algn="l">
-              <a:lnSpc>
-                <a:spcPct val="125000"/>
-              </a:lnSpc>
-            </a:pPr>
-            <a:r>
-              <a:rPr sz="1050" b="0">
+          <a:bodyPr rtlCol="0" anchor="ctr"/>
+          <a:lstStyle/>
+          <a:p>
+            <a:pPr algn="ctr"/>
+          </a:p>
+        </p:txBody>
+      </p:sp>
+      <p:sp>
+        <p:nvSpPr>
+          <p:cNvPr id="12" name="TextBox 11"/>
+          <p:cNvSpPr txBox="1"/>
+          <p:nvPr/>
+        </p:nvSpPr>
+        <p:spPr>
+          <a:xfrm>
+            <a:off x="3657600" y="3840480"/>
+            <a:ext cx="1325880" cy="228600"/>
+          </a:xfrm>
+          <a:prstGeom prst="rect">
+            <a:avLst/>
+          </a:prstGeom>
+          <a:noFill/>
+        </p:spPr>
+        <p:txBody>
+          <a:bodyPr wrap="square" lIns="0" rIns="0" tIns="0" bIns="0" anchor="t">
+            <a:spAutoFit/>
+          </a:bodyPr>
+          <a:lstStyle/>
+          <a:p>
+            <a:pPr algn="ctr">
+              <a:lnSpc>
+                <a:spcPct val="135000"/>
+              </a:lnSpc>
+            </a:pPr>
+            <a:r>
+              <a:rPr sz="1100" b="1">
                 <a:solidFill>
                   <a:srgbClr val="101715"/>
                 </a:solidFill>
                 <a:latin typeface="Apple SD Gothic Neo"/>
               </a:rPr>
-              <a:t>SQLite — 교실 정본</a:t>
-            </a:r>
-          </a:p>
-          <a:p>
-            <a:pPr algn="l">
-              <a:lnSpc>
-                <a:spcPct val="125000"/>
-              </a:lnSpc>
-            </a:pPr>
-            <a:r>
-              <a:rPr sz="900" b="0">
+              <a:t>종료</a:t>
+            </a:r>
+          </a:p>
+        </p:txBody>
+      </p:sp>
+      <p:sp>
+        <p:nvSpPr>
+          <p:cNvPr id="13" name="TextBox 12"/>
+          <p:cNvSpPr txBox="1"/>
+          <p:nvPr/>
+        </p:nvSpPr>
+        <p:spPr>
+          <a:xfrm>
+            <a:off x="3520440" y="4069080"/>
+            <a:ext cx="1600200" cy="228600"/>
+          </a:xfrm>
+          <a:prstGeom prst="rect">
+            <a:avLst/>
+          </a:prstGeom>
+          <a:noFill/>
+        </p:spPr>
+        <p:txBody>
+          <a:bodyPr wrap="square" lIns="0" rIns="0" tIns="0" bIns="0" anchor="t">
+            <a:spAutoFit/>
+          </a:bodyPr>
+          <a:lstStyle/>
+          <a:p>
+            <a:pPr algn="ctr">
+              <a:lnSpc>
+                <a:spcPct val="135000"/>
+              </a:lnSpc>
+            </a:pPr>
+            <a:r>
+              <a:rPr sz="950" b="0">
                 <a:solidFill>
                   <a:srgbClr val="78837F"/>
                 </a:solidFill>
                 <a:latin typeface="Apple SD Gothic Neo"/>
               </a:rPr>
-              <a:t>단말이 죽어도 답안은 생존</a:t>
-            </a:r>
-          </a:p>
-        </p:txBody>
-      </p:sp>
-      <p:sp>
-        <p:nvSpPr>
-          <p:cNvPr id="18" name="Rounded Rectangle 17"/>
+              <a:t>감독관이 회선을 연다</a:t>
+            </a:r>
+          </a:p>
+        </p:txBody>
+      </p:sp>
+      <p:sp>
+        <p:nvSpPr>
+          <p:cNvPr id="14" name="Rounded Rectangle 13"/>
           <p:cNvSpPr/>
           <p:nvPr/>
         </p:nvSpPr>
         <p:spPr>
           <a:xfrm>
-            <a:off x="3886200" y="3493008"/>
-            <a:ext cx="2240280" cy="566928"/>
+            <a:off x="4617720" y="2121408"/>
+            <a:ext cx="3657600" cy="1463040"/>
           </a:xfrm>
           <a:prstGeom prst="roundRect">
             <a:avLst>
@@ -6937,10 +7150,12 @@
             </a:avLst>
           </a:prstGeom>
           <a:solidFill>
-            <a:srgbClr val="E4E9E7"/>
+            <a:srgbClr val="E2EEEB"/>
           </a:solidFill>
-          <a:ln>
-            <a:noFill/>
+          <a:ln w="22860">
+            <a:solidFill>
+              <a:srgbClr val="0B6E5F"/>
+            </a:solidFill>
           </a:ln>
           <a:effectLst/>
         </p:spPr>
@@ -6968,13 +7183,29 @@
               </a:lnSpc>
             </a:pPr>
             <a:r>
+              <a:rPr sz="1250" b="1">
+                <a:solidFill>
+                  <a:srgbClr val="0B6E5F"/>
+                </a:solidFill>
+                <a:latin typeface="Apple SD Gothic Neo"/>
+              </a:rPr>
+              <a:t>회수창 — 2~3분</a:t>
+            </a:r>
+          </a:p>
+          <a:p>
+            <a:pPr algn="l">
+              <a:lnSpc>
+                <a:spcPct val="125000"/>
+              </a:lnSpc>
+            </a:pPr>
+            <a:r>
               <a:rPr sz="1050" b="0">
                 <a:solidFill>
-                  <a:srgbClr val="101715"/>
-                </a:solidFill>
-                <a:latin typeface="Apple SD Gothic Neo"/>
-              </a:rPr>
-              <a:t>허브 Outbox</a:t>
+                  <a:srgbClr val="0B6E5F"/>
+                </a:solidFill>
+                <a:latin typeface="Apple SD Gothic Neo"/>
+              </a:rPr>
+              <a:t>30대가 동시에 Outbox를 비운다</a:t>
             </a:r>
           </a:p>
           <a:p>
@@ -6984,59 +7215,15 @@
               </a:lnSpc>
             </a:pPr>
             <a:r>
-              <a:rPr sz="900" b="0">
-                <a:solidFill>
-                  <a:srgbClr val="78837F"/>
-                </a:solidFill>
-                <a:latin typeface="Apple SD Gothic Neo"/>
-              </a:rPr>
-              <a:t>교실 전체를 한 묶음으로</a:t>
-            </a:r>
-          </a:p>
-        </p:txBody>
-      </p:sp>
-      <p:sp>
-        <p:nvSpPr>
-          <p:cNvPr id="19" name="Rounded Rectangle 18"/>
-          <p:cNvSpPr/>
-          <p:nvPr/>
-        </p:nvSpPr>
-        <p:spPr>
-          <a:xfrm>
-            <a:off x="3886200" y="4151376"/>
-            <a:ext cx="2240280" cy="530352"/>
-          </a:xfrm>
-          <a:prstGeom prst="roundRect">
-            <a:avLst>
-              <a:gd name="adj" fmla="val 8000"/>
-            </a:avLst>
-          </a:prstGeom>
-          <a:noFill/>
-          <a:ln w="12700">
-            <a:solidFill>
-              <a:srgbClr val="D2DAD7"/>
-            </a:solidFill>
-            <a:prstDash val="dash"/>
-          </a:ln>
-          <a:effectLst/>
-        </p:spPr>
-        <p:style>
-          <a:lnRef idx="1">
-            <a:schemeClr val="accent1"/>
-          </a:lnRef>
-          <a:fillRef idx="3">
-            <a:schemeClr val="accent1"/>
-          </a:fillRef>
-          <a:effectRef idx="2">
-            <a:schemeClr val="accent1"/>
-          </a:effectRef>
-          <a:fontRef idx="minor">
-            <a:schemeClr val="lt1"/>
-          </a:fontRef>
-        </p:style>
-        <p:txBody>
-          <a:bodyPr rtlCol="0" anchor="ctr" wrap="square" lIns="128016" rIns="128016" tIns="54864" bIns="54864"/>
-          <a:lstStyle/>
+              <a:rPr sz="1050" b="0">
+                <a:solidFill>
+                  <a:srgbClr val="0B6E5F"/>
+                </a:solidFill>
+                <a:latin typeface="Apple SD Gothic Neo"/>
+              </a:rPr>
+              <a:t>지난 반의 잔여 큐도 이때 같이 올라간다</a:t>
+            </a:r>
+          </a:p>
           <a:p>
             <a:pPr algn="l">
               <a:lnSpc>
@@ -7046,50 +7233,33 @@
             <a:r>
               <a:rPr sz="1050" b="0">
                 <a:solidFill>
-                  <a:srgbClr val="101715"/>
-                </a:solidFill>
-                <a:latin typeface="Apple SD Gothic Neo"/>
-              </a:rPr>
-              <a:t>진행 현황판</a:t>
-            </a:r>
-          </a:p>
-          <a:p>
-            <a:pPr algn="l">
-              <a:lnSpc>
-                <a:spcPct val="125000"/>
-              </a:lnSpc>
-            </a:pPr>
-            <a:r>
-              <a:rPr sz="900" b="0">
-                <a:solidFill>
-                  <a:srgbClr val="78837F"/>
-                </a:solidFill>
-                <a:latin typeface="Apple SD Gothic Neo"/>
-              </a:rPr>
-              <a:t>오프라인에서도 실시간</a:t>
+                  <a:srgbClr val="0B6E5F"/>
+                </a:solidFill>
+                <a:latin typeface="Apple SD Gothic Neo"/>
+              </a:rPr>
+              <a:t>화면: “업로드 28 / 31 … 완료”</a:t>
             </a:r>
           </a:p>
         </p:txBody>
       </p:sp>
       <p:cxnSp>
         <p:nvCxnSpPr>
-          <p:cNvPr id="20" name="Connector 19"/>
+          <p:cNvPr id="15" name="Connector 14"/>
           <p:cNvCxnSpPr/>
           <p:nvPr/>
         </p:nvCxnSpPr>
         <p:spPr>
           <a:xfrm>
-            <a:off x="6812280" y="1874519"/>
-            <a:ext cx="0" cy="3749041"/>
+            <a:off x="4617720" y="3703320"/>
+            <a:ext cx="3657600" cy="0"/>
           </a:xfrm>
           <a:prstGeom prst="line">
             <a:avLst/>
           </a:prstGeom>
-          <a:ln w="17780">
+          <a:ln w="57150">
             <a:solidFill>
-              <a:srgbClr val="78837F"/>
+              <a:srgbClr val="0B6E5F"/>
             </a:solidFill>
-            <a:prstDash val="dash"/>
           </a:ln>
         </p:spPr>
         <p:style>
@@ -7109,14 +7279,58 @@
       </p:cxnSp>
       <p:sp>
         <p:nvSpPr>
-          <p:cNvPr id="21" name="TextBox 20"/>
+          <p:cNvPr id="16" name="Oval 15"/>
+          <p:cNvSpPr/>
+          <p:nvPr/>
+        </p:nvSpPr>
+        <p:spPr>
+          <a:xfrm>
+            <a:off x="8421624" y="3621024"/>
+            <a:ext cx="164592" cy="164592"/>
+          </a:xfrm>
+          <a:prstGeom prst="ellipse">
+            <a:avLst/>
+          </a:prstGeom>
+          <a:solidFill>
+            <a:srgbClr val="0B6E5F"/>
+          </a:solidFill>
+          <a:ln>
+            <a:noFill/>
+          </a:ln>
+          <a:effectLst/>
+        </p:spPr>
+        <p:style>
+          <a:lnRef idx="1">
+            <a:schemeClr val="accent1"/>
+          </a:lnRef>
+          <a:fillRef idx="3">
+            <a:schemeClr val="accent1"/>
+          </a:fillRef>
+          <a:effectRef idx="2">
+            <a:schemeClr val="accent1"/>
+          </a:effectRef>
+          <a:fontRef idx="minor">
+            <a:schemeClr val="lt1"/>
+          </a:fontRef>
+        </p:style>
+        <p:txBody>
+          <a:bodyPr rtlCol="0" anchor="ctr"/>
+          <a:lstStyle/>
+          <a:p>
+            <a:pPr algn="ctr"/>
+          </a:p>
+        </p:txBody>
+      </p:sp>
+      <p:sp>
+        <p:nvSpPr>
+          <p:cNvPr id="17" name="TextBox 16"/>
           <p:cNvSpPr txBox="1"/>
           <p:nvPr/>
         </p:nvSpPr>
         <p:spPr>
           <a:xfrm>
-            <a:off x="5989320" y="5669280"/>
-            <a:ext cx="1645920" cy="457200"/>
+            <a:off x="7818120" y="3840480"/>
+            <a:ext cx="1371600" cy="228600"/>
           </a:xfrm>
           <a:prstGeom prst="rect">
             <a:avLst/>
@@ -7135,27 +7349,27 @@
               </a:lnSpc>
             </a:pPr>
             <a:r>
-              <a:rPr sz="1050" b="0">
-                <a:solidFill>
-                  <a:srgbClr val="78837F"/>
-                </a:solidFill>
-                <a:latin typeface="Apple SD Gothic Neo"/>
-              </a:rPr>
-              <a:t>인터넷 경계</a:t>
-            </a:r>
-          </a:p>
-        </p:txBody>
-      </p:sp>
-      <p:sp>
-        <p:nvSpPr>
-          <p:cNvPr id="22" name="TextBox 21"/>
+              <a:rPr sz="1100" b="1">
+                <a:solidFill>
+                  <a:srgbClr val="0B6E5F"/>
+                </a:solidFill>
+                <a:latin typeface="Apple SD Gothic Neo"/>
+              </a:rPr>
+              <a:t>완료 게이트</a:t>
+            </a:r>
+          </a:p>
+        </p:txBody>
+      </p:sp>
+      <p:sp>
+        <p:nvSpPr>
+          <p:cNvPr id="18" name="TextBox 17"/>
           <p:cNvSpPr txBox="1"/>
           <p:nvPr/>
         </p:nvSpPr>
         <p:spPr>
           <a:xfrm>
-            <a:off x="5532120" y="5907024"/>
-            <a:ext cx="2560320" cy="457200"/>
+            <a:off x="7680960" y="4069080"/>
+            <a:ext cx="1645920" cy="228600"/>
           </a:xfrm>
           <a:prstGeom prst="rect">
             <a:avLst/>
@@ -7174,36 +7388,172 @@
               </a:lnSpc>
             </a:pPr>
             <a:r>
-              <a:rPr sz="900" b="0">
+              <a:rPr sz="950" b="0">
                 <a:solidFill>
                   <a:srgbClr val="78837F"/>
                 </a:solidFill>
                 <a:latin typeface="Apple SD Gothic Neo"/>
               </a:rPr>
-              <a:t>시험 중 = 끊김 · 시험 후 = 복귀</a:t>
-            </a:r>
+              <a:t>전원 초록이어야 해산</a:t>
+            </a:r>
+          </a:p>
+        </p:txBody>
+      </p:sp>
+      <p:sp>
+        <p:nvSpPr>
+          <p:cNvPr id="19" name="Rounded Rectangle 18"/>
+          <p:cNvSpPr/>
+          <p:nvPr/>
+        </p:nvSpPr>
+        <p:spPr>
+          <a:xfrm>
+            <a:off x="8778240" y="2240280"/>
+            <a:ext cx="2697480" cy="1234440"/>
+          </a:xfrm>
+          <a:prstGeom prst="roundRect">
+            <a:avLst>
+              <a:gd name="adj" fmla="val 8000"/>
+            </a:avLst>
+          </a:prstGeom>
+          <a:solidFill>
+            <a:srgbClr val="E4E9E7"/>
+          </a:solidFill>
+          <a:ln w="14604">
+            <a:solidFill>
+              <a:srgbClr val="101715"/>
+            </a:solidFill>
+          </a:ln>
+          <a:effectLst/>
+        </p:spPr>
+        <p:style>
+          <a:lnRef idx="1">
+            <a:schemeClr val="accent1"/>
+          </a:lnRef>
+          <a:fillRef idx="3">
+            <a:schemeClr val="accent1"/>
+          </a:fillRef>
+          <a:effectRef idx="2">
+            <a:schemeClr val="accent1"/>
+          </a:effectRef>
+          <a:fontRef idx="minor">
+            <a:schemeClr val="lt1"/>
+          </a:fontRef>
+        </p:style>
+        <p:txBody>
+          <a:bodyPr rtlCol="0" anchor="ctr" wrap="square" lIns="128016" rIns="128016" tIns="54864" bIns="54864"/>
+          <a:lstStyle/>
+          <a:p>
+            <a:pPr algn="l">
+              <a:lnSpc>
+                <a:spcPct val="125000"/>
+              </a:lnSpc>
+            </a:pPr>
+            <a:r>
+              <a:rPr sz="1250" b="1">
+                <a:solidFill>
+                  <a:srgbClr val="101715"/>
+                </a:solidFill>
+                <a:latin typeface="Apple SD Gothic Neo"/>
+              </a:rPr>
+              <a:t>로컬 삭제 · 다음 반</a:t>
+            </a:r>
+          </a:p>
+          <a:p>
+            <a:pPr algn="l">
+              <a:lnSpc>
+                <a:spcPct val="125000"/>
+              </a:lnSpc>
+            </a:pPr>
+            <a:r>
+              <a:rPr sz="1050" b="0">
+                <a:solidFill>
+                  <a:srgbClr val="4E5A57"/>
+                </a:solidFill>
+                <a:latin typeface="Apple SD Gothic Neo"/>
+              </a:rPr>
+              <a:t>확인된 회차만 지운다</a:t>
+            </a:r>
+          </a:p>
+          <a:p>
+            <a:pPr algn="l">
+              <a:lnSpc>
+                <a:spcPct val="125000"/>
+              </a:lnSpc>
+            </a:pPr>
+            <a:r>
+              <a:rPr sz="1050" b="0">
+                <a:solidFill>
+                  <a:srgbClr val="4E5A57"/>
+                </a:solidFill>
+                <a:latin typeface="Apple SD Gothic Neo"/>
+              </a:rPr>
+              <a:t>PC에 앞 반 답안이 남지 않는다</a:t>
+            </a:r>
+          </a:p>
+        </p:txBody>
+      </p:sp>
+      <p:sp>
+        <p:nvSpPr>
+          <p:cNvPr id="20" name="Oval 19"/>
+          <p:cNvSpPr/>
+          <p:nvPr/>
+        </p:nvSpPr>
+        <p:spPr>
+          <a:xfrm>
+            <a:off x="11411712" y="3639312"/>
+            <a:ext cx="128016" cy="128016"/>
+          </a:xfrm>
+          <a:prstGeom prst="ellipse">
+            <a:avLst/>
+          </a:prstGeom>
+          <a:solidFill>
+            <a:srgbClr val="101715"/>
+          </a:solidFill>
+          <a:ln>
+            <a:noFill/>
+          </a:ln>
+          <a:effectLst/>
+        </p:spPr>
+        <p:style>
+          <a:lnRef idx="1">
+            <a:schemeClr val="accent1"/>
+          </a:lnRef>
+          <a:fillRef idx="3">
+            <a:schemeClr val="accent1"/>
+          </a:fillRef>
+          <a:effectRef idx="2">
+            <a:schemeClr val="accent1"/>
+          </a:effectRef>
+          <a:fontRef idx="minor">
+            <a:schemeClr val="lt1"/>
+          </a:fontRef>
+        </p:style>
+        <p:txBody>
+          <a:bodyPr rtlCol="0" anchor="ctr"/>
+          <a:lstStyle/>
+          <a:p>
+            <a:pPr algn="ctr"/>
           </a:p>
         </p:txBody>
       </p:sp>
       <p:cxnSp>
         <p:nvCxnSpPr>
-          <p:cNvPr id="23" name="Connector 22"/>
+          <p:cNvPr id="21" name="Connector 20"/>
           <p:cNvCxnSpPr/>
           <p:nvPr/>
         </p:nvCxnSpPr>
         <p:spPr>
           <a:xfrm>
-            <a:off x="6309360" y="3108960"/>
-            <a:ext cx="1005840" cy="0"/>
+            <a:off x="7406640" y="3703320"/>
+            <a:ext cx="0" cy="1097280"/>
           </a:xfrm>
           <a:prstGeom prst="line">
             <a:avLst/>
           </a:prstGeom>
-          <a:ln w="28575">
+          <a:ln w="16510">
             <a:solidFill>
-              <a:srgbClr val="0B6E5F"/>
+              <a:srgbClr val="8A6410"/>
             </a:solidFill>
-            <a:tailEnd type="triangle" w="med" len="med"/>
           </a:ln>
         </p:spPr>
         <p:style>
@@ -7221,64 +7571,24 @@
           </a:fontRef>
         </p:style>
       </p:cxnSp>
-      <p:sp>
-        <p:nvSpPr>
-          <p:cNvPr id="24" name="TextBox 23"/>
-          <p:cNvSpPr txBox="1"/>
-          <p:nvPr/>
-        </p:nvSpPr>
-        <p:spPr>
-          <a:xfrm>
-            <a:off x="5989320" y="2788920"/>
-            <a:ext cx="1691640" cy="256032"/>
-          </a:xfrm>
-          <a:prstGeom prst="rect">
-            <a:avLst/>
-          </a:prstGeom>
-          <a:noFill/>
-        </p:spPr>
-        <p:txBody>
-          <a:bodyPr wrap="square" lIns="0" rIns="0" tIns="0" bIns="0" anchor="t">
-            <a:spAutoFit/>
-          </a:bodyPr>
-          <a:lstStyle/>
-          <a:p>
-            <a:pPr algn="ctr">
-              <a:lnSpc>
-                <a:spcPct val="135000"/>
-              </a:lnSpc>
-            </a:pPr>
-            <a:r>
-              <a:rPr sz="950" b="1">
-                <a:solidFill>
-                  <a:srgbClr val="0B6E5F"/>
-                </a:solidFill>
-                <a:latin typeface="Apple SD Gothic Neo"/>
-              </a:rPr>
-              <a:t>복귀 감지 → 자동 업로드</a:t>
-            </a:r>
-          </a:p>
-        </p:txBody>
-      </p:sp>
       <p:cxnSp>
         <p:nvCxnSpPr>
-          <p:cNvPr id="25" name="Connector 24"/>
+          <p:cNvPr id="22" name="Connector 21"/>
           <p:cNvCxnSpPr/>
           <p:nvPr/>
         </p:nvCxnSpPr>
         <p:spPr>
           <a:xfrm flipH="1">
-            <a:off x="6309360" y="3794760"/>
-            <a:ext cx="1005840" cy="0"/>
+            <a:off x="6446520" y="4800600"/>
+            <a:ext cx="960120" cy="0"/>
           </a:xfrm>
           <a:prstGeom prst="line">
             <a:avLst/>
           </a:prstGeom>
-          <a:ln w="15875">
+          <a:ln w="16510">
             <a:solidFill>
-              <a:srgbClr val="0B6E5F"/>
+              <a:srgbClr val="8A6410"/>
             </a:solidFill>
-            <a:prstDash val="dash"/>
             <a:tailEnd type="triangle" w="med" len="med"/>
           </a:ln>
         </p:spPr>
@@ -7299,102 +7609,26 @@
       </p:cxnSp>
       <p:sp>
         <p:nvSpPr>
-          <p:cNvPr id="26" name="TextBox 25"/>
-          <p:cNvSpPr txBox="1"/>
-          <p:nvPr/>
-        </p:nvSpPr>
-        <p:spPr>
-          <a:xfrm>
-            <a:off x="5806440" y="3904487"/>
-            <a:ext cx="2057400" cy="256032"/>
-          </a:xfrm>
-          <a:prstGeom prst="rect">
-            <a:avLst/>
-          </a:prstGeom>
-          <a:noFill/>
-        </p:spPr>
-        <p:txBody>
-          <a:bodyPr wrap="square" lIns="0" rIns="0" tIns="0" bIns="0" anchor="t">
-            <a:spAutoFit/>
-          </a:bodyPr>
-          <a:lstStyle/>
-          <a:p>
-            <a:pPr algn="ctr">
-              <a:lnSpc>
-                <a:spcPct val="135000"/>
-              </a:lnSpc>
-            </a:pPr>
-            <a:r>
-              <a:rPr sz="950" b="0">
-                <a:solidFill>
-                  <a:srgbClr val="0B6E5F"/>
-                </a:solidFill>
-                <a:latin typeface="Apple SD Gothic Neo"/>
-              </a:rPr>
-              <a:t>수신 확인 → 로컬 해제</a:t>
-            </a:r>
-          </a:p>
-        </p:txBody>
-      </p:sp>
-      <p:sp>
-        <p:nvSpPr>
-          <p:cNvPr id="27" name="TextBox 26"/>
-          <p:cNvSpPr txBox="1"/>
-          <p:nvPr/>
-        </p:nvSpPr>
-        <p:spPr>
-          <a:xfrm>
-            <a:off x="7315200" y="2029968"/>
-            <a:ext cx="2926080" cy="228600"/>
-          </a:xfrm>
-          <a:prstGeom prst="rect">
-            <a:avLst/>
-          </a:prstGeom>
-          <a:noFill/>
-        </p:spPr>
-        <p:txBody>
-          <a:bodyPr wrap="square" lIns="0" rIns="0" tIns="0" bIns="0" anchor="t">
-            <a:spAutoFit/>
-          </a:bodyPr>
-          <a:lstStyle/>
-          <a:p>
-            <a:pPr algn="l">
-              <a:lnSpc>
-                <a:spcPct val="135000"/>
-              </a:lnSpc>
-            </a:pPr>
-            <a:r>
-              <a:rPr sz="950" b="0" spc="120">
-                <a:solidFill>
-                  <a:srgbClr val="78837F"/>
-                </a:solidFill>
-                <a:latin typeface="Menlo"/>
-              </a:rPr>
-              <a:t>③ SUPABASE · 클라우드</a:t>
-            </a:r>
-          </a:p>
-        </p:txBody>
-      </p:sp>
-      <p:sp>
-        <p:nvSpPr>
-          <p:cNvPr id="28" name="Rounded Rectangle 27"/>
+          <p:cNvPr id="23" name="Rounded Rectangle 22"/>
           <p:cNvSpPr/>
           <p:nvPr/>
         </p:nvSpPr>
         <p:spPr>
           <a:xfrm>
-            <a:off x="7315200" y="2331720"/>
-            <a:ext cx="2606040" cy="2514600"/>
+            <a:off x="2651760" y="4572000"/>
+            <a:ext cx="3794760" cy="502920"/>
           </a:xfrm>
           <a:prstGeom prst="roundRect">
             <a:avLst>
               <a:gd name="adj" fmla="val 8000"/>
             </a:avLst>
           </a:prstGeom>
-          <a:noFill/>
-          <a:ln w="15875">
+          <a:solidFill>
+            <a:srgbClr val="F3ECDC"/>
+          </a:solidFill>
+          <a:ln w="14604">
             <a:solidFill>
-              <a:srgbClr val="101715"/>
+              <a:srgbClr val="8A6410"/>
             </a:solidFill>
           </a:ln>
           <a:effectLst/>
@@ -7414,50 +7648,6 @@
           </a:fontRef>
         </p:style>
         <p:txBody>
-          <a:bodyPr rtlCol="0" anchor="ctr" wrap="square"/>
-          <a:lstStyle/>
-          <a:p>
-            <a:pPr algn="ctr"/>
-          </a:p>
-        </p:txBody>
-      </p:sp>
-      <p:sp>
-        <p:nvSpPr>
-          <p:cNvPr id="29" name="Rounded Rectangle 28"/>
-          <p:cNvSpPr/>
-          <p:nvPr/>
-        </p:nvSpPr>
-        <p:spPr>
-          <a:xfrm>
-            <a:off x="7498079" y="2496312"/>
-            <a:ext cx="2240280" cy="256032"/>
-          </a:xfrm>
-          <a:prstGeom prst="roundRect">
-            <a:avLst>
-              <a:gd name="adj" fmla="val 8000"/>
-            </a:avLst>
-          </a:prstGeom>
-          <a:noFill/>
-          <a:ln>
-            <a:noFill/>
-          </a:ln>
-          <a:effectLst/>
-        </p:spPr>
-        <p:style>
-          <a:lnRef idx="1">
-            <a:schemeClr val="accent1"/>
-          </a:lnRef>
-          <a:fillRef idx="3">
-            <a:schemeClr val="accent1"/>
-          </a:fillRef>
-          <a:effectRef idx="2">
-            <a:schemeClr val="accent1"/>
-          </a:effectRef>
-          <a:fontRef idx="minor">
-            <a:schemeClr val="lt1"/>
-          </a:fontRef>
-        </p:style>
-        <p:txBody>
           <a:bodyPr rtlCol="0" anchor="ctr" wrap="square" lIns="128016" rIns="128016" tIns="54864" bIns="54864"/>
           <a:lstStyle/>
           <a:p>
@@ -7469,287 +7659,25 @@
             <a:r>
               <a:rPr sz="1150" b="1">
                 <a:solidFill>
-                  <a:srgbClr val="101715"/>
-                </a:solidFill>
-                <a:latin typeface="Apple SD Gothic Neo"/>
-              </a:rPr>
-              <a:t>Postgres + Storage</a:t>
-            </a:r>
-          </a:p>
-        </p:txBody>
-      </p:sp>
-      <p:sp>
-        <p:nvSpPr>
-          <p:cNvPr id="30" name="Rounded Rectangle 29"/>
-          <p:cNvSpPr/>
-          <p:nvPr/>
-        </p:nvSpPr>
-        <p:spPr>
-          <a:xfrm>
-            <a:off x="7498079" y="2834639"/>
-            <a:ext cx="2240280" cy="713232"/>
-          </a:xfrm>
-          <a:prstGeom prst="roundRect">
-            <a:avLst>
-              <a:gd name="adj" fmla="val 8000"/>
-            </a:avLst>
-          </a:prstGeom>
-          <a:solidFill>
-            <a:srgbClr val="E4E9E7"/>
-          </a:solidFill>
-          <a:ln>
-            <a:noFill/>
-          </a:ln>
-          <a:effectLst/>
-        </p:spPr>
-        <p:style>
-          <a:lnRef idx="1">
-            <a:schemeClr val="accent1"/>
-          </a:lnRef>
-          <a:fillRef idx="3">
-            <a:schemeClr val="accent1"/>
-          </a:fillRef>
-          <a:effectRef idx="2">
-            <a:schemeClr val="accent1"/>
-          </a:effectRef>
-          <a:fontRef idx="minor">
-            <a:schemeClr val="lt1"/>
-          </a:fontRef>
-        </p:style>
-        <p:txBody>
-          <a:bodyPr rtlCol="0" anchor="ctr" wrap="square" lIns="128016" rIns="128016" tIns="54864" bIns="54864"/>
-          <a:lstStyle/>
-          <a:p>
-            <a:pPr algn="l">
-              <a:lnSpc>
-                <a:spcPct val="125000"/>
-              </a:lnSpc>
-            </a:pPr>
-            <a:r>
-              <a:rPr sz="1000" b="0">
-                <a:solidFill>
-                  <a:srgbClr val="101715"/>
-                </a:solidFill>
-                <a:latin typeface="Apple SD Gothic Neo"/>
-              </a:rPr>
-              <a:t>toefl_attempts</a:t>
-            </a:r>
-          </a:p>
-          <a:p>
-            <a:pPr algn="l">
-              <a:lnSpc>
-                <a:spcPct val="125000"/>
-              </a:lnSpc>
-            </a:pPr>
-            <a:r>
-              <a:rPr sz="1000" b="0">
-                <a:solidFill>
-                  <a:srgbClr val="101715"/>
-                </a:solidFill>
-                <a:latin typeface="Apple SD Gothic Neo"/>
-              </a:rPr>
-              <a:t>toefl_answers</a:t>
-            </a:r>
-          </a:p>
-          <a:p>
-            <a:pPr algn="l">
-              <a:lnSpc>
-                <a:spcPct val="125000"/>
-              </a:lnSpc>
-            </a:pPr>
-            <a:r>
-              <a:rPr sz="1000" b="0">
-                <a:solidFill>
-                  <a:srgbClr val="101715"/>
-                </a:solidFill>
-                <a:latin typeface="Apple SD Gothic Neo"/>
-              </a:rPr>
-              <a:t>toefl_submissions</a:t>
-            </a:r>
-          </a:p>
-        </p:txBody>
-      </p:sp>
-      <p:sp>
-        <p:nvSpPr>
-          <p:cNvPr id="31" name="Rounded Rectangle 30"/>
-          <p:cNvSpPr/>
-          <p:nvPr/>
-        </p:nvSpPr>
-        <p:spPr>
-          <a:xfrm>
-            <a:off x="7498079" y="3639311"/>
-            <a:ext cx="2240280" cy="502920"/>
-          </a:xfrm>
-          <a:prstGeom prst="roundRect">
-            <a:avLst>
-              <a:gd name="adj" fmla="val 8000"/>
-            </a:avLst>
-          </a:prstGeom>
-          <a:solidFill>
-            <a:srgbClr val="E4E9E7"/>
-          </a:solidFill>
-          <a:ln>
-            <a:noFill/>
-          </a:ln>
-          <a:effectLst/>
-        </p:spPr>
-        <p:style>
-          <a:lnRef idx="1">
-            <a:schemeClr val="accent1"/>
-          </a:lnRef>
-          <a:fillRef idx="3">
-            <a:schemeClr val="accent1"/>
-          </a:fillRef>
-          <a:effectRef idx="2">
-            <a:schemeClr val="accent1"/>
-          </a:effectRef>
-          <a:fontRef idx="minor">
-            <a:schemeClr val="lt1"/>
-          </a:fontRef>
-        </p:style>
-        <p:txBody>
-          <a:bodyPr rtlCol="0" anchor="ctr" wrap="square" lIns="128016" rIns="128016" tIns="54864" bIns="54864"/>
-          <a:lstStyle/>
-          <a:p>
-            <a:pPr algn="l">
-              <a:lnSpc>
-                <a:spcPct val="125000"/>
-              </a:lnSpc>
-            </a:pPr>
-            <a:r>
-              <a:rPr sz="1050" b="0">
-                <a:solidFill>
-                  <a:srgbClr val="101715"/>
-                </a:solidFill>
-                <a:latin typeface="Apple SD Gothic Neo"/>
-              </a:rPr>
-              <a:t>Storage — 스피킹 녹음</a:t>
-            </a:r>
-          </a:p>
-          <a:p>
-            <a:pPr algn="l">
-              <a:lnSpc>
-                <a:spcPct val="125000"/>
-              </a:lnSpc>
-            </a:pPr>
-            <a:r>
-              <a:rPr sz="900" b="0">
-                <a:solidFill>
-                  <a:srgbClr val="78837F"/>
-                </a:solidFill>
-                <a:latin typeface="Apple SD Gothic Neo"/>
-              </a:rPr>
-              <a:t>webm, 마지막에 올린다</a:t>
-            </a:r>
-          </a:p>
-        </p:txBody>
-      </p:sp>
-      <p:sp>
-        <p:nvSpPr>
-          <p:cNvPr id="32" name="Rounded Rectangle 31"/>
-          <p:cNvSpPr/>
-          <p:nvPr/>
-        </p:nvSpPr>
-        <p:spPr>
-          <a:xfrm>
-            <a:off x="7498079" y="4233672"/>
-            <a:ext cx="2240280" cy="448056"/>
-          </a:xfrm>
-          <a:prstGeom prst="roundRect">
-            <a:avLst>
-              <a:gd name="adj" fmla="val 8000"/>
-            </a:avLst>
-          </a:prstGeom>
-          <a:noFill/>
-          <a:ln w="12700">
-            <a:solidFill>
-              <a:srgbClr val="D2DAD7"/>
-            </a:solidFill>
-            <a:prstDash val="dash"/>
-          </a:ln>
-          <a:effectLst/>
-        </p:spPr>
-        <p:style>
-          <a:lnRef idx="1">
-            <a:schemeClr val="accent1"/>
-          </a:lnRef>
-          <a:fillRef idx="3">
-            <a:schemeClr val="accent1"/>
-          </a:fillRef>
-          <a:effectRef idx="2">
-            <a:schemeClr val="accent1"/>
-          </a:effectRef>
-          <a:fontRef idx="minor">
-            <a:schemeClr val="lt1"/>
-          </a:fontRef>
-        </p:style>
-        <p:txBody>
-          <a:bodyPr rtlCol="0" anchor="ctr" wrap="square" lIns="128016" rIns="128016" tIns="54864" bIns="54864"/>
-          <a:lstStyle/>
-          <a:p>
-            <a:pPr algn="l">
-              <a:lnSpc>
-                <a:spcPct val="125000"/>
-              </a:lnSpc>
-            </a:pPr>
-            <a:r>
-              <a:rPr sz="1050" b="0">
-                <a:solidFill>
-                  <a:srgbClr val="101715"/>
-                </a:solidFill>
-                <a:latin typeface="Apple SD Gothic Neo"/>
-              </a:rPr>
-              <a:t>서버 재채점 = 확정 점수</a:t>
-            </a:r>
-          </a:p>
-        </p:txBody>
-      </p:sp>
-      <p:cxnSp>
-        <p:nvCxnSpPr>
-          <p:cNvPr id="33" name="Connector 32"/>
-          <p:cNvCxnSpPr/>
-          <p:nvPr/>
-        </p:nvCxnSpPr>
-        <p:spPr>
-          <a:xfrm>
-            <a:off x="9921240" y="3566160"/>
-            <a:ext cx="365760" cy="0"/>
-          </a:xfrm>
-          <a:prstGeom prst="line">
-            <a:avLst/>
-          </a:prstGeom>
-          <a:ln w="15875">
-            <a:solidFill>
-              <a:srgbClr val="101715"/>
-            </a:solidFill>
-            <a:tailEnd type="triangle" w="med" len="med"/>
-          </a:ln>
-        </p:spPr>
-        <p:style>
-          <a:lnRef idx="2">
-            <a:schemeClr val="accent1"/>
-          </a:lnRef>
-          <a:fillRef idx="0">
-            <a:schemeClr val="accent1"/>
-          </a:fillRef>
-          <a:effectRef idx="1">
-            <a:schemeClr val="accent1"/>
-          </a:effectRef>
-          <a:fontRef idx="minor">
-            <a:schemeClr val="tx1"/>
-          </a:fontRef>
-        </p:style>
-      </p:cxnSp>
-      <p:sp>
-        <p:nvSpPr>
-          <p:cNvPr id="34" name="TextBox 33"/>
+                  <a:srgbClr val="8A6410"/>
+                </a:solidFill>
+                <a:latin typeface="Apple SD Gothic Neo"/>
+              </a:rPr>
+              <a:t>못 올린 PC → 다음 부팅 때 자동 회수</a:t>
+            </a:r>
+          </a:p>
+        </p:txBody>
+      </p:sp>
+      <p:sp>
+        <p:nvSpPr>
+          <p:cNvPr id="24" name="TextBox 23"/>
           <p:cNvSpPr txBox="1"/>
           <p:nvPr/>
         </p:nvSpPr>
         <p:spPr>
           <a:xfrm>
-            <a:off x="10287000" y="2029968"/>
-            <a:ext cx="1737360" cy="228600"/>
+            <a:off x="7635240" y="4681728"/>
+            <a:ext cx="3657600" cy="274320"/>
           </a:xfrm>
           <a:prstGeom prst="rect">
             <a:avLst/>
@@ -7768,342 +7696,20 @@
               </a:lnSpc>
             </a:pPr>
             <a:r>
-              <a:rPr sz="950" b="0" spc="120">
-                <a:solidFill>
-                  <a:srgbClr val="78837F"/>
-                </a:solidFill>
-                <a:latin typeface="Menlo"/>
-              </a:rPr>
-              <a:t>④ 열람</a:t>
-            </a:r>
-          </a:p>
-        </p:txBody>
-      </p:sp>
-      <p:sp>
-        <p:nvSpPr>
-          <p:cNvPr id="35" name="Rounded Rectangle 34"/>
-          <p:cNvSpPr/>
-          <p:nvPr/>
-        </p:nvSpPr>
-        <p:spPr>
-          <a:xfrm>
-            <a:off x="10287000" y="2331720"/>
-            <a:ext cx="1572768" cy="2514600"/>
-          </a:xfrm>
-          <a:prstGeom prst="roundRect">
-            <a:avLst>
-              <a:gd name="adj" fmla="val 8000"/>
-            </a:avLst>
-          </a:prstGeom>
-          <a:noFill/>
-          <a:ln w="15875">
-            <a:solidFill>
-              <a:srgbClr val="101715"/>
-            </a:solidFill>
-          </a:ln>
-          <a:effectLst/>
-        </p:spPr>
-        <p:style>
-          <a:lnRef idx="1">
-            <a:schemeClr val="accent1"/>
-          </a:lnRef>
-          <a:fillRef idx="3">
-            <a:schemeClr val="accent1"/>
-          </a:fillRef>
-          <a:effectRef idx="2">
-            <a:schemeClr val="accent1"/>
-          </a:effectRef>
-          <a:fontRef idx="minor">
-            <a:schemeClr val="lt1"/>
-          </a:fontRef>
-        </p:style>
-        <p:txBody>
-          <a:bodyPr rtlCol="0" anchor="ctr" wrap="square"/>
-          <a:lstStyle/>
-          <a:p>
-            <a:pPr algn="ctr"/>
-          </a:p>
-        </p:txBody>
-      </p:sp>
-      <p:sp>
-        <p:nvSpPr>
-          <p:cNvPr id="36" name="Rounded Rectangle 35"/>
-          <p:cNvSpPr/>
-          <p:nvPr/>
-        </p:nvSpPr>
-        <p:spPr>
-          <a:xfrm>
-            <a:off x="10424160" y="2496312"/>
-            <a:ext cx="1325880" cy="256032"/>
-          </a:xfrm>
-          <a:prstGeom prst="roundRect">
-            <a:avLst>
-              <a:gd name="adj" fmla="val 8000"/>
-            </a:avLst>
-          </a:prstGeom>
-          <a:noFill/>
-          <a:ln>
-            <a:noFill/>
-          </a:ln>
-          <a:effectLst/>
-        </p:spPr>
-        <p:style>
-          <a:lnRef idx="1">
-            <a:schemeClr val="accent1"/>
-          </a:lnRef>
-          <a:fillRef idx="3">
-            <a:schemeClr val="accent1"/>
-          </a:fillRef>
-          <a:effectRef idx="2">
-            <a:schemeClr val="accent1"/>
-          </a:effectRef>
-          <a:fontRef idx="minor">
-            <a:schemeClr val="lt1"/>
-          </a:fontRef>
-        </p:style>
-        <p:txBody>
-          <a:bodyPr rtlCol="0" anchor="ctr" wrap="square" lIns="128016" rIns="128016" tIns="54864" bIns="54864"/>
-          <a:lstStyle/>
-          <a:p>
-            <a:pPr algn="l">
-              <a:lnSpc>
-                <a:spcPct val="125000"/>
-              </a:lnSpc>
-            </a:pPr>
-            <a:r>
-              <a:rPr sz="1150" b="1">
-                <a:solidFill>
-                  <a:srgbClr val="101715"/>
-                </a:solidFill>
-                <a:latin typeface="Apple SD Gothic Neo"/>
-              </a:rPr>
-              <a:t>대시보드</a:t>
-            </a:r>
-          </a:p>
-        </p:txBody>
-      </p:sp>
-      <p:sp>
-        <p:nvSpPr>
-          <p:cNvPr id="37" name="Rounded Rectangle 36"/>
-          <p:cNvSpPr/>
-          <p:nvPr/>
-        </p:nvSpPr>
-        <p:spPr>
-          <a:xfrm>
-            <a:off x="10424160" y="2880360"/>
-            <a:ext cx="1325880" cy="530352"/>
-          </a:xfrm>
-          <a:prstGeom prst="roundRect">
-            <a:avLst>
-              <a:gd name="adj" fmla="val 8000"/>
-            </a:avLst>
-          </a:prstGeom>
-          <a:noFill/>
-          <a:ln>
-            <a:noFill/>
-          </a:ln>
-          <a:effectLst/>
-        </p:spPr>
-        <p:style>
-          <a:lnRef idx="1">
-            <a:schemeClr val="accent1"/>
-          </a:lnRef>
-          <a:fillRef idx="3">
-            <a:schemeClr val="accent1"/>
-          </a:fillRef>
-          <a:effectRef idx="2">
-            <a:schemeClr val="accent1"/>
-          </a:effectRef>
-          <a:fontRef idx="minor">
-            <a:schemeClr val="lt1"/>
-          </a:fontRef>
-        </p:style>
-        <p:txBody>
-          <a:bodyPr rtlCol="0" anchor="ctr" wrap="square" lIns="18288" rIns="18288" tIns="54864" bIns="54864"/>
-          <a:lstStyle/>
-          <a:p>
-            <a:pPr algn="l">
-              <a:lnSpc>
-                <a:spcPct val="125000"/>
-              </a:lnSpc>
-            </a:pPr>
-            <a:r>
-              <a:rPr sz="1050" b="1">
-                <a:solidFill>
-                  <a:srgbClr val="101715"/>
-                </a:solidFill>
-                <a:latin typeface="Apple SD Gothic Neo"/>
-              </a:rPr>
-              <a:t>선생님</a:t>
-            </a:r>
-          </a:p>
-          <a:p>
-            <a:pPr algn="l">
-              <a:lnSpc>
-                <a:spcPct val="125000"/>
-              </a:lnSpc>
-            </a:pPr>
-            <a:r>
-              <a:rPr sz="850" b="0">
-                <a:solidFill>
-                  <a:srgbClr val="78837F"/>
-                </a:solidFill>
-                <a:latin typeface="Apple SD Gothic Neo"/>
-              </a:rPr>
-              <a:t>반 진행률 · 미제출</a:t>
-            </a:r>
-          </a:p>
-        </p:txBody>
-      </p:sp>
-      <p:sp>
-        <p:nvSpPr>
-          <p:cNvPr id="38" name="Rounded Rectangle 37"/>
-          <p:cNvSpPr/>
-          <p:nvPr/>
-        </p:nvSpPr>
-        <p:spPr>
-          <a:xfrm>
-            <a:off x="10424160" y="3483864"/>
-            <a:ext cx="1325880" cy="530352"/>
-          </a:xfrm>
-          <a:prstGeom prst="roundRect">
-            <a:avLst>
-              <a:gd name="adj" fmla="val 8000"/>
-            </a:avLst>
-          </a:prstGeom>
-          <a:noFill/>
-          <a:ln>
-            <a:noFill/>
-          </a:ln>
-          <a:effectLst/>
-        </p:spPr>
-        <p:style>
-          <a:lnRef idx="1">
-            <a:schemeClr val="accent1"/>
-          </a:lnRef>
-          <a:fillRef idx="3">
-            <a:schemeClr val="accent1"/>
-          </a:fillRef>
-          <a:effectRef idx="2">
-            <a:schemeClr val="accent1"/>
-          </a:effectRef>
-          <a:fontRef idx="minor">
-            <a:schemeClr val="lt1"/>
-          </a:fontRef>
-        </p:style>
-        <p:txBody>
-          <a:bodyPr rtlCol="0" anchor="ctr" wrap="square" lIns="18288" rIns="18288" tIns="54864" bIns="54864"/>
-          <a:lstStyle/>
-          <a:p>
-            <a:pPr algn="l">
-              <a:lnSpc>
-                <a:spcPct val="125000"/>
-              </a:lnSpc>
-            </a:pPr>
-            <a:r>
-              <a:rPr sz="1050" b="1">
-                <a:solidFill>
-                  <a:srgbClr val="101715"/>
-                </a:solidFill>
-                <a:latin typeface="Apple SD Gothic Neo"/>
-              </a:rPr>
-              <a:t>관리자</a:t>
-            </a:r>
-          </a:p>
-          <a:p>
-            <a:pPr algn="l">
-              <a:lnSpc>
-                <a:spcPct val="125000"/>
-              </a:lnSpc>
-            </a:pPr>
-            <a:r>
-              <a:rPr sz="850" b="0">
-                <a:solidFill>
-                  <a:srgbClr val="78837F"/>
-                </a:solidFill>
-                <a:latin typeface="Apple SD Gothic Neo"/>
-              </a:rPr>
-              <a:t>전체 회차 · 재업로드</a:t>
-            </a:r>
-          </a:p>
-        </p:txBody>
-      </p:sp>
-      <p:sp>
-        <p:nvSpPr>
-          <p:cNvPr id="39" name="Rounded Rectangle 38"/>
-          <p:cNvSpPr/>
-          <p:nvPr/>
-        </p:nvSpPr>
-        <p:spPr>
-          <a:xfrm>
-            <a:off x="10424160" y="4087368"/>
-            <a:ext cx="1325880" cy="530352"/>
-          </a:xfrm>
-          <a:prstGeom prst="roundRect">
-            <a:avLst>
-              <a:gd name="adj" fmla="val 8000"/>
-            </a:avLst>
-          </a:prstGeom>
-          <a:noFill/>
-          <a:ln>
-            <a:noFill/>
-          </a:ln>
-          <a:effectLst/>
-        </p:spPr>
-        <p:style>
-          <a:lnRef idx="1">
-            <a:schemeClr val="accent1"/>
-          </a:lnRef>
-          <a:fillRef idx="3">
-            <a:schemeClr val="accent1"/>
-          </a:fillRef>
-          <a:effectRef idx="2">
-            <a:schemeClr val="accent1"/>
-          </a:effectRef>
-          <a:fontRef idx="minor">
-            <a:schemeClr val="lt1"/>
-          </a:fontRef>
-        </p:style>
-        <p:txBody>
-          <a:bodyPr rtlCol="0" anchor="ctr" wrap="square" lIns="18288" rIns="18288" tIns="54864" bIns="54864"/>
-          <a:lstStyle/>
-          <a:p>
-            <a:pPr algn="l">
-              <a:lnSpc>
-                <a:spcPct val="125000"/>
-              </a:lnSpc>
-            </a:pPr>
-            <a:r>
-              <a:rPr sz="1050" b="1">
-                <a:solidFill>
-                  <a:srgbClr val="101715"/>
-                </a:solidFill>
-                <a:latin typeface="Apple SD Gothic Neo"/>
-              </a:rPr>
-              <a:t>학생</a:t>
-            </a:r>
-          </a:p>
-          <a:p>
-            <a:pPr algn="l">
-              <a:lnSpc>
-                <a:spcPct val="125000"/>
-              </a:lnSpc>
-            </a:pPr>
-            <a:r>
-              <a:rPr sz="850" b="0">
-                <a:solidFill>
-                  <a:srgbClr val="78837F"/>
-                </a:solidFill>
-                <a:latin typeface="Apple SD Gothic Neo"/>
-              </a:rPr>
-              <a:t>본인 성적 · 오답</a:t>
-            </a:r>
-          </a:p>
-        </p:txBody>
-      </p:sp>
-      <p:sp>
-        <p:nvSpPr>
-          <p:cNvPr id="40" name="TextBox 39"/>
+              <a:rPr sz="1050" b="0">
+                <a:solidFill>
+                  <a:srgbClr val="8A6410"/>
+                </a:solidFill>
+                <a:latin typeface="Apple SD Gothic Neo"/>
+              </a:rPr>
+              <a:t>시간이 모자라도 답안은 살아 있다</a:t>
+            </a:r>
+          </a:p>
+        </p:txBody>
+      </p:sp>
+      <p:sp>
+        <p:nvSpPr>
+          <p:cNvPr id="25" name="TextBox 24"/>
           <p:cNvSpPr txBox="1"/>
           <p:nvPr/>
         </p:nvSpPr>
@@ -8135,7 +7741,7 @@
                 </a:solidFill>
                 <a:latin typeface="Apple SD Gothic Neo"/>
               </a:rPr>
-              <a:t>① · ② 는 인터넷 없이 동작한다 — 시험은 여기서 끝난다. 굵은 초록 화살표가 유일하게 인터넷을 필요로 하는 구간이다.</a:t>
+              <a:t>회수창이 지나도 로컬 데이터는 그대로다 — 삭제는 서버 확인 뒤에만 일어난다. 회수창은 목표지 마감이 아니다.</a:t>
             </a:r>
           </a:p>
         </p:txBody>
@@ -8200,7 +7806,7 @@
                 </a:solidFill>
                 <a:latin typeface="Menlo"/>
               </a:rPr>
-              <a:t>DECISION</a:t>
+              <a:t>SHARED PC</a:t>
             </a:r>
           </a:p>
         </p:txBody>
@@ -8239,7 +7845,7 @@
                 </a:solidFill>
                 <a:latin typeface="Apple SD Gothic Neo"/>
               </a:rPr>
-              <a:t>교실 허브를 둘 것인가</a:t>
+              <a:t>공용 PC의 진짜 문제 — 고아 아웃박스</a:t>
             </a:r>
           </a:p>
         </p:txBody>
@@ -8326,8 +7932,8 @@
         </p:nvSpPr>
         <p:spPr>
           <a:xfrm>
-            <a:off x="685800" y="1627632"/>
-            <a:ext cx="10789920" cy="292608"/>
+            <a:off x="685800" y="1600200"/>
+            <a:ext cx="10789920" cy="502920"/>
           </a:xfrm>
           <a:prstGeom prst="rect">
             <a:avLst/>
@@ -8342,17 +7948,33 @@
           <a:p>
             <a:pPr algn="l">
               <a:lnSpc>
-                <a:spcPct val="135000"/>
-              </a:lnSpc>
-            </a:pPr>
-            <a:r>
-              <a:rPr sz="1250" b="0">
+                <a:spcPct val="145000"/>
+              </a:lnSpc>
+            </a:pPr>
+            <a:r>
+              <a:rPr sz="1200" b="0">
                 <a:solidFill>
                   <a:srgbClr val="4E5A57"/>
                 </a:solidFill>
                 <a:latin typeface="Apple SD Gothic Neo"/>
               </a:rPr>
-              <a:t>기능은 같다. 갈리는 것은 단말이 고장 났을 때 — 답안 사본이 몇 벌 존재하는가다.</a:t>
+              <a:t>계정이 다르면 데이터가 섞이지는 않는다. exam-store.js 의 키가 세션별로 갈리기 때문이다.</a:t>
+            </a:r>
+          </a:p>
+          <a:p>
+            <a:pPr algn="l">
+              <a:lnSpc>
+                <a:spcPct val="145000"/>
+              </a:lnSpc>
+            </a:pPr>
+            <a:r>
+              <a:rPr sz="1200" b="0">
+                <a:solidFill>
+                  <a:srgbClr val="4E5A57"/>
+                </a:solidFill>
+                <a:latin typeface="Apple SD Gothic Neo"/>
+              </a:rPr>
+              <a:t>문제는 업로드가 “현재 세션”만 본다는 것 — 앞 반 학생의 큐는 남은 채 아무도 읽지 않는다.</a:t>
             </a:r>
           </a:p>
         </p:txBody>
@@ -8365,8 +7987,8 @@
         </p:nvSpPr>
         <p:spPr>
           <a:xfrm>
-            <a:off x="685800" y="2057400"/>
-            <a:ext cx="4114800" cy="228600"/>
+            <a:off x="685800" y="2286000"/>
+            <a:ext cx="4572000" cy="228600"/>
           </a:xfrm>
           <a:prstGeom prst="rect">
             <a:avLst/>
@@ -8391,7 +8013,7 @@
                 </a:solidFill>
                 <a:latin typeface="Menlo"/>
               </a:rPr>
-              <a:t>A안 · 단말 직접 업로드</a:t>
+              <a:t>지금 · 현재 세션만 본다</a:t>
             </a:r>
           </a:p>
         </p:txBody>
@@ -8404,8 +8026,8 @@
         </p:nvSpPr>
         <p:spPr>
           <a:xfrm>
-            <a:off x="685800" y="2377440"/>
-            <a:ext cx="1463040" cy="411480"/>
+            <a:off x="685800" y="2560320"/>
+            <a:ext cx="2606040" cy="2148840"/>
           </a:xfrm>
           <a:prstGeom prst="roundRect">
             <a:avLst>
@@ -8413,7 +8035,7 @@
             </a:avLst>
           </a:prstGeom>
           <a:noFill/>
-          <a:ln w="12700">
+          <a:ln w="14604">
             <a:solidFill>
               <a:srgbClr val="101715"/>
             </a:solidFill>
@@ -8435,44 +8057,222 @@
           </a:fontRef>
         </p:style>
         <p:txBody>
-          <a:bodyPr rtlCol="0" anchor="ctr" wrap="square" lIns="128016" rIns="128016" tIns="54864" bIns="54864"/>
-          <a:lstStyle/>
-          <a:p>
-            <a:pPr algn="l">
-              <a:lnSpc>
-                <a:spcPct val="125000"/>
-              </a:lnSpc>
-            </a:pPr>
-            <a:r>
-              <a:rPr sz="1050" b="0">
+          <a:bodyPr rtlCol="0" anchor="ctr" wrap="square"/>
+          <a:lstStyle/>
+          <a:p>
+            <a:pPr algn="ctr"/>
+          </a:p>
+        </p:txBody>
+      </p:sp>
+      <p:sp>
+        <p:nvSpPr>
+          <p:cNvPr id="9" name="TextBox 8"/>
+          <p:cNvSpPr txBox="1"/>
+          <p:nvPr/>
+        </p:nvSpPr>
+        <p:spPr>
+          <a:xfrm>
+            <a:off x="868680" y="2724912"/>
+            <a:ext cx="2194560" cy="228600"/>
+          </a:xfrm>
+          <a:prstGeom prst="rect">
+            <a:avLst/>
+          </a:prstGeom>
+          <a:noFill/>
+        </p:spPr>
+        <p:txBody>
+          <a:bodyPr wrap="square" lIns="0" rIns="0" tIns="0" bIns="0" anchor="t">
+            <a:spAutoFit/>
+          </a:bodyPr>
+          <a:lstStyle/>
+          <a:p>
+            <a:pPr algn="l">
+              <a:lnSpc>
+                <a:spcPct val="135000"/>
+              </a:lnSpc>
+            </a:pPr>
+            <a:r>
+              <a:rPr sz="1100" b="1">
                 <a:solidFill>
                   <a:srgbClr val="101715"/>
                 </a:solidFill>
                 <a:latin typeface="Apple SD Gothic Neo"/>
               </a:rPr>
-              <a:t>학생 PC 1</a:t>
-            </a:r>
-          </a:p>
-        </p:txBody>
-      </p:sp>
-      <p:sp>
-        <p:nvSpPr>
-          <p:cNvPr id="9" name="Rounded Rectangle 8"/>
+              <a:t>공용 PC 저장소</a:t>
+            </a:r>
+          </a:p>
+        </p:txBody>
+      </p:sp>
+      <p:sp>
+        <p:nvSpPr>
+          <p:cNvPr id="10" name="Rounded Rectangle 9"/>
           <p:cNvSpPr/>
           <p:nvPr/>
         </p:nvSpPr>
         <p:spPr>
           <a:xfrm>
-            <a:off x="685800" y="2944368"/>
-            <a:ext cx="1463040" cy="411480"/>
+            <a:off x="868680" y="3017520"/>
+            <a:ext cx="2240280" cy="457200"/>
           </a:xfrm>
           <a:prstGeom prst="roundRect">
             <a:avLst>
               <a:gd name="adj" fmla="val 8000"/>
             </a:avLst>
           </a:prstGeom>
-          <a:noFill/>
-          <a:ln w="12700">
+          <a:solidFill>
+            <a:srgbClr val="E4E9E7"/>
+          </a:solidFill>
+          <a:ln>
+            <a:noFill/>
+          </a:ln>
+          <a:effectLst/>
+        </p:spPr>
+        <p:style>
+          <a:lnRef idx="1">
+            <a:schemeClr val="accent1"/>
+          </a:lnRef>
+          <a:fillRef idx="3">
+            <a:schemeClr val="accent1"/>
+          </a:fillRef>
+          <a:effectRef idx="2">
+            <a:schemeClr val="accent1"/>
+          </a:effectRef>
+          <a:fontRef idx="minor">
+            <a:schemeClr val="lt1"/>
+          </a:fontRef>
+        </p:style>
+        <p:txBody>
+          <a:bodyPr rtlCol="0" anchor="ctr" wrap="square" tIns="54864" bIns="54864"/>
+          <a:lstStyle/>
+          <a:p>
+            <a:pPr algn="l">
+              <a:lnSpc>
+                <a:spcPct val="125000"/>
+              </a:lnSpc>
+            </a:pPr>
+            <a:r>
+              <a:rPr sz="1000" b="0">
+                <a:solidFill>
+                  <a:srgbClr val="101715"/>
+                </a:solidFill>
+                <a:latin typeface="Apple SD Gothic Neo"/>
+              </a:rPr>
+              <a:t>1교시 · 김○○ 세션</a:t>
+            </a:r>
+          </a:p>
+          <a:p>
+            <a:pPr algn="l">
+              <a:lnSpc>
+                <a:spcPct val="125000"/>
+              </a:lnSpc>
+            </a:pPr>
+            <a:r>
+              <a:rPr sz="850" b="0">
+                <a:solidFill>
+                  <a:srgbClr val="78837F"/>
+                </a:solidFill>
+                <a:latin typeface="Apple SD Gothic Neo"/>
+              </a:rPr>
+              <a:t>큐 11건 남음</a:t>
+            </a:r>
+          </a:p>
+        </p:txBody>
+      </p:sp>
+      <p:sp>
+        <p:nvSpPr>
+          <p:cNvPr id="11" name="Rounded Rectangle 10"/>
+          <p:cNvSpPr/>
+          <p:nvPr/>
+        </p:nvSpPr>
+        <p:spPr>
+          <a:xfrm>
+            <a:off x="868680" y="3547872"/>
+            <a:ext cx="2240280" cy="457200"/>
+          </a:xfrm>
+          <a:prstGeom prst="roundRect">
+            <a:avLst>
+              <a:gd name="adj" fmla="val 8000"/>
+            </a:avLst>
+          </a:prstGeom>
+          <a:solidFill>
+            <a:srgbClr val="E4E9E7"/>
+          </a:solidFill>
+          <a:ln>
+            <a:noFill/>
+          </a:ln>
+          <a:effectLst/>
+        </p:spPr>
+        <p:style>
+          <a:lnRef idx="1">
+            <a:schemeClr val="accent1"/>
+          </a:lnRef>
+          <a:fillRef idx="3">
+            <a:schemeClr val="accent1"/>
+          </a:fillRef>
+          <a:effectRef idx="2">
+            <a:schemeClr val="accent1"/>
+          </a:effectRef>
+          <a:fontRef idx="minor">
+            <a:schemeClr val="lt1"/>
+          </a:fontRef>
+        </p:style>
+        <p:txBody>
+          <a:bodyPr rtlCol="0" anchor="ctr" wrap="square" tIns="54864" bIns="54864"/>
+          <a:lstStyle/>
+          <a:p>
+            <a:pPr algn="l">
+              <a:lnSpc>
+                <a:spcPct val="125000"/>
+              </a:lnSpc>
+            </a:pPr>
+            <a:r>
+              <a:rPr sz="1000" b="0">
+                <a:solidFill>
+                  <a:srgbClr val="101715"/>
+                </a:solidFill>
+                <a:latin typeface="Apple SD Gothic Neo"/>
+              </a:rPr>
+              <a:t>2교시 · 박○○ 세션</a:t>
+            </a:r>
+          </a:p>
+          <a:p>
+            <a:pPr algn="l">
+              <a:lnSpc>
+                <a:spcPct val="125000"/>
+              </a:lnSpc>
+            </a:pPr>
+            <a:r>
+              <a:rPr sz="850" b="0">
+                <a:solidFill>
+                  <a:srgbClr val="78837F"/>
+                </a:solidFill>
+                <a:latin typeface="Apple SD Gothic Neo"/>
+              </a:rPr>
+              <a:t>큐 7건 남음</a:t>
+            </a:r>
+          </a:p>
+        </p:txBody>
+      </p:sp>
+      <p:sp>
+        <p:nvSpPr>
+          <p:cNvPr id="12" name="Rounded Rectangle 11"/>
+          <p:cNvSpPr/>
+          <p:nvPr/>
+        </p:nvSpPr>
+        <p:spPr>
+          <a:xfrm>
+            <a:off x="868680" y="4078224"/>
+            <a:ext cx="2240280" cy="457200"/>
+          </a:xfrm>
+          <a:prstGeom prst="roundRect">
+            <a:avLst>
+              <a:gd name="adj" fmla="val 8000"/>
+            </a:avLst>
+          </a:prstGeom>
+          <a:solidFill>
+            <a:srgbClr val="E4E9E7"/>
+          </a:solidFill>
+          <a:ln w="15240">
             <a:solidFill>
               <a:srgbClr val="101715"/>
             </a:solidFill>
@@ -8494,7 +8294,7 @@
           </a:fontRef>
         </p:style>
         <p:txBody>
-          <a:bodyPr rtlCol="0" anchor="ctr" wrap="square" lIns="128016" rIns="128016" tIns="54864" bIns="54864"/>
+          <a:bodyPr rtlCol="0" anchor="ctr" wrap="square" tIns="54864" bIns="54864"/>
           <a:lstStyle/>
           <a:p>
             <a:pPr algn="l">
@@ -8503,132 +8303,50 @@
               </a:lnSpc>
             </a:pPr>
             <a:r>
-              <a:rPr sz="1050" b="0">
+              <a:rPr sz="1000" b="1">
                 <a:solidFill>
                   <a:srgbClr val="101715"/>
                 </a:solidFill>
                 <a:latin typeface="Apple SD Gothic Neo"/>
               </a:rPr>
-              <a:t>학생 PC 2</a:t>
-            </a:r>
-          </a:p>
-        </p:txBody>
-      </p:sp>
-      <p:sp>
-        <p:nvSpPr>
-          <p:cNvPr id="10" name="Rounded Rectangle 9"/>
-          <p:cNvSpPr/>
-          <p:nvPr/>
-        </p:nvSpPr>
-        <p:spPr>
-          <a:xfrm>
-            <a:off x="685800" y="3739896"/>
-            <a:ext cx="1463040" cy="411480"/>
-          </a:xfrm>
-          <a:prstGeom prst="roundRect">
-            <a:avLst>
-              <a:gd name="adj" fmla="val 8000"/>
-            </a:avLst>
-          </a:prstGeom>
-          <a:noFill/>
-          <a:ln w="12700">
+              <a:t>3교시 · 이○○ 세션</a:t>
+            </a:r>
+          </a:p>
+          <a:p>
+            <a:pPr algn="l">
+              <a:lnSpc>
+                <a:spcPct val="125000"/>
+              </a:lnSpc>
+            </a:pPr>
+            <a:r>
+              <a:rPr sz="850" b="0">
+                <a:solidFill>
+                  <a:srgbClr val="78837F"/>
+                </a:solidFill>
+                <a:latin typeface="Apple SD Gothic Neo"/>
+              </a:rPr>
+              <a:t>← 지금 로그인한 학생</a:t>
+            </a:r>
+          </a:p>
+        </p:txBody>
+      </p:sp>
+      <p:cxnSp>
+        <p:nvCxnSpPr>
+          <p:cNvPr id="13" name="Connector 12"/>
+          <p:cNvCxnSpPr/>
+          <p:nvPr/>
+        </p:nvCxnSpPr>
+        <p:spPr>
+          <a:xfrm>
+            <a:off x="3291840" y="4306824"/>
+            <a:ext cx="685799" cy="0"/>
+          </a:xfrm>
+          <a:prstGeom prst="line">
+            <a:avLst/>
+          </a:prstGeom>
+          <a:ln w="17780">
             <a:solidFill>
               <a:srgbClr val="101715"/>
-            </a:solidFill>
-          </a:ln>
-          <a:effectLst/>
-        </p:spPr>
-        <p:style>
-          <a:lnRef idx="1">
-            <a:schemeClr val="accent1"/>
-          </a:lnRef>
-          <a:fillRef idx="3">
-            <a:schemeClr val="accent1"/>
-          </a:fillRef>
-          <a:effectRef idx="2">
-            <a:schemeClr val="accent1"/>
-          </a:effectRef>
-          <a:fontRef idx="minor">
-            <a:schemeClr val="lt1"/>
-          </a:fontRef>
-        </p:style>
-        <p:txBody>
-          <a:bodyPr rtlCol="0" anchor="ctr" wrap="square" lIns="128016" rIns="128016" tIns="54864" bIns="54864"/>
-          <a:lstStyle/>
-          <a:p>
-            <a:pPr algn="l">
-              <a:lnSpc>
-                <a:spcPct val="125000"/>
-              </a:lnSpc>
-            </a:pPr>
-            <a:r>
-              <a:rPr sz="1050" b="0">
-                <a:solidFill>
-                  <a:srgbClr val="101715"/>
-                </a:solidFill>
-                <a:latin typeface="Apple SD Gothic Neo"/>
-              </a:rPr>
-              <a:t>학생 PC 30</a:t>
-            </a:r>
-          </a:p>
-        </p:txBody>
-      </p:sp>
-      <p:sp>
-        <p:nvSpPr>
-          <p:cNvPr id="11" name="TextBox 10"/>
-          <p:cNvSpPr txBox="1"/>
-          <p:nvPr/>
-        </p:nvSpPr>
-        <p:spPr>
-          <a:xfrm>
-            <a:off x="1188720" y="3474720"/>
-            <a:ext cx="457200" cy="228600"/>
-          </a:xfrm>
-          <a:prstGeom prst="rect">
-            <a:avLst/>
-          </a:prstGeom>
-          <a:noFill/>
-        </p:spPr>
-        <p:txBody>
-          <a:bodyPr wrap="square" lIns="0" rIns="0" tIns="0" bIns="0" anchor="t">
-            <a:spAutoFit/>
-          </a:bodyPr>
-          <a:lstStyle/>
-          <a:p>
-            <a:pPr algn="l">
-              <a:lnSpc>
-                <a:spcPct val="135000"/>
-              </a:lnSpc>
-            </a:pPr>
-            <a:r>
-              <a:rPr sz="1300" b="0">
-                <a:solidFill>
-                  <a:srgbClr val="78837F"/>
-                </a:solidFill>
-                <a:latin typeface="Apple SD Gothic Neo"/>
-              </a:rPr>
-              <a:t>⋮</a:t>
-            </a:r>
-          </a:p>
-        </p:txBody>
-      </p:sp>
-      <p:cxnSp>
-        <p:nvCxnSpPr>
-          <p:cNvPr id="12" name="Connector 11"/>
-          <p:cNvCxnSpPr/>
-          <p:nvPr/>
-        </p:nvCxnSpPr>
-        <p:spPr>
-          <a:xfrm>
-            <a:off x="2148840" y="2578608"/>
-            <a:ext cx="1463040" cy="850392"/>
-          </a:xfrm>
-          <a:prstGeom prst="line">
-            <a:avLst/>
-          </a:prstGeom>
-          <a:ln w="11430">
-            <a:solidFill>
-              <a:srgbClr val="4E5A57"/>
             </a:solidFill>
             <a:tailEnd type="triangle" w="med" len="med"/>
           </a:ln>
@@ -8648,88 +8366,16 @@
           </a:fontRef>
         </p:style>
       </p:cxnSp>
-      <p:cxnSp>
-        <p:nvCxnSpPr>
-          <p:cNvPr id="13" name="Connector 12"/>
-          <p:cNvCxnSpPr/>
-          <p:nvPr/>
-        </p:nvCxnSpPr>
-        <p:spPr>
-          <a:xfrm>
-            <a:off x="2148840" y="3145536"/>
-            <a:ext cx="1463040" cy="283464"/>
-          </a:xfrm>
-          <a:prstGeom prst="line">
-            <a:avLst/>
-          </a:prstGeom>
-          <a:ln w="11430">
-            <a:solidFill>
-              <a:srgbClr val="4E5A57"/>
-            </a:solidFill>
-            <a:tailEnd type="triangle" w="med" len="med"/>
-          </a:ln>
-        </p:spPr>
-        <p:style>
-          <a:lnRef idx="2">
-            <a:schemeClr val="accent1"/>
-          </a:lnRef>
-          <a:fillRef idx="0">
-            <a:schemeClr val="accent1"/>
-          </a:fillRef>
-          <a:effectRef idx="1">
-            <a:schemeClr val="accent1"/>
-          </a:effectRef>
-          <a:fontRef idx="minor">
-            <a:schemeClr val="tx1"/>
-          </a:fontRef>
-        </p:style>
-      </p:cxnSp>
-      <p:cxnSp>
-        <p:nvCxnSpPr>
-          <p:cNvPr id="14" name="Connector 13"/>
-          <p:cNvCxnSpPr/>
-          <p:nvPr/>
-        </p:nvCxnSpPr>
-        <p:spPr>
-          <a:xfrm flipV="1">
-            <a:off x="2148840" y="3429000"/>
-            <a:ext cx="1463040" cy="512063"/>
-          </a:xfrm>
-          <a:prstGeom prst="line">
-            <a:avLst/>
-          </a:prstGeom>
-          <a:ln w="11430">
-            <a:solidFill>
-              <a:srgbClr val="4E5A57"/>
-            </a:solidFill>
-            <a:tailEnd type="triangle" w="med" len="med"/>
-          </a:ln>
-        </p:spPr>
-        <p:style>
-          <a:lnRef idx="2">
-            <a:schemeClr val="accent1"/>
-          </a:lnRef>
-          <a:fillRef idx="0">
-            <a:schemeClr val="accent1"/>
-          </a:fillRef>
-          <a:effectRef idx="1">
-            <a:schemeClr val="accent1"/>
-          </a:effectRef>
-          <a:fontRef idx="minor">
-            <a:schemeClr val="tx1"/>
-          </a:fontRef>
-        </p:style>
-      </p:cxnSp>
-      <p:sp>
-        <p:nvSpPr>
-          <p:cNvPr id="15" name="TextBox 14"/>
+      <p:sp>
+        <p:nvSpPr>
+          <p:cNvPr id="14" name="TextBox 13"/>
           <p:cNvSpPr txBox="1"/>
           <p:nvPr/>
         </p:nvSpPr>
         <p:spPr>
           <a:xfrm>
-            <a:off x="1965960" y="4160520"/>
-            <a:ext cx="1828800" cy="548640"/>
+            <a:off x="3310128" y="4041648"/>
+            <a:ext cx="685800" cy="228600"/>
           </a:xfrm>
           <a:prstGeom prst="rect">
             <a:avLst/>
@@ -8754,37 +8400,21 @@
                 </a:solidFill>
                 <a:latin typeface="Apple SD Gothic Neo"/>
               </a:rPr>
-              <a:t>업로드 경로 30개</a:t>
-            </a:r>
-          </a:p>
-          <a:p>
-            <a:pPr algn="ctr">
-              <a:lnSpc>
-                <a:spcPct val="135000"/>
-              </a:lnSpc>
-            </a:pPr>
-            <a:r>
-              <a:rPr sz="950" b="0">
-                <a:solidFill>
-                  <a:srgbClr val="4E5A57"/>
-                </a:solidFill>
-                <a:latin typeface="Apple SD Gothic Neo"/>
-              </a:rPr>
-              <a:t>각자 재시도 · 각자 실패</a:t>
-            </a:r>
-          </a:p>
-        </p:txBody>
-      </p:sp>
-      <p:sp>
-        <p:nvSpPr>
-          <p:cNvPr id="16" name="Rounded Rectangle 15"/>
+              <a:t>flush</a:t>
+            </a:r>
+          </a:p>
+        </p:txBody>
+      </p:sp>
+      <p:sp>
+        <p:nvSpPr>
+          <p:cNvPr id="15" name="Rounded Rectangle 14"/>
           <p:cNvSpPr/>
           <p:nvPr/>
         </p:nvSpPr>
         <p:spPr>
           <a:xfrm>
-            <a:off x="3611880" y="3200400"/>
-            <a:ext cx="1417320" cy="502920"/>
+            <a:off x="3977639" y="4078224"/>
+            <a:ext cx="1234440" cy="457200"/>
           </a:xfrm>
           <a:prstGeom prst="roundRect">
             <a:avLst>
@@ -8825,110 +8455,36 @@
               </a:lnSpc>
             </a:pPr>
             <a:r>
-              <a:rPr sz="1050" b="0">
+              <a:rPr sz="1000" b="0">
                 <a:solidFill>
                   <a:srgbClr val="101715"/>
                 </a:solidFill>
                 <a:latin typeface="Apple SD Gothic Neo"/>
               </a:rPr>
               <a:t>Supabase</a:t>
-            </a:r>
-          </a:p>
-        </p:txBody>
-      </p:sp>
-      <p:sp>
-        <p:nvSpPr>
-          <p:cNvPr id="17" name="Rounded Rectangle 16"/>
-          <p:cNvSpPr/>
-          <p:nvPr/>
-        </p:nvSpPr>
-        <p:spPr>
-          <a:xfrm>
-            <a:off x="685800" y="4892040"/>
-            <a:ext cx="4343400" cy="822960"/>
-          </a:xfrm>
-          <a:prstGeom prst="roundRect">
-            <a:avLst>
-              <a:gd name="adj" fmla="val 8000"/>
-            </a:avLst>
-          </a:prstGeom>
-          <a:solidFill>
-            <a:srgbClr val="F5E3E2"/>
-          </a:solidFill>
-          <a:ln>
-            <a:noFill/>
-          </a:ln>
-          <a:effectLst/>
-        </p:spPr>
-        <p:style>
-          <a:lnRef idx="1">
-            <a:schemeClr val="accent1"/>
-          </a:lnRef>
-          <a:fillRef idx="3">
-            <a:schemeClr val="accent1"/>
-          </a:fillRef>
-          <a:effectRef idx="2">
-            <a:schemeClr val="accent1"/>
-          </a:effectRef>
-          <a:fontRef idx="minor">
-            <a:schemeClr val="lt1"/>
-          </a:fontRef>
-        </p:style>
-        <p:txBody>
-          <a:bodyPr rtlCol="0" anchor="ctr" wrap="square" lIns="128016" rIns="128016" tIns="54864" bIns="54864"/>
-          <a:lstStyle/>
-          <a:p>
-            <a:pPr algn="l">
-              <a:lnSpc>
-                <a:spcPct val="125000"/>
-              </a:lnSpc>
-            </a:pPr>
-            <a:r>
-              <a:rPr sz="1100" b="1">
-                <a:solidFill>
-                  <a:srgbClr val="A32E28"/>
-                </a:solidFill>
-                <a:latin typeface="Apple SD Gothic Neo"/>
-              </a:rPr>
-              <a:t>학생 PC 3이 시험 후 초기화되면</a:t>
-            </a:r>
-          </a:p>
-          <a:p>
-            <a:pPr algn="l">
-              <a:lnSpc>
-                <a:spcPct val="125000"/>
-              </a:lnSpc>
-            </a:pPr>
-            <a:r>
-              <a:rPr sz="1050" b="0">
-                <a:solidFill>
-                  <a:srgbClr val="A32E28"/>
-                </a:solidFill>
-                <a:latin typeface="Apple SD Gothic Neo"/>
-              </a:rPr>
-              <a:t>→ 그 학생 답안은 어디에도 없다. 복구 불가.</a:t>
             </a:r>
           </a:p>
         </p:txBody>
       </p:sp>
       <p:cxnSp>
         <p:nvCxnSpPr>
-          <p:cNvPr id="18" name="Connector 17"/>
+          <p:cNvPr id="16" name="Connector 15"/>
           <p:cNvCxnSpPr/>
           <p:nvPr/>
         </p:nvCxnSpPr>
         <p:spPr>
           <a:xfrm>
-            <a:off x="5623560" y="2011680"/>
-            <a:ext cx="0" cy="3840480"/>
+            <a:off x="3291840" y="3246120"/>
+            <a:ext cx="457199" cy="0"/>
           </a:xfrm>
           <a:prstGeom prst="line">
             <a:avLst/>
           </a:prstGeom>
-          <a:ln w="12700">
+          <a:ln w="15240">
             <a:solidFill>
-              <a:srgbClr val="D2DAD7"/>
+              <a:srgbClr val="A32E28"/>
             </a:solidFill>
+            <a:prstDash val="dash"/>
           </a:ln>
         </p:spPr>
         <p:style>
@@ -8948,14 +8504,14 @@
       </p:cxnSp>
       <p:sp>
         <p:nvSpPr>
-          <p:cNvPr id="19" name="TextBox 18"/>
+          <p:cNvPr id="17" name="TextBox 16"/>
           <p:cNvSpPr txBox="1"/>
           <p:nvPr/>
         </p:nvSpPr>
         <p:spPr>
           <a:xfrm>
-            <a:off x="6263640" y="2057400"/>
-            <a:ext cx="5029200" cy="228600"/>
+            <a:off x="3730752" y="3099815"/>
+            <a:ext cx="320040" cy="274320"/>
           </a:xfrm>
           <a:prstGeom prst="rect">
             <a:avLst/>
@@ -8974,27 +8530,309 @@
               </a:lnSpc>
             </a:pPr>
             <a:r>
+              <a:rPr sz="1400" b="0">
+                <a:solidFill>
+                  <a:srgbClr val="A32E28"/>
+                </a:solidFill>
+                <a:latin typeface="Apple SD Gothic Neo"/>
+              </a:rPr>
+              <a:t>✕</a:t>
+            </a:r>
+          </a:p>
+        </p:txBody>
+      </p:sp>
+      <p:sp>
+        <p:nvSpPr>
+          <p:cNvPr id="18" name="TextBox 17"/>
+          <p:cNvSpPr txBox="1"/>
+          <p:nvPr/>
+        </p:nvSpPr>
+        <p:spPr>
+          <a:xfrm>
+            <a:off x="4041648" y="3127248"/>
+            <a:ext cx="1737360" cy="228600"/>
+          </a:xfrm>
+          <a:prstGeom prst="rect">
+            <a:avLst/>
+          </a:prstGeom>
+          <a:noFill/>
+        </p:spPr>
+        <p:txBody>
+          <a:bodyPr wrap="square" lIns="0" rIns="0" tIns="0" bIns="0" anchor="t">
+            <a:spAutoFit/>
+          </a:bodyPr>
+          <a:lstStyle/>
+          <a:p>
+            <a:pPr algn="l">
+              <a:lnSpc>
+                <a:spcPct val="135000"/>
+              </a:lnSpc>
+            </a:pPr>
+            <a:r>
+              <a:rPr sz="1050" b="1">
+                <a:solidFill>
+                  <a:srgbClr val="A32E28"/>
+                </a:solidFill>
+                <a:latin typeface="Apple SD Gothic Neo"/>
+              </a:rPr>
+              <a:t>고아</a:t>
+            </a:r>
+          </a:p>
+        </p:txBody>
+      </p:sp>
+      <p:cxnSp>
+        <p:nvCxnSpPr>
+          <p:cNvPr id="19" name="Connector 18"/>
+          <p:cNvCxnSpPr/>
+          <p:nvPr/>
+        </p:nvCxnSpPr>
+        <p:spPr>
+          <a:xfrm>
+            <a:off x="3291840" y="3776472"/>
+            <a:ext cx="457199" cy="0"/>
+          </a:xfrm>
+          <a:prstGeom prst="line">
+            <a:avLst/>
+          </a:prstGeom>
+          <a:ln w="15240">
+            <a:solidFill>
+              <a:srgbClr val="A32E28"/>
+            </a:solidFill>
+            <a:prstDash val="dash"/>
+          </a:ln>
+        </p:spPr>
+        <p:style>
+          <a:lnRef idx="2">
+            <a:schemeClr val="accent1"/>
+          </a:lnRef>
+          <a:fillRef idx="0">
+            <a:schemeClr val="accent1"/>
+          </a:fillRef>
+          <a:effectRef idx="1">
+            <a:schemeClr val="accent1"/>
+          </a:effectRef>
+          <a:fontRef idx="minor">
+            <a:schemeClr val="tx1"/>
+          </a:fontRef>
+        </p:style>
+      </p:cxnSp>
+      <p:sp>
+        <p:nvSpPr>
+          <p:cNvPr id="20" name="TextBox 19"/>
+          <p:cNvSpPr txBox="1"/>
+          <p:nvPr/>
+        </p:nvSpPr>
+        <p:spPr>
+          <a:xfrm>
+            <a:off x="3730752" y="3630168"/>
+            <a:ext cx="320040" cy="274320"/>
+          </a:xfrm>
+          <a:prstGeom prst="rect">
+            <a:avLst/>
+          </a:prstGeom>
+          <a:noFill/>
+        </p:spPr>
+        <p:txBody>
+          <a:bodyPr wrap="square" lIns="0" rIns="0" tIns="0" bIns="0" anchor="t">
+            <a:spAutoFit/>
+          </a:bodyPr>
+          <a:lstStyle/>
+          <a:p>
+            <a:pPr algn="l">
+              <a:lnSpc>
+                <a:spcPct val="135000"/>
+              </a:lnSpc>
+            </a:pPr>
+            <a:r>
+              <a:rPr sz="1400" b="0">
+                <a:solidFill>
+                  <a:srgbClr val="A32E28"/>
+                </a:solidFill>
+                <a:latin typeface="Apple SD Gothic Neo"/>
+              </a:rPr>
+              <a:t>✕</a:t>
+            </a:r>
+          </a:p>
+        </p:txBody>
+      </p:sp>
+      <p:sp>
+        <p:nvSpPr>
+          <p:cNvPr id="21" name="TextBox 20"/>
+          <p:cNvSpPr txBox="1"/>
+          <p:nvPr/>
+        </p:nvSpPr>
+        <p:spPr>
+          <a:xfrm>
+            <a:off x="4041648" y="3657600"/>
+            <a:ext cx="1737360" cy="228600"/>
+          </a:xfrm>
+          <a:prstGeom prst="rect">
+            <a:avLst/>
+          </a:prstGeom>
+          <a:noFill/>
+        </p:spPr>
+        <p:txBody>
+          <a:bodyPr wrap="square" lIns="0" rIns="0" tIns="0" bIns="0" anchor="t">
+            <a:spAutoFit/>
+          </a:bodyPr>
+          <a:lstStyle/>
+          <a:p>
+            <a:pPr algn="l">
+              <a:lnSpc>
+                <a:spcPct val="135000"/>
+              </a:lnSpc>
+            </a:pPr>
+            <a:r>
+              <a:rPr sz="1050" b="1">
+                <a:solidFill>
+                  <a:srgbClr val="A32E28"/>
+                </a:solidFill>
+                <a:latin typeface="Apple SD Gothic Neo"/>
+              </a:rPr>
+              <a:t>고아</a:t>
+            </a:r>
+          </a:p>
+        </p:txBody>
+      </p:sp>
+      <p:sp>
+        <p:nvSpPr>
+          <p:cNvPr id="22" name="TextBox 21"/>
+          <p:cNvSpPr txBox="1"/>
+          <p:nvPr/>
+        </p:nvSpPr>
+        <p:spPr>
+          <a:xfrm>
+            <a:off x="685800" y="4846320"/>
+            <a:ext cx="4663440" cy="548640"/>
+          </a:xfrm>
+          <a:prstGeom prst="rect">
+            <a:avLst/>
+          </a:prstGeom>
+          <a:noFill/>
+        </p:spPr>
+        <p:txBody>
+          <a:bodyPr wrap="square" lIns="0" rIns="0" tIns="0" bIns="0" anchor="t">
+            <a:spAutoFit/>
+          </a:bodyPr>
+          <a:lstStyle/>
+          <a:p>
+            <a:pPr algn="l">
+              <a:lnSpc>
+                <a:spcPct val="140000"/>
+              </a:lnSpc>
+            </a:pPr>
+            <a:r>
+              <a:rPr sz="1050" b="0">
+                <a:solidFill>
+                  <a:srgbClr val="4E5A57"/>
+                </a:solidFill>
+                <a:latin typeface="Apple SD Gothic Neo"/>
+              </a:rPr>
+              <a:t>앞 반 답안은 PC에 남아만 있다. 그 학생 계정으로 이 PC에</a:t>
+            </a:r>
+          </a:p>
+          <a:p>
+            <a:pPr algn="l">
+              <a:lnSpc>
+                <a:spcPct val="140000"/>
+              </a:lnSpc>
+            </a:pPr>
+            <a:r>
+              <a:rPr sz="1050" b="0">
+                <a:solidFill>
+                  <a:srgbClr val="4E5A57"/>
+                </a:solidFill>
+                <a:latin typeface="Apple SD Gothic Neo"/>
+              </a:rPr>
+              <a:t>다시 들어와야 올라간다 — 사실상 불가능.</a:t>
+            </a:r>
+          </a:p>
+        </p:txBody>
+      </p:sp>
+      <p:cxnSp>
+        <p:nvCxnSpPr>
+          <p:cNvPr id="23" name="Connector 22"/>
+          <p:cNvCxnSpPr/>
+          <p:nvPr/>
+        </p:nvCxnSpPr>
+        <p:spPr>
+          <a:xfrm>
+            <a:off x="5806440" y="2240280"/>
+            <a:ext cx="0" cy="3200400"/>
+          </a:xfrm>
+          <a:prstGeom prst="line">
+            <a:avLst/>
+          </a:prstGeom>
+          <a:ln w="12700">
+            <a:solidFill>
+              <a:srgbClr val="D2DAD7"/>
+            </a:solidFill>
+          </a:ln>
+        </p:spPr>
+        <p:style>
+          <a:lnRef idx="2">
+            <a:schemeClr val="accent1"/>
+          </a:lnRef>
+          <a:fillRef idx="0">
+            <a:schemeClr val="accent1"/>
+          </a:fillRef>
+          <a:effectRef idx="1">
+            <a:schemeClr val="accent1"/>
+          </a:effectRef>
+          <a:fontRef idx="minor">
+            <a:schemeClr val="tx1"/>
+          </a:fontRef>
+        </p:style>
+      </p:cxnSp>
+      <p:sp>
+        <p:nvSpPr>
+          <p:cNvPr id="24" name="TextBox 23"/>
+          <p:cNvSpPr txBox="1"/>
+          <p:nvPr/>
+        </p:nvSpPr>
+        <p:spPr>
+          <a:xfrm>
+            <a:off x="6309360" y="2286000"/>
+            <a:ext cx="5120640" cy="228600"/>
+          </a:xfrm>
+          <a:prstGeom prst="rect">
+            <a:avLst/>
+          </a:prstGeom>
+          <a:noFill/>
+        </p:spPr>
+        <p:txBody>
+          <a:bodyPr wrap="square" lIns="0" rIns="0" tIns="0" bIns="0" anchor="t">
+            <a:spAutoFit/>
+          </a:bodyPr>
+          <a:lstStyle/>
+          <a:p>
+            <a:pPr algn="l">
+              <a:lnSpc>
+                <a:spcPct val="135000"/>
+              </a:lnSpc>
+            </a:pPr>
+            <a:r>
               <a:rPr sz="950" b="0" spc="120">
                 <a:solidFill>
                   <a:srgbClr val="0B6E5F"/>
                 </a:solidFill>
                 <a:latin typeface="Menlo"/>
               </a:rPr>
-              <a:t>B안 · 교실 허브 경유 (권장)</a:t>
-            </a:r>
-          </a:p>
-        </p:txBody>
-      </p:sp>
-      <p:sp>
-        <p:nvSpPr>
-          <p:cNvPr id="20" name="Rounded Rectangle 19"/>
+              <a:t>추가 · 시작 시 전체 세션을 훑는다</a:t>
+            </a:r>
+          </a:p>
+        </p:txBody>
+      </p:sp>
+      <p:sp>
+        <p:nvSpPr>
+          <p:cNvPr id="25" name="Rounded Rectangle 24"/>
           <p:cNvSpPr/>
           <p:nvPr/>
         </p:nvSpPr>
         <p:spPr>
           <a:xfrm>
-            <a:off x="6263640" y="2377440"/>
-            <a:ext cx="1463040" cy="411480"/>
+            <a:off x="6309360" y="2560320"/>
+            <a:ext cx="2606040" cy="2148840"/>
           </a:xfrm>
           <a:prstGeom prst="roundRect">
             <a:avLst>
@@ -9002,7 +8840,7 @@
             </a:avLst>
           </a:prstGeom>
           <a:noFill/>
-          <a:ln w="12700">
+          <a:ln w="14604">
             <a:solidFill>
               <a:srgbClr val="101715"/>
             </a:solidFill>
@@ -9024,44 +8862,190 @@
           </a:fontRef>
         </p:style>
         <p:txBody>
-          <a:bodyPr rtlCol="0" anchor="ctr" wrap="square" lIns="128016" rIns="128016" tIns="54864" bIns="54864"/>
-          <a:lstStyle/>
-          <a:p>
-            <a:pPr algn="l">
-              <a:lnSpc>
-                <a:spcPct val="125000"/>
-              </a:lnSpc>
-            </a:pPr>
-            <a:r>
-              <a:rPr sz="1050" b="0">
+          <a:bodyPr rtlCol="0" anchor="ctr" wrap="square"/>
+          <a:lstStyle/>
+          <a:p>
+            <a:pPr algn="ctr"/>
+          </a:p>
+        </p:txBody>
+      </p:sp>
+      <p:sp>
+        <p:nvSpPr>
+          <p:cNvPr id="26" name="TextBox 25"/>
+          <p:cNvSpPr txBox="1"/>
+          <p:nvPr/>
+        </p:nvSpPr>
+        <p:spPr>
+          <a:xfrm>
+            <a:off x="6492240" y="2724912"/>
+            <a:ext cx="2194560" cy="228600"/>
+          </a:xfrm>
+          <a:prstGeom prst="rect">
+            <a:avLst/>
+          </a:prstGeom>
+          <a:noFill/>
+        </p:spPr>
+        <p:txBody>
+          <a:bodyPr wrap="square" lIns="0" rIns="0" tIns="0" bIns="0" anchor="t">
+            <a:spAutoFit/>
+          </a:bodyPr>
+          <a:lstStyle/>
+          <a:p>
+            <a:pPr algn="l">
+              <a:lnSpc>
+                <a:spcPct val="135000"/>
+              </a:lnSpc>
+            </a:pPr>
+            <a:r>
+              <a:rPr sz="1100" b="1">
                 <a:solidFill>
                   <a:srgbClr val="101715"/>
                 </a:solidFill>
                 <a:latin typeface="Apple SD Gothic Neo"/>
               </a:rPr>
-              <a:t>학생 PC 1</a:t>
-            </a:r>
-          </a:p>
-        </p:txBody>
-      </p:sp>
-      <p:sp>
-        <p:nvSpPr>
-          <p:cNvPr id="21" name="Rounded Rectangle 20"/>
+              <a:t>공용 PC 저장소</a:t>
+            </a:r>
+          </a:p>
+        </p:txBody>
+      </p:sp>
+      <p:sp>
+        <p:nvSpPr>
+          <p:cNvPr id="27" name="Rounded Rectangle 26"/>
           <p:cNvSpPr/>
           <p:nvPr/>
         </p:nvSpPr>
         <p:spPr>
           <a:xfrm>
-            <a:off x="6263640" y="2944368"/>
-            <a:ext cx="1463040" cy="411480"/>
+            <a:off x="6492240" y="3017520"/>
+            <a:ext cx="2240280" cy="457200"/>
           </a:xfrm>
           <a:prstGeom prst="roundRect">
             <a:avLst>
               <a:gd name="adj" fmla="val 8000"/>
             </a:avLst>
           </a:prstGeom>
-          <a:noFill/>
-          <a:ln w="12700">
+          <a:solidFill>
+            <a:srgbClr val="E4E9E7"/>
+          </a:solidFill>
+          <a:ln>
+            <a:noFill/>
+          </a:ln>
+          <a:effectLst/>
+        </p:spPr>
+        <p:style>
+          <a:lnRef idx="1">
+            <a:schemeClr val="accent1"/>
+          </a:lnRef>
+          <a:fillRef idx="3">
+            <a:schemeClr val="accent1"/>
+          </a:fillRef>
+          <a:effectRef idx="2">
+            <a:schemeClr val="accent1"/>
+          </a:effectRef>
+          <a:fontRef idx="minor">
+            <a:schemeClr val="lt1"/>
+          </a:fontRef>
+        </p:style>
+        <p:txBody>
+          <a:bodyPr rtlCol="0" anchor="ctr" wrap="square" tIns="54864" bIns="54864"/>
+          <a:lstStyle/>
+          <a:p>
+            <a:pPr algn="l">
+              <a:lnSpc>
+                <a:spcPct val="125000"/>
+              </a:lnSpc>
+            </a:pPr>
+            <a:r>
+              <a:rPr sz="1000" b="0">
+                <a:solidFill>
+                  <a:srgbClr val="101715"/>
+                </a:solidFill>
+                <a:latin typeface="Apple SD Gothic Neo"/>
+              </a:rPr>
+              <a:t>1교시 · 김○○ 세션</a:t>
+            </a:r>
+          </a:p>
+        </p:txBody>
+      </p:sp>
+      <p:sp>
+        <p:nvSpPr>
+          <p:cNvPr id="28" name="Rounded Rectangle 27"/>
+          <p:cNvSpPr/>
+          <p:nvPr/>
+        </p:nvSpPr>
+        <p:spPr>
+          <a:xfrm>
+            <a:off x="6492240" y="3547872"/>
+            <a:ext cx="2240280" cy="457200"/>
+          </a:xfrm>
+          <a:prstGeom prst="roundRect">
+            <a:avLst>
+              <a:gd name="adj" fmla="val 8000"/>
+            </a:avLst>
+          </a:prstGeom>
+          <a:solidFill>
+            <a:srgbClr val="E4E9E7"/>
+          </a:solidFill>
+          <a:ln>
+            <a:noFill/>
+          </a:ln>
+          <a:effectLst/>
+        </p:spPr>
+        <p:style>
+          <a:lnRef idx="1">
+            <a:schemeClr val="accent1"/>
+          </a:lnRef>
+          <a:fillRef idx="3">
+            <a:schemeClr val="accent1"/>
+          </a:fillRef>
+          <a:effectRef idx="2">
+            <a:schemeClr val="accent1"/>
+          </a:effectRef>
+          <a:fontRef idx="minor">
+            <a:schemeClr val="lt1"/>
+          </a:fontRef>
+        </p:style>
+        <p:txBody>
+          <a:bodyPr rtlCol="0" anchor="ctr" wrap="square" tIns="54864" bIns="54864"/>
+          <a:lstStyle/>
+          <a:p>
+            <a:pPr algn="l">
+              <a:lnSpc>
+                <a:spcPct val="125000"/>
+              </a:lnSpc>
+            </a:pPr>
+            <a:r>
+              <a:rPr sz="1000" b="0">
+                <a:solidFill>
+                  <a:srgbClr val="101715"/>
+                </a:solidFill>
+                <a:latin typeface="Apple SD Gothic Neo"/>
+              </a:rPr>
+              <a:t>2교시 · 박○○ 세션</a:t>
+            </a:r>
+          </a:p>
+        </p:txBody>
+      </p:sp>
+      <p:sp>
+        <p:nvSpPr>
+          <p:cNvPr id="29" name="Rounded Rectangle 28"/>
+          <p:cNvSpPr/>
+          <p:nvPr/>
+        </p:nvSpPr>
+        <p:spPr>
+          <a:xfrm>
+            <a:off x="6492240" y="4078224"/>
+            <a:ext cx="2240280" cy="457200"/>
+          </a:xfrm>
+          <a:prstGeom prst="roundRect">
+            <a:avLst>
+              <a:gd name="adj" fmla="val 8000"/>
+            </a:avLst>
+          </a:prstGeom>
+          <a:solidFill>
+            <a:srgbClr val="E4E9E7"/>
+          </a:solidFill>
+          <a:ln w="15240">
             <a:solidFill>
               <a:srgbClr val="101715"/>
             </a:solidFill>
@@ -9083,7 +9067,7 @@
           </a:fontRef>
         </p:style>
         <p:txBody>
-          <a:bodyPr rtlCol="0" anchor="ctr" wrap="square" lIns="128016" rIns="128016" tIns="54864" bIns="54864"/>
+          <a:bodyPr rtlCol="0" anchor="ctr" wrap="square" tIns="54864" bIns="54864"/>
           <a:lstStyle/>
           <a:p>
             <a:pPr algn="l">
@@ -9092,132 +9076,34 @@
               </a:lnSpc>
             </a:pPr>
             <a:r>
-              <a:rPr sz="1050" b="0">
+              <a:rPr sz="1000" b="1">
                 <a:solidFill>
                   <a:srgbClr val="101715"/>
                 </a:solidFill>
                 <a:latin typeface="Apple SD Gothic Neo"/>
               </a:rPr>
-              <a:t>학생 PC 2</a:t>
-            </a:r>
-          </a:p>
-        </p:txBody>
-      </p:sp>
-      <p:sp>
-        <p:nvSpPr>
-          <p:cNvPr id="22" name="Rounded Rectangle 21"/>
-          <p:cNvSpPr/>
-          <p:nvPr/>
-        </p:nvSpPr>
-        <p:spPr>
-          <a:xfrm>
-            <a:off x="6263640" y="3739896"/>
-            <a:ext cx="1463040" cy="411480"/>
-          </a:xfrm>
-          <a:prstGeom prst="roundRect">
-            <a:avLst>
-              <a:gd name="adj" fmla="val 8000"/>
-            </a:avLst>
-          </a:prstGeom>
-          <a:noFill/>
-          <a:ln w="12700">
-            <a:solidFill>
-              <a:srgbClr val="101715"/>
-            </a:solidFill>
-          </a:ln>
-          <a:effectLst/>
-        </p:spPr>
-        <p:style>
-          <a:lnRef idx="1">
-            <a:schemeClr val="accent1"/>
-          </a:lnRef>
-          <a:fillRef idx="3">
-            <a:schemeClr val="accent1"/>
-          </a:fillRef>
-          <a:effectRef idx="2">
-            <a:schemeClr val="accent1"/>
-          </a:effectRef>
-          <a:fontRef idx="minor">
-            <a:schemeClr val="lt1"/>
-          </a:fontRef>
-        </p:style>
-        <p:txBody>
-          <a:bodyPr rtlCol="0" anchor="ctr" wrap="square" lIns="128016" rIns="128016" tIns="54864" bIns="54864"/>
-          <a:lstStyle/>
-          <a:p>
-            <a:pPr algn="l">
-              <a:lnSpc>
-                <a:spcPct val="125000"/>
-              </a:lnSpc>
-            </a:pPr>
-            <a:r>
-              <a:rPr sz="1050" b="0">
-                <a:solidFill>
-                  <a:srgbClr val="101715"/>
-                </a:solidFill>
-                <a:latin typeface="Apple SD Gothic Neo"/>
-              </a:rPr>
-              <a:t>학생 PC 30</a:t>
-            </a:r>
-          </a:p>
-        </p:txBody>
-      </p:sp>
-      <p:sp>
-        <p:nvSpPr>
-          <p:cNvPr id="23" name="TextBox 22"/>
-          <p:cNvSpPr txBox="1"/>
-          <p:nvPr/>
-        </p:nvSpPr>
-        <p:spPr>
-          <a:xfrm>
-            <a:off x="6766560" y="3474720"/>
-            <a:ext cx="457200" cy="228600"/>
-          </a:xfrm>
-          <a:prstGeom prst="rect">
-            <a:avLst/>
-          </a:prstGeom>
-          <a:noFill/>
-        </p:spPr>
-        <p:txBody>
-          <a:bodyPr wrap="square" lIns="0" rIns="0" tIns="0" bIns="0" anchor="t">
-            <a:spAutoFit/>
-          </a:bodyPr>
-          <a:lstStyle/>
-          <a:p>
-            <a:pPr algn="l">
-              <a:lnSpc>
-                <a:spcPct val="135000"/>
-              </a:lnSpc>
-            </a:pPr>
-            <a:r>
-              <a:rPr sz="1300" b="0">
-                <a:solidFill>
-                  <a:srgbClr val="78837F"/>
-                </a:solidFill>
-                <a:latin typeface="Apple SD Gothic Neo"/>
-              </a:rPr>
-              <a:t>⋮</a:t>
+              <a:t>3교시 · 이○○ 세션</a:t>
             </a:r>
           </a:p>
         </p:txBody>
       </p:sp>
       <p:cxnSp>
         <p:nvCxnSpPr>
-          <p:cNvPr id="24" name="Connector 23"/>
+          <p:cNvPr id="30" name="Connector 29"/>
           <p:cNvCxnSpPr/>
           <p:nvPr/>
         </p:nvCxnSpPr>
         <p:spPr>
           <a:xfrm>
-            <a:off x="7726679" y="2578608"/>
-            <a:ext cx="960121" cy="822960"/>
+            <a:off x="8915400" y="3246120"/>
+            <a:ext cx="1005840" cy="960120"/>
           </a:xfrm>
           <a:prstGeom prst="line">
             <a:avLst/>
           </a:prstGeom>
-          <a:ln w="11430">
+          <a:ln w="20320">
             <a:solidFill>
-              <a:srgbClr val="4E5A57"/>
+              <a:srgbClr val="0B6E5F"/>
             </a:solidFill>
             <a:tailEnd type="triangle" w="med" len="med"/>
           </a:ln>
@@ -9239,21 +9125,21 @@
       </p:cxnSp>
       <p:cxnSp>
         <p:nvCxnSpPr>
-          <p:cNvPr id="25" name="Connector 24"/>
+          <p:cNvPr id="31" name="Connector 30"/>
           <p:cNvCxnSpPr/>
           <p:nvPr/>
         </p:nvCxnSpPr>
         <p:spPr>
           <a:xfrm>
-            <a:off x="7726679" y="3145536"/>
-            <a:ext cx="960121" cy="256032"/>
+            <a:off x="8915400" y="3776472"/>
+            <a:ext cx="1005840" cy="429768"/>
           </a:xfrm>
           <a:prstGeom prst="line">
             <a:avLst/>
           </a:prstGeom>
-          <a:ln w="11430">
+          <a:ln w="20320">
             <a:solidFill>
-              <a:srgbClr val="4E5A57"/>
+              <a:srgbClr val="0B6E5F"/>
             </a:solidFill>
             <a:tailEnd type="triangle" w="med" len="med"/>
           </a:ln>
@@ -9275,21 +9161,21 @@
       </p:cxnSp>
       <p:cxnSp>
         <p:nvCxnSpPr>
-          <p:cNvPr id="26" name="Connector 25"/>
+          <p:cNvPr id="32" name="Connector 31"/>
           <p:cNvCxnSpPr/>
           <p:nvPr/>
         </p:nvCxnSpPr>
         <p:spPr>
           <a:xfrm flipV="1">
-            <a:off x="7726679" y="3401568"/>
-            <a:ext cx="960121" cy="539495"/>
+            <a:off x="8915400" y="4206240"/>
+            <a:ext cx="1005840" cy="100584"/>
           </a:xfrm>
           <a:prstGeom prst="line">
             <a:avLst/>
           </a:prstGeom>
-          <a:ln w="11430">
+          <a:ln w="20320">
             <a:solidFill>
-              <a:srgbClr val="4E5A57"/>
+              <a:srgbClr val="0B6E5F"/>
             </a:solidFill>
             <a:tailEnd type="triangle" w="med" len="med"/>
           </a:ln>
@@ -9311,53 +9197,14 @@
       </p:cxnSp>
       <p:sp>
         <p:nvSpPr>
-          <p:cNvPr id="27" name="TextBox 26"/>
-          <p:cNvSpPr txBox="1"/>
-          <p:nvPr/>
-        </p:nvSpPr>
-        <p:spPr>
-          <a:xfrm>
-            <a:off x="7589520" y="4114800"/>
-            <a:ext cx="1371600" cy="274320"/>
-          </a:xfrm>
-          <a:prstGeom prst="rect">
-            <a:avLst/>
-          </a:prstGeom>
-          <a:noFill/>
-        </p:spPr>
-        <p:txBody>
-          <a:bodyPr wrap="square" lIns="0" rIns="0" tIns="0" bIns="0" anchor="t">
-            <a:spAutoFit/>
-          </a:bodyPr>
-          <a:lstStyle/>
-          <a:p>
-            <a:pPr algn="ctr">
-              <a:lnSpc>
-                <a:spcPct val="135000"/>
-              </a:lnSpc>
-            </a:pPr>
-            <a:r>
-              <a:rPr sz="950" b="0">
-                <a:solidFill>
-                  <a:srgbClr val="4E5A57"/>
-                </a:solidFill>
-                <a:latin typeface="Apple SD Gothic Neo"/>
-              </a:rPr>
-              <a:t>LAN (인터넷 아님)</a:t>
-            </a:r>
-          </a:p>
-        </p:txBody>
-      </p:sp>
-      <p:sp>
-        <p:nvSpPr>
-          <p:cNvPr id="28" name="Rounded Rectangle 27"/>
+          <p:cNvPr id="33" name="Rounded Rectangle 32"/>
           <p:cNvSpPr/>
           <p:nvPr/>
         </p:nvSpPr>
         <p:spPr>
           <a:xfrm>
-            <a:off x="8686800" y="3154680"/>
-            <a:ext cx="1600200" cy="621792"/>
+            <a:off x="9921240" y="3950208"/>
+            <a:ext cx="1600200" cy="530352"/>
           </a:xfrm>
           <a:prstGeom prst="roundRect">
             <a:avLst>
@@ -9365,11 +9212,11 @@
             </a:avLst>
           </a:prstGeom>
           <a:solidFill>
-            <a:srgbClr val="E4E9E7"/>
+            <a:srgbClr val="E2EEEB"/>
           </a:solidFill>
-          <a:ln w="12700">
+          <a:ln w="17780">
             <a:solidFill>
-              <a:srgbClr val="101715"/>
+              <a:srgbClr val="0B6E5F"/>
             </a:solidFill>
           </a:ln>
           <a:effectLst/>
@@ -9398,79 +9245,27 @@
               </a:lnSpc>
             </a:pPr>
             <a:r>
-              <a:rPr sz="1050" b="1">
-                <a:solidFill>
-                  <a:srgbClr val="101715"/>
-                </a:solidFill>
-                <a:latin typeface="Apple SD Gothic Neo"/>
-              </a:rPr>
-              <a:t>교실 허브</a:t>
-            </a:r>
-          </a:p>
-          <a:p>
-            <a:pPr algn="l">
-              <a:lnSpc>
-                <a:spcPct val="125000"/>
-              </a:lnSpc>
-            </a:pPr>
-            <a:r>
-              <a:rPr sz="900" b="0">
-                <a:solidFill>
-                  <a:srgbClr val="78837F"/>
-                </a:solidFill>
-                <a:latin typeface="Apple SD Gothic Neo"/>
-              </a:rPr>
-              <a:t>SQLite 사본 30인분</a:t>
-            </a:r>
-          </a:p>
-        </p:txBody>
-      </p:sp>
-      <p:cxnSp>
-        <p:nvCxnSpPr>
-          <p:cNvPr id="29" name="Connector 28"/>
-          <p:cNvCxnSpPr/>
-          <p:nvPr/>
-        </p:nvCxnSpPr>
-        <p:spPr>
-          <a:xfrm>
-            <a:off x="10287000" y="3465576"/>
-            <a:ext cx="640080" cy="0"/>
-          </a:xfrm>
-          <a:prstGeom prst="line">
-            <a:avLst/>
-          </a:prstGeom>
-          <a:ln w="28575">
-            <a:solidFill>
-              <a:srgbClr val="0B6E5F"/>
-            </a:solidFill>
-            <a:tailEnd type="triangle" w="med" len="med"/>
-          </a:ln>
-        </p:spPr>
-        <p:style>
-          <a:lnRef idx="2">
-            <a:schemeClr val="accent1"/>
-          </a:lnRef>
-          <a:fillRef idx="0">
-            <a:schemeClr val="accent1"/>
-          </a:fillRef>
-          <a:effectRef idx="1">
-            <a:schemeClr val="accent1"/>
-          </a:effectRef>
-          <a:fontRef idx="minor">
-            <a:schemeClr val="tx1"/>
-          </a:fontRef>
-        </p:style>
-      </p:cxnSp>
-      <p:sp>
-        <p:nvSpPr>
-          <p:cNvPr id="30" name="TextBox 29"/>
+              <a:rPr sz="1100" b="1">
+                <a:solidFill>
+                  <a:srgbClr val="0B6E5F"/>
+                </a:solidFill>
+                <a:latin typeface="Apple SD Gothic Neo"/>
+              </a:rPr>
+              <a:t>Supabase</a:t>
+            </a:r>
+          </a:p>
+        </p:txBody>
+      </p:sp>
+      <p:sp>
+        <p:nvSpPr>
+          <p:cNvPr id="34" name="TextBox 33"/>
           <p:cNvSpPr txBox="1"/>
           <p:nvPr/>
         </p:nvSpPr>
         <p:spPr>
           <a:xfrm>
-            <a:off x="10195560" y="3127248"/>
-            <a:ext cx="914400" cy="228600"/>
+            <a:off x="9052560" y="4590288"/>
+            <a:ext cx="2651760" cy="228600"/>
           </a:xfrm>
           <a:prstGeom prst="rect">
             <a:avLst/>
@@ -9483,169 +9278,33 @@
           </a:bodyPr>
           <a:lstStyle/>
           <a:p>
-            <a:pPr algn="ctr">
+            <a:pPr algn="l">
               <a:lnSpc>
                 <a:spcPct val="135000"/>
               </a:lnSpc>
             </a:pPr>
             <a:r>
-              <a:rPr sz="950" b="1">
+              <a:rPr sz="1050" b="1">
                 <a:solidFill>
                   <a:srgbClr val="0B6E5F"/>
                 </a:solidFill>
                 <a:latin typeface="Apple SD Gothic Neo"/>
               </a:rPr>
-              <a:t>경로 1개</a:t>
-            </a:r>
-          </a:p>
-        </p:txBody>
-      </p:sp>
-      <p:sp>
-        <p:nvSpPr>
-          <p:cNvPr id="31" name="Rounded Rectangle 30"/>
-          <p:cNvSpPr/>
-          <p:nvPr/>
-        </p:nvSpPr>
-        <p:spPr>
-          <a:xfrm>
-            <a:off x="10927080" y="3200400"/>
-            <a:ext cx="1005840" cy="530352"/>
-          </a:xfrm>
-          <a:prstGeom prst="roundRect">
-            <a:avLst>
-              <a:gd name="adj" fmla="val 8000"/>
-            </a:avLst>
-          </a:prstGeom>
-          <a:solidFill>
-            <a:srgbClr val="E2EEEB"/>
-          </a:solidFill>
-          <a:ln w="12700">
-            <a:solidFill>
-              <a:srgbClr val="0B6E5F"/>
-            </a:solidFill>
-          </a:ln>
-          <a:effectLst/>
-        </p:spPr>
-        <p:style>
-          <a:lnRef idx="1">
-            <a:schemeClr val="accent1"/>
-          </a:lnRef>
-          <a:fillRef idx="3">
-            <a:schemeClr val="accent1"/>
-          </a:fillRef>
-          <a:effectRef idx="2">
-            <a:schemeClr val="accent1"/>
-          </a:effectRef>
-          <a:fontRef idx="minor">
-            <a:schemeClr val="lt1"/>
-          </a:fontRef>
-        </p:style>
-        <p:txBody>
-          <a:bodyPr rtlCol="0" anchor="ctr" wrap="square" lIns="45720" rIns="45720" tIns="54864" bIns="54864"/>
-          <a:lstStyle/>
-          <a:p>
-            <a:pPr algn="l">
-              <a:lnSpc>
-                <a:spcPct val="125000"/>
-              </a:lnSpc>
-            </a:pPr>
-            <a:r>
-              <a:rPr sz="950" b="0">
-                <a:solidFill>
-                  <a:srgbClr val="0B6E5F"/>
-                </a:solidFill>
-                <a:latin typeface="Apple SD Gothic Neo"/>
-              </a:rPr>
-              <a:t>Supabase</a:t>
-            </a:r>
-          </a:p>
-        </p:txBody>
-      </p:sp>
-      <p:sp>
-        <p:nvSpPr>
-          <p:cNvPr id="32" name="Rounded Rectangle 31"/>
-          <p:cNvSpPr/>
-          <p:nvPr/>
-        </p:nvSpPr>
-        <p:spPr>
-          <a:xfrm>
-            <a:off x="6263640" y="4892040"/>
-            <a:ext cx="5212080" cy="822960"/>
-          </a:xfrm>
-          <a:prstGeom prst="roundRect">
-            <a:avLst>
-              <a:gd name="adj" fmla="val 8000"/>
-            </a:avLst>
-          </a:prstGeom>
-          <a:solidFill>
-            <a:srgbClr val="E2EEEB"/>
-          </a:solidFill>
-          <a:ln>
-            <a:noFill/>
-          </a:ln>
-          <a:effectLst/>
-        </p:spPr>
-        <p:style>
-          <a:lnRef idx="1">
-            <a:schemeClr val="accent1"/>
-          </a:lnRef>
-          <a:fillRef idx="3">
-            <a:schemeClr val="accent1"/>
-          </a:fillRef>
-          <a:effectRef idx="2">
-            <a:schemeClr val="accent1"/>
-          </a:effectRef>
-          <a:fontRef idx="minor">
-            <a:schemeClr val="lt1"/>
-          </a:fontRef>
-        </p:style>
-        <p:txBody>
-          <a:bodyPr rtlCol="0" anchor="ctr" wrap="square" lIns="128016" rIns="128016" tIns="54864" bIns="54864"/>
-          <a:lstStyle/>
-          <a:p>
-            <a:pPr algn="l">
-              <a:lnSpc>
-                <a:spcPct val="125000"/>
-              </a:lnSpc>
-            </a:pPr>
-            <a:r>
-              <a:rPr sz="1100" b="1">
-                <a:solidFill>
-                  <a:srgbClr val="0B6E5F"/>
-                </a:solidFill>
-                <a:latin typeface="Apple SD Gothic Neo"/>
-              </a:rPr>
-              <a:t>학생 PC 3이 시험 후 초기화되어도</a:t>
-            </a:r>
-          </a:p>
-          <a:p>
-            <a:pPr algn="l">
-              <a:lnSpc>
-                <a:spcPct val="125000"/>
-              </a:lnSpc>
-            </a:pPr>
-            <a:r>
-              <a:rPr sz="1050" b="0">
-                <a:solidFill>
-                  <a:srgbClr val="0B6E5F"/>
-                </a:solidFill>
-                <a:latin typeface="Apple SD Gothic Neo"/>
-              </a:rPr>
-              <a:t>→ 답안은 허브에 있다. 허브 1대만 인터넷에 닿으면 전원 복구.</a:t>
-            </a:r>
-          </a:p>
-        </p:txBody>
-      </p:sp>
-      <p:sp>
-        <p:nvSpPr>
-          <p:cNvPr id="33" name="TextBox 32"/>
+              <a:t>남은 큐 전부가 함께</a:t>
+            </a:r>
+          </a:p>
+        </p:txBody>
+      </p:sp>
+      <p:sp>
+        <p:nvSpPr>
+          <p:cNvPr id="35" name="TextBox 34"/>
           <p:cNvSpPr txBox="1"/>
           <p:nvPr/>
         </p:nvSpPr>
         <p:spPr>
           <a:xfrm>
-            <a:off x="685800" y="6199632"/>
-            <a:ext cx="10789920" cy="365760"/>
+            <a:off x="6309360" y="4846320"/>
+            <a:ext cx="5212080" cy="548640"/>
           </a:xfrm>
           <a:prstGeom prst="rect">
             <a:avLst/>
@@ -9660,6 +9319,61 @@
           <a:p>
             <a:pPr algn="l">
               <a:lnSpc>
+                <a:spcPct val="140000"/>
+              </a:lnSpc>
+            </a:pPr>
+            <a:r>
+              <a:rPr sz="1050" b="0">
+                <a:solidFill>
+                  <a:srgbClr val="4E5A57"/>
+                </a:solidFill>
+                <a:latin typeface="Apple SD Gothic Neo"/>
+              </a:rPr>
+              <a:t>회차 UUID 가 소유자를 들고 있으므로, 누가 로그인해 있든</a:t>
+            </a:r>
+          </a:p>
+          <a:p>
+            <a:pPr algn="l">
+              <a:lnSpc>
+                <a:spcPct val="140000"/>
+              </a:lnSpc>
+            </a:pPr>
+            <a:r>
+              <a:rPr sz="1050" b="0">
+                <a:solidFill>
+                  <a:srgbClr val="4E5A57"/>
+                </a:solidFill>
+                <a:latin typeface="Apple SD Gothic Neo"/>
+              </a:rPr>
+              <a:t>각자 주인에게 귀속된다.</a:t>
+            </a:r>
+          </a:p>
+        </p:txBody>
+      </p:sp>
+      <p:sp>
+        <p:nvSpPr>
+          <p:cNvPr id="36" name="TextBox 35"/>
+          <p:cNvSpPr txBox="1"/>
+          <p:nvPr/>
+        </p:nvSpPr>
+        <p:spPr>
+          <a:xfrm>
+            <a:off x="685800" y="6199632"/>
+            <a:ext cx="10789920" cy="365760"/>
+          </a:xfrm>
+          <a:prstGeom prst="rect">
+            <a:avLst/>
+          </a:prstGeom>
+          <a:noFill/>
+        </p:spPr>
+        <p:txBody>
+          <a:bodyPr wrap="square" lIns="0" rIns="0" tIns="0" bIns="0" anchor="t">
+            <a:spAutoFit/>
+          </a:bodyPr>
+          <a:lstStyle/>
+          <a:p>
+            <a:pPr algn="l">
+              <a:lnSpc>
                 <a:spcPct val="135000"/>
               </a:lnSpc>
             </a:pPr>
@@ -9670,7 +9384,7 @@
                 </a:solidFill>
                 <a:latin typeface="Apple SD Gothic Neo"/>
               </a:rPr>
-              <a:t>차이는 화살표 개수가 아니라 사본 수다. A안은 한 벌(학생 PC), B안은 두 벌(학생 PC + 허브).</a:t>
+              <a:t>고칠 곳은 한 군데 — 업로드 대상을 “현재 세션”에서 “저장소에 남은 모든 미완료 회차”로 넓힌다. allKeys() 는 이미 있다.</a:t>
             </a:r>
           </a:p>
         </p:txBody>
@@ -9735,7 +9449,7 @@
                 </a:solidFill>
                 <a:latin typeface="Menlo"/>
               </a:rPr>
-              <a:t>RECOMMENDATION</a:t>
+              <a:t>DECISION</a:t>
             </a:r>
           </a:p>
         </p:txBody>
@@ -9774,7 +9488,7 @@
                 </a:solidFill>
                 <a:latin typeface="Apple SD Gothic Neo"/>
               </a:rPr>
-              <a:t>권장 — B안, 다만 A안을 끄지 않는다</a:t>
+              <a:t>학생 단말이 각자 올린다 — 허브는 만들지 않는다</a:t>
             </a:r>
           </a:p>
         </p:txBody>
@@ -9861,8 +9575,8 @@
         </p:nvSpPr>
         <p:spPr>
           <a:xfrm>
-            <a:off x="685800" y="1920240"/>
-            <a:ext cx="10789920" cy="1417320"/>
+            <a:off x="685800" y="1874519"/>
+            <a:ext cx="10789920" cy="1051560"/>
           </a:xfrm>
           <a:prstGeom prst="roundRect">
             <a:avLst>
@@ -9872,7 +9586,7 @@
           <a:solidFill>
             <a:srgbClr val="E2EEEB"/>
           </a:solidFill>
-          <a:ln w="15875">
+          <a:ln w="17780">
             <a:solidFill>
               <a:srgbClr val="0B6E5F"/>
             </a:solidFill>
@@ -9899,50 +9613,147 @@
           <a:p>
             <a:pPr algn="ctr">
               <a:lnSpc>
-                <a:spcPct val="150000"/>
-              </a:lnSpc>
-            </a:pPr>
-            <a:r>
-              <a:rPr sz="1500" b="0">
+                <a:spcPct val="145000"/>
+              </a:lnSpc>
+            </a:pPr>
+            <a:r>
+              <a:rPr sz="1550" b="0">
                 <a:solidFill>
                   <a:srgbClr val="101715"/>
                 </a:solidFill>
                 <a:latin typeface="Apple SD Gothic Neo"/>
               </a:rPr>
-              <a:t>학생 단말의 Outbox는 허브와 Supabase 두 목적지를 모두 안다. </a:t>
-            </a:r>
-            <a:r>
-              <a:rPr sz="1500" b="1">
+              <a:t>허브 한 대를 세우는 것보다 훨씬 작은 작업이고, </a:t>
+            </a:r>
+            <a:r>
+              <a:rPr sz="1550" b="1">
                 <a:solidFill>
                   <a:srgbClr val="0B6E5F"/>
                 </a:solidFill>
                 <a:latin typeface="Apple SD Gothic Neo"/>
               </a:rPr>
-              <a:t>허브가 응답하면 허브로, 허브가 죽었는데 인터넷이 살아 있으면 Supabase로 직접 간다.</a:t>
-            </a:r>
-            <a:r>
-              <a:rPr sz="1500" b="0">
-                <a:solidFill>
-                  <a:srgbClr val="101715"/>
-                </a:solidFill>
-                <a:latin typeface="Apple SD Gothic Neo"/>
-              </a:rPr>
-              <a:t>
-허브는 추가 안전망이지 단일 장애점이 아니어야 한다.</a:t>
-            </a:r>
-          </a:p>
-        </p:txBody>
-      </p:sp>
-      <p:sp>
-        <p:nvSpPr>
-          <p:cNvPr id="7" name="TextBox 6"/>
+              <a:t>공용 PC 위생까지 같이 해결된다.</a:t>
+            </a:r>
+          </a:p>
+        </p:txBody>
+      </p:sp>
+      <p:sp>
+        <p:nvSpPr>
+          <p:cNvPr id="7" name="Rounded Rectangle 6"/>
+          <p:cNvSpPr/>
+          <p:nvPr/>
+        </p:nvSpPr>
+        <p:spPr>
+          <a:xfrm>
+            <a:off x="685800" y="3246120"/>
+            <a:ext cx="3429000" cy="2148840"/>
+          </a:xfrm>
+          <a:prstGeom prst="roundRect">
+            <a:avLst>
+              <a:gd name="adj" fmla="val 8000"/>
+            </a:avLst>
+          </a:prstGeom>
+          <a:solidFill>
+            <a:srgbClr val="FFFFFF"/>
+          </a:solidFill>
+          <a:ln w="12700">
+            <a:solidFill>
+              <a:srgbClr val="D2DAD7"/>
+            </a:solidFill>
+          </a:ln>
+          <a:effectLst/>
+        </p:spPr>
+        <p:style>
+          <a:lnRef idx="1">
+            <a:schemeClr val="accent1"/>
+          </a:lnRef>
+          <a:fillRef idx="3">
+            <a:schemeClr val="accent1"/>
+          </a:fillRef>
+          <a:effectRef idx="2">
+            <a:schemeClr val="accent1"/>
+          </a:effectRef>
+          <a:fontRef idx="minor">
+            <a:schemeClr val="lt1"/>
+          </a:fontRef>
+        </p:style>
+        <p:txBody>
+          <a:bodyPr rtlCol="0" anchor="ctr" wrap="square"/>
+          <a:lstStyle/>
+          <a:p>
+            <a:pPr algn="ctr"/>
+          </a:p>
+        </p:txBody>
+      </p:sp>
+      <p:sp>
+        <p:nvSpPr>
+          <p:cNvPr id="8" name="Rounded Rectangle 7"/>
+          <p:cNvSpPr/>
+          <p:nvPr/>
+        </p:nvSpPr>
+        <p:spPr>
+          <a:xfrm>
+            <a:off x="941832" y="3493008"/>
+            <a:ext cx="384048" cy="384048"/>
+          </a:xfrm>
+          <a:prstGeom prst="roundRect">
+            <a:avLst>
+              <a:gd name="adj" fmla="val 8000"/>
+            </a:avLst>
+          </a:prstGeom>
+          <a:solidFill>
+            <a:srgbClr val="0B6E5F"/>
+          </a:solidFill>
+          <a:ln>
+            <a:noFill/>
+          </a:ln>
+          <a:effectLst/>
+        </p:spPr>
+        <p:style>
+          <a:lnRef idx="1">
+            <a:schemeClr val="accent1"/>
+          </a:lnRef>
+          <a:fillRef idx="3">
+            <a:schemeClr val="accent1"/>
+          </a:fillRef>
+          <a:effectRef idx="2">
+            <a:schemeClr val="accent1"/>
+          </a:effectRef>
+          <a:fontRef idx="minor">
+            <a:schemeClr val="lt1"/>
+          </a:fontRef>
+        </p:style>
+        <p:txBody>
+          <a:bodyPr rtlCol="0" anchor="ctr" wrap="square" lIns="0" rIns="0" tIns="54864" bIns="54864"/>
+          <a:lstStyle/>
+          <a:p>
+            <a:pPr algn="ctr">
+              <a:lnSpc>
+                <a:spcPct val="125000"/>
+              </a:lnSpc>
+            </a:pPr>
+            <a:r>
+              <a:rPr sz="1200" b="1">
+                <a:solidFill>
+                  <a:srgbClr val="FFFFFF"/>
+                </a:solidFill>
+                <a:latin typeface="Apple SD Gothic Neo"/>
+              </a:rPr>
+              <a:t>①</a:t>
+            </a:r>
+          </a:p>
+        </p:txBody>
+      </p:sp>
+      <p:sp>
+        <p:nvSpPr>
+          <p:cNvPr id="9" name="TextBox 8"/>
           <p:cNvSpPr txBox="1"/>
           <p:nvPr/>
         </p:nvSpPr>
         <p:spPr>
           <a:xfrm>
-            <a:off x="685800" y="3657600"/>
-            <a:ext cx="5120640" cy="274320"/>
+            <a:off x="1435607" y="3538728"/>
+            <a:ext cx="2560320" cy="274320"/>
           </a:xfrm>
           <a:prstGeom prst="rect">
             <a:avLst/>
@@ -9961,27 +9772,27 @@
               </a:lnSpc>
             </a:pPr>
             <a:r>
-              <a:rPr sz="1200" b="1">
+              <a:rPr sz="1300" b="1">
                 <a:solidFill>
                   <a:srgbClr val="101715"/>
                 </a:solidFill>
                 <a:latin typeface="Apple SD Gothic Neo"/>
               </a:rPr>
-              <a:t>B안이 전제하는 것</a:t>
-            </a:r>
-          </a:p>
-        </p:txBody>
-      </p:sp>
-      <p:sp>
-        <p:nvSpPr>
-          <p:cNvPr id="8" name="TextBox 7"/>
+              <a:t>시작 시 고아 큐 자동 회수</a:t>
+            </a:r>
+          </a:p>
+        </p:txBody>
+      </p:sp>
+      <p:sp>
+        <p:nvSpPr>
+          <p:cNvPr id="10" name="TextBox 9"/>
           <p:cNvSpPr txBox="1"/>
           <p:nvPr/>
         </p:nvSpPr>
         <p:spPr>
           <a:xfrm>
-            <a:off x="685800" y="4023360"/>
-            <a:ext cx="5120640" cy="1463040"/>
+            <a:off x="960120" y="4069080"/>
+            <a:ext cx="2926080" cy="1188720"/>
           </a:xfrm>
           <a:prstGeom prst="rect">
             <a:avLst/>
@@ -9996,63 +9807,170 @@
           <a:p>
             <a:pPr algn="l">
               <a:lnSpc>
-                <a:spcPct val="160000"/>
-              </a:lnSpc>
-            </a:pPr>
-            <a:r>
-              <a:rPr sz="1200" b="0">
+                <a:spcPct val="145000"/>
+              </a:lnSpc>
+            </a:pPr>
+            <a:r>
+              <a:rPr sz="1100" b="0">
                 <a:solidFill>
                   <a:srgbClr val="4E5A57"/>
                 </a:solidFill>
                 <a:latin typeface="Apple SD Gothic Neo"/>
               </a:rPr>
-              <a:t>· 시험장 LAN — 공유기 한 대면 충분하고 인터넷 회선은 필요 없다</a:t>
-            </a:r>
-          </a:p>
-          <a:p>
-            <a:pPr algn="l">
-              <a:lnSpc>
-                <a:spcPct val="160000"/>
-              </a:lnSpc>
-            </a:pPr>
-            <a:r>
-              <a:rPr sz="1200" b="0">
+              <a:t>저장소에 남은 모든 미완료 회차를 훑어</a:t>
+            </a:r>
+          </a:p>
+          <a:p>
+            <a:pPr algn="l">
+              <a:lnSpc>
+                <a:spcPct val="145000"/>
+              </a:lnSpc>
+            </a:pPr>
+            <a:r>
+              <a:rPr sz="1100" b="0">
                 <a:solidFill>
                   <a:srgbClr val="4E5A57"/>
                 </a:solidFill>
                 <a:latin typeface="Apple SD Gothic Neo"/>
               </a:rPr>
-              <a:t>· 선생님 노트북에서 서버 프로세스를 띄우는 절차</a:t>
-            </a:r>
-          </a:p>
-          <a:p>
-            <a:pPr algn="l">
-              <a:lnSpc>
-                <a:spcPct val="160000"/>
-              </a:lnSpc>
-            </a:pPr>
-            <a:r>
-              <a:rPr sz="1200" b="0">
+              <a:t>큐에 올린다. 그 PC가 인터넷에 닿는</a:t>
+            </a:r>
+          </a:p>
+          <a:p>
+            <a:pPr algn="l">
+              <a:lnSpc>
+                <a:spcPct val="145000"/>
+              </a:lnSpc>
+            </a:pPr>
+            <a:r>
+              <a:rPr sz="1100" b="0">
                 <a:solidFill>
                   <a:srgbClr val="4E5A57"/>
                 </a:solidFill>
                 <a:latin typeface="Apple SD Gothic Neo"/>
               </a:rPr>
-              <a:t>· 시험 전 허브 주소를 단말이 찾을 수 있는 설정</a:t>
-            </a:r>
-          </a:p>
-        </p:txBody>
-      </p:sp>
-      <p:sp>
-        <p:nvSpPr>
-          <p:cNvPr id="9" name="TextBox 8"/>
+              <a:t>어느 시점에든 답안이 빠져나간다.</a:t>
+            </a:r>
+          </a:p>
+        </p:txBody>
+      </p:sp>
+      <p:sp>
+        <p:nvSpPr>
+          <p:cNvPr id="11" name="Rounded Rectangle 10"/>
+          <p:cNvSpPr/>
+          <p:nvPr/>
+        </p:nvSpPr>
+        <p:spPr>
+          <a:xfrm>
+            <a:off x="4361688" y="3246120"/>
+            <a:ext cx="3429000" cy="2148840"/>
+          </a:xfrm>
+          <a:prstGeom prst="roundRect">
+            <a:avLst>
+              <a:gd name="adj" fmla="val 8000"/>
+            </a:avLst>
+          </a:prstGeom>
+          <a:solidFill>
+            <a:srgbClr val="FFFFFF"/>
+          </a:solidFill>
+          <a:ln w="12700">
+            <a:solidFill>
+              <a:srgbClr val="D2DAD7"/>
+            </a:solidFill>
+          </a:ln>
+          <a:effectLst/>
+        </p:spPr>
+        <p:style>
+          <a:lnRef idx="1">
+            <a:schemeClr val="accent1"/>
+          </a:lnRef>
+          <a:fillRef idx="3">
+            <a:schemeClr val="accent1"/>
+          </a:fillRef>
+          <a:effectRef idx="2">
+            <a:schemeClr val="accent1"/>
+          </a:effectRef>
+          <a:fontRef idx="minor">
+            <a:schemeClr val="lt1"/>
+          </a:fontRef>
+        </p:style>
+        <p:txBody>
+          <a:bodyPr rtlCol="0" anchor="ctr" wrap="square"/>
+          <a:lstStyle/>
+          <a:p>
+            <a:pPr algn="ctr"/>
+          </a:p>
+        </p:txBody>
+      </p:sp>
+      <p:sp>
+        <p:nvSpPr>
+          <p:cNvPr id="12" name="Rounded Rectangle 11"/>
+          <p:cNvSpPr/>
+          <p:nvPr/>
+        </p:nvSpPr>
+        <p:spPr>
+          <a:xfrm>
+            <a:off x="4617720" y="3493008"/>
+            <a:ext cx="384048" cy="384048"/>
+          </a:xfrm>
+          <a:prstGeom prst="roundRect">
+            <a:avLst>
+              <a:gd name="adj" fmla="val 8000"/>
+            </a:avLst>
+          </a:prstGeom>
+          <a:solidFill>
+            <a:srgbClr val="0B6E5F"/>
+          </a:solidFill>
+          <a:ln>
+            <a:noFill/>
+          </a:ln>
+          <a:effectLst/>
+        </p:spPr>
+        <p:style>
+          <a:lnRef idx="1">
+            <a:schemeClr val="accent1"/>
+          </a:lnRef>
+          <a:fillRef idx="3">
+            <a:schemeClr val="accent1"/>
+          </a:fillRef>
+          <a:effectRef idx="2">
+            <a:schemeClr val="accent1"/>
+          </a:effectRef>
+          <a:fontRef idx="minor">
+            <a:schemeClr val="lt1"/>
+          </a:fontRef>
+        </p:style>
+        <p:txBody>
+          <a:bodyPr rtlCol="0" anchor="ctr" wrap="square" lIns="0" rIns="0" tIns="54864" bIns="54864"/>
+          <a:lstStyle/>
+          <a:p>
+            <a:pPr algn="ctr">
+              <a:lnSpc>
+                <a:spcPct val="125000"/>
+              </a:lnSpc>
+            </a:pPr>
+            <a:r>
+              <a:rPr sz="1200" b="1">
+                <a:solidFill>
+                  <a:srgbClr val="FFFFFF"/>
+                </a:solidFill>
+                <a:latin typeface="Apple SD Gothic Neo"/>
+              </a:rPr>
+              <a:t>②</a:t>
+            </a:r>
+          </a:p>
+        </p:txBody>
+      </p:sp>
+      <p:sp>
+        <p:nvSpPr>
+          <p:cNvPr id="13" name="TextBox 12"/>
           <p:cNvSpPr txBox="1"/>
           <p:nvPr/>
         </p:nvSpPr>
         <p:spPr>
           <a:xfrm>
-            <a:off x="6355080" y="3657600"/>
-            <a:ext cx="5120640" cy="274320"/>
+            <a:off x="5111496" y="3538728"/>
+            <a:ext cx="2560320" cy="274320"/>
           </a:xfrm>
           <a:prstGeom prst="rect">
             <a:avLst/>
@@ -10071,27 +9989,27 @@
               </a:lnSpc>
             </a:pPr>
             <a:r>
-              <a:rPr sz="1200" b="1">
+              <a:rPr sz="1300" b="1">
                 <a:solidFill>
                   <a:srgbClr val="101715"/>
                 </a:solidFill>
                 <a:latin typeface="Apple SD Gothic Neo"/>
               </a:rPr>
-              <a:t>B안이 불가능하다면</a:t>
-            </a:r>
-          </a:p>
-        </p:txBody>
-      </p:sp>
-      <p:sp>
-        <p:nvSpPr>
-          <p:cNvPr id="10" name="TextBox 9"/>
+              <a:t>종료 화면의 완료 게이트</a:t>
+            </a:r>
+          </a:p>
+        </p:txBody>
+      </p:sp>
+      <p:sp>
+        <p:nvSpPr>
+          <p:cNvPr id="14" name="TextBox 13"/>
           <p:cNvSpPr txBox="1"/>
           <p:nvPr/>
         </p:nvSpPr>
         <p:spPr>
           <a:xfrm>
-            <a:off x="6355080" y="4023360"/>
-            <a:ext cx="5120640" cy="1463040"/>
+            <a:off x="4636007" y="4069080"/>
+            <a:ext cx="2926080" cy="1188720"/>
           </a:xfrm>
           <a:prstGeom prst="rect">
             <a:avLst/>
@@ -10106,49 +10024,305 @@
           <a:p>
             <a:pPr algn="l">
               <a:lnSpc>
-                <a:spcPct val="160000"/>
-              </a:lnSpc>
-            </a:pPr>
-            <a:r>
-              <a:rPr sz="1200" b="0">
+                <a:spcPct val="145000"/>
+              </a:lnSpc>
+            </a:pPr>
+            <a:r>
+              <a:rPr sz="1100" b="0">
                 <a:solidFill>
                   <a:srgbClr val="4E5A57"/>
                 </a:solidFill>
                 <a:latin typeface="Apple SD Gothic Neo"/>
               </a:rPr>
-              <a:t>A안만으로도 요구사항은 충족된다. 대신 운영 규칙이 구조를 대신한다 —</a:t>
-            </a:r>
-          </a:p>
-          <a:p>
-            <a:pPr algn="l">
-              <a:lnSpc>
-                <a:spcPct val="160000"/>
-              </a:lnSpc>
-            </a:pPr>
-            <a:r>
-              <a:rPr sz="1200" b="0">
+              <a:t>학생은 “업로드 완료”를 보고 나간다.</a:t>
+            </a:r>
+          </a:p>
+          <a:p>
+            <a:pPr algn="l">
+              <a:lnSpc>
+                <a:spcPct val="145000"/>
+              </a:lnSpc>
+            </a:pPr>
+            <a:r>
+              <a:rPr sz="1100" b="0">
                 <a:solidFill>
                   <a:srgbClr val="4E5A57"/>
                 </a:solidFill>
                 <a:latin typeface="Apple SD Gothic Neo"/>
               </a:rPr>
-              <a:t>“시험 종료 후 동기화 완료 전까지 PC를 초기화하지 않는다”를</a:t>
-            </a:r>
-          </a:p>
-          <a:p>
-            <a:pPr algn="l">
-              <a:lnSpc>
-                <a:spcPct val="160000"/>
-              </a:lnSpc>
-            </a:pPr>
-            <a:r>
-              <a:rPr sz="1200" b="0">
+              <a:t>감독관 화면에는 반 전체 현황이 뜬다.</a:t>
+            </a:r>
+          </a:p>
+          <a:p>
+            <a:pPr algn="l">
+              <a:lnSpc>
+                <a:spcPct val="145000"/>
+              </a:lnSpc>
+            </a:pPr>
+            <a:r>
+              <a:rPr sz="1100" b="0">
                 <a:solidFill>
                   <a:srgbClr val="4E5A57"/>
                 </a:solidFill>
                 <a:latin typeface="Apple SD Gothic Neo"/>
               </a:rPr>
-              <a:t>강제하고, 종료 화면에서 답안 JSON 내보내기를 의무화한다.</a:t>
+              <a:t>회수창이 성립하는 조건이다.</a:t>
+            </a:r>
+          </a:p>
+        </p:txBody>
+      </p:sp>
+      <p:sp>
+        <p:nvSpPr>
+          <p:cNvPr id="15" name="Rounded Rectangle 14"/>
+          <p:cNvSpPr/>
+          <p:nvPr/>
+        </p:nvSpPr>
+        <p:spPr>
+          <a:xfrm>
+            <a:off x="8037575" y="3246120"/>
+            <a:ext cx="3429000" cy="2148840"/>
+          </a:xfrm>
+          <a:prstGeom prst="roundRect">
+            <a:avLst>
+              <a:gd name="adj" fmla="val 8000"/>
+            </a:avLst>
+          </a:prstGeom>
+          <a:solidFill>
+            <a:srgbClr val="FFFFFF"/>
+          </a:solidFill>
+          <a:ln w="12700">
+            <a:solidFill>
+              <a:srgbClr val="D2DAD7"/>
+            </a:solidFill>
+          </a:ln>
+          <a:effectLst/>
+        </p:spPr>
+        <p:style>
+          <a:lnRef idx="1">
+            <a:schemeClr val="accent1"/>
+          </a:lnRef>
+          <a:fillRef idx="3">
+            <a:schemeClr val="accent1"/>
+          </a:fillRef>
+          <a:effectRef idx="2">
+            <a:schemeClr val="accent1"/>
+          </a:effectRef>
+          <a:fontRef idx="minor">
+            <a:schemeClr val="lt1"/>
+          </a:fontRef>
+        </p:style>
+        <p:txBody>
+          <a:bodyPr rtlCol="0" anchor="ctr" wrap="square"/>
+          <a:lstStyle/>
+          <a:p>
+            <a:pPr algn="ctr"/>
+          </a:p>
+        </p:txBody>
+      </p:sp>
+      <p:sp>
+        <p:nvSpPr>
+          <p:cNvPr id="16" name="Rounded Rectangle 15"/>
+          <p:cNvSpPr/>
+          <p:nvPr/>
+        </p:nvSpPr>
+        <p:spPr>
+          <a:xfrm>
+            <a:off x="8293607" y="3493008"/>
+            <a:ext cx="384048" cy="384048"/>
+          </a:xfrm>
+          <a:prstGeom prst="roundRect">
+            <a:avLst>
+              <a:gd name="adj" fmla="val 8000"/>
+            </a:avLst>
+          </a:prstGeom>
+          <a:solidFill>
+            <a:srgbClr val="0B6E5F"/>
+          </a:solidFill>
+          <a:ln>
+            <a:noFill/>
+          </a:ln>
+          <a:effectLst/>
+        </p:spPr>
+        <p:style>
+          <a:lnRef idx="1">
+            <a:schemeClr val="accent1"/>
+          </a:lnRef>
+          <a:fillRef idx="3">
+            <a:schemeClr val="accent1"/>
+          </a:fillRef>
+          <a:effectRef idx="2">
+            <a:schemeClr val="accent1"/>
+          </a:effectRef>
+          <a:fontRef idx="minor">
+            <a:schemeClr val="lt1"/>
+          </a:fontRef>
+        </p:style>
+        <p:txBody>
+          <a:bodyPr rtlCol="0" anchor="ctr" wrap="square" lIns="0" rIns="0" tIns="54864" bIns="54864"/>
+          <a:lstStyle/>
+          <a:p>
+            <a:pPr algn="ctr">
+              <a:lnSpc>
+                <a:spcPct val="125000"/>
+              </a:lnSpc>
+            </a:pPr>
+            <a:r>
+              <a:rPr sz="1200" b="1">
+                <a:solidFill>
+                  <a:srgbClr val="FFFFFF"/>
+                </a:solidFill>
+                <a:latin typeface="Apple SD Gothic Neo"/>
+              </a:rPr>
+              <a:t>③</a:t>
+            </a:r>
+          </a:p>
+        </p:txBody>
+      </p:sp>
+      <p:sp>
+        <p:nvSpPr>
+          <p:cNvPr id="17" name="TextBox 16"/>
+          <p:cNvSpPr txBox="1"/>
+          <p:nvPr/>
+        </p:nvSpPr>
+        <p:spPr>
+          <a:xfrm>
+            <a:off x="8787384" y="3538728"/>
+            <a:ext cx="2560320" cy="274320"/>
+          </a:xfrm>
+          <a:prstGeom prst="rect">
+            <a:avLst/>
+          </a:prstGeom>
+          <a:noFill/>
+        </p:spPr>
+        <p:txBody>
+          <a:bodyPr wrap="square" lIns="0" rIns="0" tIns="0" bIns="0" anchor="t">
+            <a:spAutoFit/>
+          </a:bodyPr>
+          <a:lstStyle/>
+          <a:p>
+            <a:pPr algn="l">
+              <a:lnSpc>
+                <a:spcPct val="135000"/>
+              </a:lnSpc>
+            </a:pPr>
+            <a:r>
+              <a:rPr sz="1300" b="1">
+                <a:solidFill>
+                  <a:srgbClr val="101715"/>
+                </a:solidFill>
+                <a:latin typeface="Apple SD Gothic Neo"/>
+              </a:rPr>
+              <a:t>서버 확인 후 로컬 자동 삭제</a:t>
+            </a:r>
+          </a:p>
+        </p:txBody>
+      </p:sp>
+      <p:sp>
+        <p:nvSpPr>
+          <p:cNvPr id="18" name="TextBox 17"/>
+          <p:cNvSpPr txBox="1"/>
+          <p:nvPr/>
+        </p:nvSpPr>
+        <p:spPr>
+          <a:xfrm>
+            <a:off x="8311896" y="4069080"/>
+            <a:ext cx="2926080" cy="1188720"/>
+          </a:xfrm>
+          <a:prstGeom prst="rect">
+            <a:avLst/>
+          </a:prstGeom>
+          <a:noFill/>
+        </p:spPr>
+        <p:txBody>
+          <a:bodyPr wrap="square" lIns="0" rIns="0" tIns="0" bIns="0" anchor="t">
+            <a:spAutoFit/>
+          </a:bodyPr>
+          <a:lstStyle/>
+          <a:p>
+            <a:pPr algn="l">
+              <a:lnSpc>
+                <a:spcPct val="145000"/>
+              </a:lnSpc>
+            </a:pPr>
+            <a:r>
+              <a:rPr sz="1100" b="0">
+                <a:solidFill>
+                  <a:srgbClr val="4E5A57"/>
+                </a:solidFill>
+                <a:latin typeface="Apple SD Gothic Neo"/>
+              </a:rPr>
+              <a:t>수신이 확인된 회차만 지운다.</a:t>
+            </a:r>
+          </a:p>
+          <a:p>
+            <a:pPr algn="l">
+              <a:lnSpc>
+                <a:spcPct val="145000"/>
+              </a:lnSpc>
+            </a:pPr>
+            <a:r>
+              <a:rPr sz="1100" b="0">
+                <a:solidFill>
+                  <a:srgbClr val="4E5A57"/>
+                </a:solidFill>
+                <a:latin typeface="Apple SD Gothic Neo"/>
+              </a:rPr>
+              <a:t>조기 삭제는 구조적으로 불가능하고,</a:t>
+            </a:r>
+          </a:p>
+          <a:p>
+            <a:pPr algn="l">
+              <a:lnSpc>
+                <a:spcPct val="145000"/>
+              </a:lnSpc>
+            </a:pPr>
+            <a:r>
+              <a:rPr sz="1100" b="0">
+                <a:solidFill>
+                  <a:srgbClr val="4E5A57"/>
+                </a:solidFill>
+                <a:latin typeface="Apple SD Gothic Neo"/>
+              </a:rPr>
+              <a:t>PC에 앞 반 답안이 남지 않는다.</a:t>
+            </a:r>
+          </a:p>
+        </p:txBody>
+      </p:sp>
+      <p:sp>
+        <p:nvSpPr>
+          <p:cNvPr id="19" name="TextBox 18"/>
+          <p:cNvSpPr txBox="1"/>
+          <p:nvPr/>
+        </p:nvSpPr>
+        <p:spPr>
+          <a:xfrm>
+            <a:off x="685800" y="6199632"/>
+            <a:ext cx="10789920" cy="365760"/>
+          </a:xfrm>
+          <a:prstGeom prst="rect">
+            <a:avLst/>
+          </a:prstGeom>
+          <a:noFill/>
+        </p:spPr>
+        <p:txBody>
+          <a:bodyPr wrap="square" lIns="0" rIns="0" tIns="0" bIns="0" anchor="t">
+            <a:spAutoFit/>
+          </a:bodyPr>
+          <a:lstStyle/>
+          <a:p>
+            <a:pPr algn="l">
+              <a:lnSpc>
+                <a:spcPct val="135000"/>
+              </a:lnSpc>
+            </a:pPr>
+            <a:r>
+              <a:rPr sz="1050" b="0">
+                <a:solidFill>
+                  <a:srgbClr val="78837F"/>
+                </a:solidFill>
+                <a:latin typeface="Apple SD Gothic Neo"/>
+              </a:rPr>
+              <a:t>허브를 뺀 대가는 하나 — 학생이 시험 직후 자리를 뜨면 그 PC는 다음 부팅까지 답안을 안고 있게 된다.</a:t>
             </a:r>
           </a:p>
         </p:txBody>
@@ -10378,7 +10552,7 @@
         </p:nvSpPr>
         <p:spPr>
           <a:xfrm>
-            <a:off x="685800" y="2286000"/>
+            <a:off x="685800" y="2240280"/>
             <a:ext cx="1965960" cy="868680"/>
           </a:xfrm>
           <a:prstGeom prst="roundRect">
@@ -10455,7 +10629,7 @@
         </p:nvCxnSpPr>
         <p:spPr>
           <a:xfrm>
-            <a:off x="2651760" y="2720340"/>
+            <a:off x="2651760" y="2674620"/>
             <a:ext cx="384048" cy="0"/>
           </a:xfrm>
           <a:prstGeom prst="line">
@@ -10491,7 +10665,7 @@
         </p:nvSpPr>
         <p:spPr>
           <a:xfrm>
-            <a:off x="3035808" y="2286000"/>
+            <a:off x="3035808" y="2240280"/>
             <a:ext cx="1965960" cy="868680"/>
           </a:xfrm>
           <a:prstGeom prst="roundRect">
@@ -10555,7 +10729,7 @@
                 </a:solidFill>
                 <a:latin typeface="Apple SD Gothic Neo"/>
               </a:rPr>
-              <a:t>Outbox · 오프라인 내내</a:t>
+              <a:t>시험 내내 여기 머문다</a:t>
             </a:r>
           </a:p>
         </p:txBody>
@@ -10568,7 +10742,7 @@
         </p:nvCxnSpPr>
         <p:spPr>
           <a:xfrm>
-            <a:off x="5001768" y="2720340"/>
+            <a:off x="5001768" y="2674620"/>
             <a:ext cx="384048" cy="0"/>
           </a:xfrm>
           <a:prstGeom prst="line">
@@ -10604,7 +10778,7 @@
         </p:nvSpPr>
         <p:spPr>
           <a:xfrm>
-            <a:off x="5385816" y="2286000"/>
+            <a:off x="5385816" y="2240280"/>
             <a:ext cx="1965960" cy="868680"/>
           </a:xfrm>
           <a:prstGeom prst="roundRect">
@@ -10668,7 +10842,7 @@
                 </a:solidFill>
                 <a:latin typeface="Apple SD Gothic Neo"/>
               </a:rPr>
-              <a:t>인터넷 복귀 감지</a:t>
+              <a:t>회선 개통 감지</a:t>
             </a:r>
           </a:p>
         </p:txBody>
@@ -10681,7 +10855,7 @@
         </p:nvCxnSpPr>
         <p:spPr>
           <a:xfrm>
-            <a:off x="7351775" y="2720340"/>
+            <a:off x="7351775" y="2674620"/>
             <a:ext cx="384048" cy="0"/>
           </a:xfrm>
           <a:prstGeom prst="line">
@@ -10717,7 +10891,7 @@
         </p:nvSpPr>
         <p:spPr>
           <a:xfrm>
-            <a:off x="7735823" y="2286000"/>
+            <a:off x="7735823" y="2240280"/>
             <a:ext cx="1965960" cy="868680"/>
           </a:xfrm>
           <a:prstGeom prst="roundRect">
@@ -10794,7 +10968,7 @@
         </p:nvCxnSpPr>
         <p:spPr>
           <a:xfrm>
-            <a:off x="9701784" y="2720340"/>
+            <a:off x="9701784" y="2674620"/>
             <a:ext cx="384048" cy="0"/>
           </a:xfrm>
           <a:prstGeom prst="line">
@@ -10830,7 +11004,7 @@
         </p:nvSpPr>
         <p:spPr>
           <a:xfrm>
-            <a:off x="10085832" y="2286000"/>
+            <a:off x="10085832" y="2240280"/>
             <a:ext cx="1965960" cy="868680"/>
           </a:xfrm>
           <a:prstGeom prst="roundRect">
@@ -10907,7 +11081,7 @@
         </p:nvSpPr>
         <p:spPr>
           <a:xfrm>
-            <a:off x="2788920" y="1993392"/>
+            <a:off x="2788920" y="1947672"/>
             <a:ext cx="1097280" cy="228600"/>
           </a:xfrm>
           <a:prstGeom prst="rect">
@@ -10946,7 +11120,7 @@
         </p:nvSpPr>
         <p:spPr>
           <a:xfrm>
-            <a:off x="5138928" y="1993392"/>
+            <a:off x="5138928" y="1947672"/>
             <a:ext cx="1097280" cy="228600"/>
           </a:xfrm>
           <a:prstGeom prst="rect">
@@ -10985,8 +11159,8 @@
         </p:nvCxnSpPr>
         <p:spPr>
           <a:xfrm>
-            <a:off x="5486400" y="3154680"/>
-            <a:ext cx="0" cy="502920"/>
+            <a:off x="5486400" y="3108960"/>
+            <a:ext cx="0" cy="457200"/>
           </a:xfrm>
           <a:prstGeom prst="line">
             <a:avLst/>
@@ -11021,7 +11195,7 @@
         </p:nvCxnSpPr>
         <p:spPr>
           <a:xfrm flipH="1">
-            <a:off x="3108960" y="3657600"/>
+            <a:off x="3108960" y="3566160"/>
             <a:ext cx="2377440" cy="0"/>
           </a:xfrm>
           <a:prstGeom prst="line">
@@ -11057,8 +11231,8 @@
         </p:nvCxnSpPr>
         <p:spPr>
           <a:xfrm flipV="1">
-            <a:off x="3108960" y="3154680"/>
-            <a:ext cx="0" cy="502920"/>
+            <a:off x="3108960" y="3108960"/>
+            <a:ext cx="0" cy="457200"/>
           </a:xfrm>
           <a:prstGeom prst="line">
             <a:avLst/>
@@ -11094,7 +11268,7 @@
         </p:nvSpPr>
         <p:spPr>
           <a:xfrm>
-            <a:off x="3200400" y="3721608"/>
+            <a:off x="3200400" y="3621024"/>
             <a:ext cx="3108960" cy="274320"/>
           </a:xfrm>
           <a:prstGeom prst="rect">
@@ -11133,8 +11307,8 @@
         </p:nvCxnSpPr>
         <p:spPr>
           <a:xfrm>
-            <a:off x="6126480" y="3154680"/>
-            <a:ext cx="0" cy="1673352"/>
+            <a:off x="6126480" y="3108960"/>
+            <a:ext cx="0" cy="1481328"/>
           </a:xfrm>
           <a:prstGeom prst="line">
             <a:avLst/>
@@ -11168,7 +11342,7 @@
         </p:nvCxnSpPr>
         <p:spPr>
           <a:xfrm>
-            <a:off x="6126480" y="4828032"/>
+            <a:off x="6126480" y="4590288"/>
             <a:ext cx="777240" cy="0"/>
           </a:xfrm>
           <a:prstGeom prst="line">
@@ -11204,7 +11378,7 @@
         </p:nvSpPr>
         <p:spPr>
           <a:xfrm>
-            <a:off x="6903720" y="4572000"/>
+            <a:off x="6903720" y="4334256"/>
             <a:ext cx="2377440" cy="530352"/>
           </a:xfrm>
           <a:prstGeom prst="roundRect">
@@ -11265,8 +11439,8 @@
         </p:nvSpPr>
         <p:spPr>
           <a:xfrm>
-            <a:off x="9418320" y="4681728"/>
-            <a:ext cx="2377440" cy="320040"/>
+            <a:off x="9418320" y="4443984"/>
+            <a:ext cx="2468880" cy="320040"/>
           </a:xfrm>
           <a:prstGeom prst="rect">
             <a:avLst/>
@@ -11304,17 +11478,16 @@
         </p:nvCxnSpPr>
         <p:spPr>
           <a:xfrm>
-            <a:off x="1673352" y="3154680"/>
-            <a:ext cx="0" cy="1463040"/>
+            <a:off x="7315200" y="3108960"/>
+            <a:ext cx="0" cy="2331720"/>
           </a:xfrm>
           <a:prstGeom prst="line">
             <a:avLst/>
           </a:prstGeom>
-          <a:ln w="11430">
+          <a:ln w="17780">
             <a:solidFill>
-              <a:srgbClr val="78837F"/>
+              <a:srgbClr val="0B6E5F"/>
             </a:solidFill>
-            <a:prstDash val="dash"/>
           </a:ln>
         </p:spPr>
         <p:style>
@@ -11332,16 +11505,113 @@
           </a:fontRef>
         </p:style>
       </p:cxnSp>
-      <p:sp>
-        <p:nvSpPr>
-          <p:cNvPr id="27" name="TextBox 26"/>
+      <p:cxnSp>
+        <p:nvCxnSpPr>
+          <p:cNvPr id="27" name="Connector 26"/>
+          <p:cNvCxnSpPr/>
+          <p:nvPr/>
+        </p:nvCxnSpPr>
+        <p:spPr>
+          <a:xfrm flipH="1">
+            <a:off x="3703320" y="5440680"/>
+            <a:ext cx="3611880" cy="0"/>
+          </a:xfrm>
+          <a:prstGeom prst="line">
+            <a:avLst/>
+          </a:prstGeom>
+          <a:ln w="17780">
+            <a:solidFill>
+              <a:srgbClr val="0B6E5F"/>
+            </a:solidFill>
+            <a:tailEnd type="triangle" w="med" len="med"/>
+          </a:ln>
+        </p:spPr>
+        <p:style>
+          <a:lnRef idx="2">
+            <a:schemeClr val="accent1"/>
+          </a:lnRef>
+          <a:fillRef idx="0">
+            <a:schemeClr val="accent1"/>
+          </a:fillRef>
+          <a:effectRef idx="1">
+            <a:schemeClr val="accent1"/>
+          </a:effectRef>
+          <a:fontRef idx="minor">
+            <a:schemeClr val="tx1"/>
+          </a:fontRef>
+        </p:style>
+      </p:cxnSp>
+      <p:sp>
+        <p:nvSpPr>
+          <p:cNvPr id="28" name="Rounded Rectangle 27"/>
+          <p:cNvSpPr/>
+          <p:nvPr/>
+        </p:nvSpPr>
+        <p:spPr>
+          <a:xfrm>
+            <a:off x="1737360" y="5193792"/>
+            <a:ext cx="1965960" cy="502920"/>
+          </a:xfrm>
+          <a:prstGeom prst="roundRect">
+            <a:avLst>
+              <a:gd name="adj" fmla="val 8000"/>
+            </a:avLst>
+          </a:prstGeom>
+          <a:solidFill>
+            <a:srgbClr val="E2EEEB"/>
+          </a:solidFill>
+          <a:ln w="15240">
+            <a:solidFill>
+              <a:srgbClr val="0B6E5F"/>
+            </a:solidFill>
+          </a:ln>
+          <a:effectLst/>
+        </p:spPr>
+        <p:style>
+          <a:lnRef idx="1">
+            <a:schemeClr val="accent1"/>
+          </a:lnRef>
+          <a:fillRef idx="3">
+            <a:schemeClr val="accent1"/>
+          </a:fillRef>
+          <a:effectRef idx="2">
+            <a:schemeClr val="accent1"/>
+          </a:effectRef>
+          <a:fontRef idx="minor">
+            <a:schemeClr val="lt1"/>
+          </a:fontRef>
+        </p:style>
+        <p:txBody>
+          <a:bodyPr rtlCol="0" anchor="ctr" wrap="square" lIns="128016" rIns="128016" tIns="54864" bIns="54864"/>
+          <a:lstStyle/>
+          <a:p>
+            <a:pPr algn="l">
+              <a:lnSpc>
+                <a:spcPct val="125000"/>
+              </a:lnSpc>
+            </a:pPr>
+            <a:r>
+              <a:rPr sz="1150" b="1">
+                <a:solidFill>
+                  <a:srgbClr val="0B6E5F"/>
+                </a:solidFill>
+                <a:latin typeface="Apple SD Gothic Neo"/>
+              </a:rPr>
+              <a:t>로컬 삭제</a:t>
+            </a:r>
+          </a:p>
+        </p:txBody>
+      </p:sp>
+      <p:sp>
+        <p:nvSpPr>
+          <p:cNvPr id="29" name="TextBox 28"/>
           <p:cNvSpPr txBox="1"/>
           <p:nvPr/>
         </p:nvSpPr>
         <p:spPr>
           <a:xfrm>
-            <a:off x="685800" y="4663440"/>
-            <a:ext cx="2377440" cy="274320"/>
+            <a:off x="685800" y="5294376"/>
+            <a:ext cx="1005840" cy="274320"/>
           </a:xfrm>
           <a:prstGeom prst="rect">
             <a:avLst/>
@@ -11360,20 +11630,20 @@
               </a:lnSpc>
             </a:pPr>
             <a:r>
-              <a:rPr sz="1000" b="0">
-                <a:solidFill>
-                  <a:srgbClr val="78837F"/>
-                </a:solidFill>
-                <a:latin typeface="Apple SD Gothic Neo"/>
-              </a:rPr>
-              <a:t>잠정 점수는 여기서 이미 나온다</a:t>
-            </a:r>
-          </a:p>
-        </p:txBody>
-      </p:sp>
-      <p:sp>
-        <p:nvSpPr>
-          <p:cNvPr id="28" name="TextBox 27"/>
+              <a:rPr sz="950" b="0">
+                <a:solidFill>
+                  <a:srgbClr val="0B6E5F"/>
+                </a:solidFill>
+                <a:latin typeface="Apple SD Gothic Neo"/>
+              </a:rPr>
+              <a:t>공용 PC 위생</a:t>
+            </a:r>
+          </a:p>
+        </p:txBody>
+      </p:sp>
+      <p:sp>
+        <p:nvSpPr>
+          <p:cNvPr id="30" name="TextBox 29"/>
           <p:cNvSpPr txBox="1"/>
           <p:nvPr/>
         </p:nvSpPr>
@@ -11405,7 +11675,7 @@
                 </a:solidFill>
                 <a:latin typeface="Apple SD Gothic Neo"/>
               </a:rPr>
-              <a:t>‘전송 대기’는 정상 상태다 — 오프라인 시험 내내 모든 답안이 여기 머문다. 경보를 울려야 하는 유일한 상태는 ‘미제출’이다.</a:t>
+              <a:t>‘전송 대기’는 정상 상태다 — 시험 내내 모든 답안이 여기 머문다. ‘동기화 완료’가 확인된 뒤에만 로컬이 지워진다.</a:t>
             </a:r>
           </a:p>
         </p:txBody>
@@ -12252,7 +12522,7 @@
         <p:spPr>
           <a:xfrm>
             <a:off x="6263640" y="4526280"/>
-            <a:ext cx="3657600" cy="274320"/>
+            <a:ext cx="3840480" cy="274320"/>
           </a:xfrm>
           <a:prstGeom prst="rect">
             <a:avLst/>
@@ -12507,8 +12777,8 @@
         </p:nvSpPr>
         <p:spPr>
           <a:xfrm>
-            <a:off x="685800" y="1627632"/>
-            <a:ext cx="10789920" cy="292608"/>
+            <a:off x="685800" y="1600200"/>
+            <a:ext cx="10789920" cy="274320"/>
           </a:xfrm>
           <a:prstGeom prst="rect">
             <a:avLst/>
@@ -12527,13 +12797,13 @@
               </a:lnSpc>
             </a:pPr>
             <a:r>
-              <a:rPr sz="1250" b="0">
+              <a:rPr sz="1200" b="0">
                 <a:solidFill>
                   <a:srgbClr val="4E5A57"/>
                 </a:solidFill>
                 <a:latin typeface="Apple SD Gothic Neo"/>
               </a:rPr>
-              <a:t>오프라인 저장 · Outbox · 백오프 · JSON 내보내기는 이미 구현되어 있다. 이 전략은 구멍 다섯 개를 메우는 계획이다.</a:t>
+              <a:t>오프라인 저장 · Outbox · 백오프 · JSON 내보내기는 이미 구현되어 있다. 이 전략은 구멍 여섯 개를 메우는 계획이다.</a:t>
             </a:r>
           </a:p>
         </p:txBody>
@@ -12547,8 +12817,8 @@
           <p:nvPr/>
         </p:nvGraphicFramePr>
         <p:xfrm>
-          <a:off x="685800" y="2148840"/>
-          <a:ext cx="10789920" cy="3602736"/>
+          <a:off x="685800" y="2011680"/>
+          <a:ext cx="10789920" cy="3694176"/>
         </p:xfrm>
         <a:graphic>
           <a:graphicData uri="http://schemas.openxmlformats.org/drawingml/2006/table">
@@ -12559,7 +12829,7 @@
                 <a:gridCol w="4206240"/>
                 <a:gridCol w="4480560"/>
               </a:tblGrid>
-              <a:tr h="310896">
+              <a:tr h="292608">
                 <a:tc>
                   <a:txBody>
                     <a:bodyPr wrap="square"/>
@@ -12642,7 +12912,7 @@
                   </a:tcPr>
                 </a:tc>
               </a:tr>
-              <a:tr h="658368">
+              <a:tr h="566928">
                 <a:tc>
                   <a:txBody>
                     <a:bodyPr wrap="square"/>
@@ -12688,7 +12958,7 @@
                           </a:solidFill>
                           <a:latin typeface="Apple SD Gothic Neo"/>
                         </a:rPr>
-                        <a:t>schema.sql 의 RLS 가 전부 auth.uid() = 본인 행만 허용.
+                        <a:t>RLS 가 전부 auth.uid() = 본인 행만 허용.
 교사·관리자 역할이 존재하지 않는다.</a:t>
                       </a:r>
                     </a:p>
@@ -12716,7 +12986,7 @@
                           </a:solidFill>
                           <a:latin typeface="Apple SD Gothic Neo"/>
                         </a:rPr>
-                        <a:t>profiles(role) 테이블과 교사·관리자용 SELECT 정책 추가.
+                        <a:t>profiles(role) 과 교사·관리자용 SELECT 정책 추가.
 요구사항의 핵심이 여기에 걸려 있다.</a:t>
                       </a:r>
                     </a:p>
@@ -12728,7 +12998,265 @@
                   </a:tcPr>
                 </a:tc>
               </a:tr>
-              <a:tr h="658368">
+              <a:tr h="566928">
+                <a:tc>
+                  <a:txBody>
+                    <a:bodyPr wrap="square"/>
+                    <a:lstStyle/>
+                    <a:p>
+                      <a:pPr algn="l">
+                        <a:lnSpc>
+                          <a:spcPct val="120000"/>
+                        </a:lnSpc>
+                      </a:pPr>
+                      <a:r>
+                        <a:rPr sz="950" b="1">
+                          <a:solidFill>
+                            <a:srgbClr val="101715"/>
+                          </a:solidFill>
+                          <a:latin typeface="Apple SD Gothic Neo"/>
+                        </a:rPr>
+                        <a:t>고아 아웃박스가
+방치된다</a:t>
+                      </a:r>
+                    </a:p>
+                  </a:txBody>
+                  <a:tcPr marL="91440" marR="91440" marT="45720" marB="45720" anchor="ctr">
+                    <a:solidFill>
+                      <a:srgbClr val="FFFFFF"/>
+                    </a:solidFill>
+                  </a:tcPr>
+                </a:tc>
+                <a:tc>
+                  <a:txBody>
+                    <a:bodyPr wrap="square"/>
+                    <a:lstStyle/>
+                    <a:p>
+                      <a:pPr algn="l">
+                        <a:lnSpc>
+                          <a:spcPct val="120000"/>
+                        </a:lnSpc>
+                      </a:pPr>
+                      <a:r>
+                        <a:rPr sz="950" b="0">
+                          <a:solidFill>
+                            <a:srgbClr val="4E5A57"/>
+                          </a:solidFill>
+                          <a:latin typeface="Apple SD Gothic Neo"/>
+                        </a:rPr>
+                        <a:t>업로드가 현재 세션만 본다. 앞 반 학생의
+미전송 큐는 아무도 읽지 않는다.</a:t>
+                      </a:r>
+                    </a:p>
+                  </a:txBody>
+                  <a:tcPr marL="91440" marR="91440" marT="45720" marB="45720" anchor="ctr">
+                    <a:solidFill>
+                      <a:srgbClr val="FFFFFF"/>
+                    </a:solidFill>
+                  </a:tcPr>
+                </a:tc>
+                <a:tc>
+                  <a:txBody>
+                    <a:bodyPr wrap="square"/>
+                    <a:lstStyle/>
+                    <a:p>
+                      <a:pPr algn="l">
+                        <a:lnSpc>
+                          <a:spcPct val="120000"/>
+                        </a:lnSpc>
+                      </a:pPr>
+                      <a:r>
+                        <a:rPr sz="950" b="0">
+                          <a:solidFill>
+                            <a:srgbClr val="4E5A57"/>
+                          </a:solidFill>
+                          <a:latin typeface="Apple SD Gothic Neo"/>
+                        </a:rPr>
+                        <a:t>시작 시 저장소를 훑어 미완료 회차를 전부 큐에 올린다.
+allKeys() 가 이미 있어 작업량이 작다.</a:t>
+                      </a:r>
+                    </a:p>
+                  </a:txBody>
+                  <a:tcPr marL="91440" marR="91440" marT="45720" marB="45720" anchor="ctr">
+                    <a:solidFill>
+                      <a:srgbClr val="FFFFFF"/>
+                    </a:solidFill>
+                  </a:tcPr>
+                </a:tc>
+              </a:tr>
+              <a:tr h="566928">
+                <a:tc>
+                  <a:txBody>
+                    <a:bodyPr wrap="square"/>
+                    <a:lstStyle/>
+                    <a:p>
+                      <a:pPr algn="l">
+                        <a:lnSpc>
+                          <a:spcPct val="120000"/>
+                        </a:lnSpc>
+                      </a:pPr>
+                      <a:r>
+                        <a:rPr sz="950" b="1">
+                          <a:solidFill>
+                            <a:srgbClr val="101715"/>
+                          </a:solidFill>
+                          <a:latin typeface="Apple SD Gothic Neo"/>
+                        </a:rPr>
+                        <a:t>업로드 완료를
+확인할 화면이 없다</a:t>
+                      </a:r>
+                    </a:p>
+                  </a:txBody>
+                  <a:tcPr marL="91440" marR="91440" marT="45720" marB="45720" anchor="ctr">
+                    <a:solidFill>
+                      <a:srgbClr val="FFFFFF"/>
+                    </a:solidFill>
+                  </a:tcPr>
+                </a:tc>
+                <a:tc>
+                  <a:txBody>
+                    <a:bodyPr wrap="square"/>
+                    <a:lstStyle/>
+                    <a:p>
+                      <a:pPr algn="l">
+                        <a:lnSpc>
+                          <a:spcPct val="120000"/>
+                        </a:lnSpc>
+                      </a:pPr>
+                      <a:r>
+                        <a:rPr sz="950" b="0">
+                          <a:solidFill>
+                            <a:srgbClr val="4E5A57"/>
+                          </a:solidFill>
+                          <a:latin typeface="Apple SD Gothic Neo"/>
+                        </a:rPr>
+                        <a:t>SG_SYNC.stats() 가 값을 내놓지만 아무도 안 그린다.
+학생은 다 올라갔는지 모른 채 나간다.</a:t>
+                      </a:r>
+                    </a:p>
+                  </a:txBody>
+                  <a:tcPr marL="91440" marR="91440" marT="45720" marB="45720" anchor="ctr">
+                    <a:solidFill>
+                      <a:srgbClr val="FFFFFF"/>
+                    </a:solidFill>
+                  </a:tcPr>
+                </a:tc>
+                <a:tc>
+                  <a:txBody>
+                    <a:bodyPr wrap="square"/>
+                    <a:lstStyle/>
+                    <a:p>
+                      <a:pPr algn="l">
+                        <a:lnSpc>
+                          <a:spcPct val="120000"/>
+                        </a:lnSpc>
+                      </a:pPr>
+                      <a:r>
+                        <a:rPr sz="950" b="0">
+                          <a:solidFill>
+                            <a:srgbClr val="4E5A57"/>
+                          </a:solidFill>
+                          <a:latin typeface="Apple SD Gothic Neo"/>
+                        </a:rPr>
+                        <a:t>종료 화면에 완료 게이트를, 감독관용으로 반 전체 현황판을.
+회수창의 성립 조건이다.</a:t>
+                      </a:r>
+                    </a:p>
+                  </a:txBody>
+                  <a:tcPr marL="91440" marR="91440" marT="45720" marB="45720" anchor="ctr">
+                    <a:solidFill>
+                      <a:srgbClr val="FFFFFF"/>
+                    </a:solidFill>
+                  </a:tcPr>
+                </a:tc>
+              </a:tr>
+              <a:tr h="566928">
+                <a:tc>
+                  <a:txBody>
+                    <a:bodyPr wrap="square"/>
+                    <a:lstStyle/>
+                    <a:p>
+                      <a:pPr algn="l">
+                        <a:lnSpc>
+                          <a:spcPct val="120000"/>
+                        </a:lnSpc>
+                      </a:pPr>
+                      <a:r>
+                        <a:rPr sz="950" b="1">
+                          <a:solidFill>
+                            <a:srgbClr val="101715"/>
+                          </a:solidFill>
+                          <a:latin typeface="Apple SD Gothic Neo"/>
+                        </a:rPr>
+                        <a:t>공용 PC 에
+앞 반 답안이 남는다</a:t>
+                      </a:r>
+                    </a:p>
+                  </a:txBody>
+                  <a:tcPr marL="91440" marR="91440" marT="45720" marB="45720" anchor="ctr">
+                    <a:solidFill>
+                      <a:srgbClr val="FFFFFF"/>
+                    </a:solidFill>
+                  </a:tcPr>
+                </a:tc>
+                <a:tc>
+                  <a:txBody>
+                    <a:bodyPr wrap="square"/>
+                    <a:lstStyle/>
+                    <a:p>
+                      <a:pPr algn="l">
+                        <a:lnSpc>
+                          <a:spcPct val="120000"/>
+                        </a:lnSpc>
+                      </a:pPr>
+                      <a:r>
+                        <a:rPr sz="950" b="0">
+                          <a:solidFill>
+                            <a:srgbClr val="4E5A57"/>
+                          </a:solidFill>
+                          <a:latin typeface="Apple SD Gothic Neo"/>
+                        </a:rPr>
+                        <a:t>동기화 후에도 로컬 데이터가 그대로다.
+다음 학생이 개발자도구로 꺼낼 수 있다.</a:t>
+                      </a:r>
+                    </a:p>
+                  </a:txBody>
+                  <a:tcPr marL="91440" marR="91440" marT="45720" marB="45720" anchor="ctr">
+                    <a:solidFill>
+                      <a:srgbClr val="FFFFFF"/>
+                    </a:solidFill>
+                  </a:tcPr>
+                </a:tc>
+                <a:tc>
+                  <a:txBody>
+                    <a:bodyPr wrap="square"/>
+                    <a:lstStyle/>
+                    <a:p>
+                      <a:pPr algn="l">
+                        <a:lnSpc>
+                          <a:spcPct val="120000"/>
+                        </a:lnSpc>
+                      </a:pPr>
+                      <a:r>
+                        <a:rPr sz="950" b="0">
+                          <a:solidFill>
+                            <a:srgbClr val="4E5A57"/>
+                          </a:solidFill>
+                          <a:latin typeface="Apple SD Gothic Neo"/>
+                        </a:rPr>
+                        <a:t>서버 수신이 확인된 회차만 지운다.
+삭제 조건을 서버 응답에 묶어 조기 삭제를 막는다.</a:t>
+                      </a:r>
+                    </a:p>
+                  </a:txBody>
+                  <a:tcPr marL="91440" marR="91440" marT="45720" marB="45720" anchor="ctr">
+                    <a:solidFill>
+                      <a:srgbClr val="FFFFFF"/>
+                    </a:solidFill>
+                  </a:tcPr>
+                </a:tc>
+              </a:tr>
+              <a:tr h="566928">
                 <a:tc>
                   <a:txBody>
                     <a:bodyPr wrap="square"/>
@@ -12802,8 +13330,8 @@
                           </a:solidFill>
                           <a:latin typeface="Apple SD Gothic Neo"/>
                         </a:rPr>
-                        <a:t>student_code + 단말 UUID 로 식별하고 동기화 시점에 uid 를 채운다.
-학생 계정은 시험 전날 온라인일 때 미리 발급·캐시.</a:t>
+                        <a:t>student_code + 단말 UUID 로 식별하고
+동기화 시점에 uid 를 채운다.</a:t>
                       </a:r>
                     </a:p>
                   </a:txBody>
@@ -12814,7 +13342,7 @@
                   </a:tcPr>
                 </a:tc>
               </a:tr>
-              <a:tr h="658368">
+              <a:tr h="566928">
                 <a:tc>
                   <a:txBody>
                     <a:bodyPr wrap="square"/>
@@ -12888,180 +13416,8 @@
                           </a:solidFill>
                           <a:latin typeface="Apple SD Gothic Neo"/>
                         </a:rPr>
-                        <a:t>Outbox 를 정본으로 두고 전송 어댑터만
-hub / supabase 두 개로 가른다.</a:t>
-                      </a:r>
-                    </a:p>
-                  </a:txBody>
-                  <a:tcPr marL="91440" marR="91440" marT="45720" marB="45720" anchor="ctr">
-                    <a:solidFill>
-                      <a:srgbClr val="FFFFFF"/>
-                    </a:solidFill>
-                  </a:tcPr>
-                </a:tc>
-              </a:tr>
-              <a:tr h="658368">
-                <a:tc>
-                  <a:txBody>
-                    <a:bodyPr wrap="square"/>
-                    <a:lstStyle/>
-                    <a:p>
-                      <a:pPr algn="l">
-                        <a:lnSpc>
-                          <a:spcPct val="120000"/>
-                        </a:lnSpc>
-                      </a:pPr>
-                      <a:r>
-                        <a:rPr sz="950" b="1">
-                          <a:solidFill>
-                            <a:srgbClr val="101715"/>
-                          </a:solidFill>
-                          <a:latin typeface="Apple SD Gothic Neo"/>
-                        </a:rPr>
-                        <a:t>로컬 저장이
-지워질 수 있다</a:t>
-                      </a:r>
-                    </a:p>
-                  </a:txBody>
-                  <a:tcPr marL="91440" marR="91440" marT="45720" marB="45720" anchor="ctr">
-                    <a:solidFill>
-                      <a:srgbClr val="FFFFFF"/>
-                    </a:solidFill>
-                  </a:tcPr>
-                </a:tc>
-                <a:tc>
-                  <a:txBody>
-                    <a:bodyPr wrap="square"/>
-                    <a:lstStyle/>
-                    <a:p>
-                      <a:pPr algn="l">
-                        <a:lnSpc>
-                          <a:spcPct val="120000"/>
-                        </a:lnSpc>
-                      </a:pPr>
-                      <a:r>
-                        <a:rPr sz="950" b="0">
-                          <a:solidFill>
-                            <a:srgbClr val="4E5A57"/>
-                          </a:solidFill>
-                          <a:latin typeface="Apple SD Gothic Neo"/>
-                        </a:rPr>
-                        <a:t>IndexedDB 는 용량 압박 시 브라우저가 임의로 비운다.
-녹음 webm 은 수십 MB.</a:t>
-                      </a:r>
-                    </a:p>
-                  </a:txBody>
-                  <a:tcPr marL="91440" marR="91440" marT="45720" marB="45720" anchor="ctr">
-                    <a:solidFill>
-                      <a:srgbClr val="FFFFFF"/>
-                    </a:solidFill>
-                  </a:tcPr>
-                </a:tc>
-                <a:tc>
-                  <a:txBody>
-                    <a:bodyPr wrap="square"/>
-                    <a:lstStyle/>
-                    <a:p>
-                      <a:pPr algn="l">
-                        <a:lnSpc>
-                          <a:spcPct val="120000"/>
-                        </a:lnSpc>
-                      </a:pPr>
-                      <a:r>
-                        <a:rPr sz="950" b="0">
-                          <a:solidFill>
-                            <a:srgbClr val="4E5A57"/>
-                          </a:solidFill>
-                          <a:latin typeface="Apple SD Gothic Neo"/>
-                        </a:rPr>
-                        <a:t>시험 시작 시 navigator.storage.persist() 로 영구 승격 요청.
-거부되면 시험 시작을 막고 경고한다.</a:t>
-                      </a:r>
-                    </a:p>
-                  </a:txBody>
-                  <a:tcPr marL="91440" marR="91440" marT="45720" marB="45720" anchor="ctr">
-                    <a:solidFill>
-                      <a:srgbClr val="FFFFFF"/>
-                    </a:solidFill>
-                  </a:tcPr>
-                </a:tc>
-              </a:tr>
-              <a:tr h="658368">
-                <a:tc>
-                  <a:txBody>
-                    <a:bodyPr wrap="square"/>
-                    <a:lstStyle/>
-                    <a:p>
-                      <a:pPr algn="l">
-                        <a:lnSpc>
-                          <a:spcPct val="120000"/>
-                        </a:lnSpc>
-                      </a:pPr>
-                      <a:r>
-                        <a:rPr sz="950" b="1">
-                          <a:solidFill>
-                            <a:srgbClr val="101715"/>
-                          </a:solidFill>
-                          <a:latin typeface="Apple SD Gothic Neo"/>
-                        </a:rPr>
-                        <a:t>동기화 상태를
-볼 화면이 없다</a:t>
-                      </a:r>
-                    </a:p>
-                  </a:txBody>
-                  <a:tcPr marL="91440" marR="91440" marT="45720" marB="45720" anchor="ctr">
-                    <a:solidFill>
-                      <a:srgbClr val="FFFFFF"/>
-                    </a:solidFill>
-                  </a:tcPr>
-                </a:tc>
-                <a:tc>
-                  <a:txBody>
-                    <a:bodyPr wrap="square"/>
-                    <a:lstStyle/>
-                    <a:p>
-                      <a:pPr algn="l">
-                        <a:lnSpc>
-                          <a:spcPct val="120000"/>
-                        </a:lnSpc>
-                      </a:pPr>
-                      <a:r>
-                        <a:rPr sz="950" b="0">
-                          <a:solidFill>
-                            <a:srgbClr val="4E5A57"/>
-                          </a:solidFill>
-                          <a:latin typeface="Apple SD Gothic Neo"/>
-                        </a:rPr>
-                        <a:t>SG_SYNC.stats() 가 값을 내놓지만
-아무도 그리지 않는다.</a:t>
-                      </a:r>
-                    </a:p>
-                  </a:txBody>
-                  <a:tcPr marL="91440" marR="91440" marT="45720" marB="45720" anchor="ctr">
-                    <a:solidFill>
-                      <a:srgbClr val="FFFFFF"/>
-                    </a:solidFill>
-                  </a:tcPr>
-                </a:tc>
-                <a:tc>
-                  <a:txBody>
-                    <a:bodyPr wrap="square"/>
-                    <a:lstStyle/>
-                    <a:p>
-                      <a:pPr algn="l">
-                        <a:lnSpc>
-                          <a:spcPct val="120000"/>
-                        </a:lnSpc>
-                      </a:pPr>
-                      <a:r>
-                        <a:rPr sz="950" b="0">
-                          <a:solidFill>
-                            <a:srgbClr val="4E5A57"/>
-                          </a:solidFill>
-                          <a:latin typeface="Apple SD Gothic Neo"/>
-                        </a:rPr>
-                        <a:t>허브 현황판(오프라인)과 Supabase 대시보드(온라인),
-두 화면을 만든다. 같은 상태값을 쓴다.</a:t>
+                        <a:t>exam-sync.js 의 Outbox 를 정본으로 두고
+전송 어댑터를 Supabase 하나로 정리한다.</a:t>
                       </a:r>
                     </a:p>
                   </a:txBody>
@@ -13110,7 +13466,7 @@
                 </a:solidFill>
                 <a:latin typeface="Apple SD Gothic Neo"/>
               </a:rPr>
-              <a:t>확인 요청 — app/js/config.js 에 Supabase URL·anon 키가 평문 커밋되어 있다. 위 1번(RLS 구멍)과 겹치면 이야기가 달라지므로 저장소 공개 범위를 먼저 확인할 것.</a:t>
+              <a:t>확인 요청 — app/js/config.js 에 Supabase URL·anon 키가 평문 커밋되어 있다. 첫 번째 구멍(RLS)과 겹치면 이야기가 달라진다.</a:t>
             </a:r>
           </a:p>
         </p:txBody>
@@ -13302,19 +13658,19 @@
           <p:nvPr/>
         </p:nvGraphicFramePr>
         <p:xfrm>
-          <a:off x="685800" y="1874519"/>
-          <a:ext cx="10789920" cy="4151376"/>
+          <a:off x="685800" y="1828800"/>
+          <a:ext cx="10789920" cy="4315968"/>
         </p:xfrm>
         <a:graphic>
           <a:graphicData uri="http://schemas.openxmlformats.org/drawingml/2006/table">
             <a:tbl>
               <a:tblPr firstRow="0" bandRow="0"/>
               <a:tblGrid>
-                <a:gridCol w="2926080"/>
+                <a:gridCol w="2834640"/>
                 <a:gridCol w="914400"/>
-                <a:gridCol w="6949440"/>
+                <a:gridCol w="7040880"/>
               </a:tblGrid>
-              <a:tr h="310896">
+              <a:tr h="292608">
                 <a:tc>
                   <a:txBody>
                     <a:bodyPr wrap="square"/>
@@ -13397,7 +13753,7 @@
                   </a:tcPr>
                 </a:tc>
               </a:tr>
-              <a:tr h="548640">
+              <a:tr h="502920">
                 <a:tc>
                   <a:txBody>
                     <a:bodyPr wrap="square"/>
@@ -13480,7 +13836,7 @@
                   </a:tcPr>
                 </a:tc>
               </a:tr>
-              <a:tr h="548640">
+              <a:tr h="502920">
                 <a:tc>
                   <a:txBody>
                     <a:bodyPr wrap="square"/>
@@ -13498,7 +13854,7 @@
                           </a:solidFill>
                           <a:latin typeface="Apple SD Gothic Neo"/>
                         </a:rPr>
-                        <a:t>동기화 도중 인터넷이 다시 끊긴다</a:t>
+                        <a:t>회수창 안에 다 못 올린다</a:t>
                       </a:r>
                     </a:p>
                   </a:txBody>
@@ -13552,7 +13908,7 @@
                           </a:solidFill>
                           <a:latin typeface="Apple SD Gothic Neo"/>
                         </a:rPr>
-                        <a:t>보낸 항목만 큐에서 빠진다. 다음 복귀 때 나머지가 이어서 간다. 전부 upsert 라 중복 전송도 무해.</a:t>
+                        <a:t>남은 큐는 그대로 있다. 그 PC를 다음에 켜면 고아 회수 로직이 자동으로 마저 올린다.</a:t>
                       </a:r>
                     </a:p>
                   </a:txBody>
@@ -13563,7 +13919,7 @@
                   </a:tcPr>
                 </a:tc>
               </a:tr>
-              <a:tr h="548640">
+              <a:tr h="502920">
                 <a:tc>
                   <a:txBody>
                     <a:bodyPr wrap="square"/>
@@ -13646,7 +14002,90 @@
                   </a:tcPr>
                 </a:tc>
               </a:tr>
-              <a:tr h="548640">
+              <a:tr h="502920">
+                <a:tc>
+                  <a:txBody>
+                    <a:bodyPr wrap="square"/>
+                    <a:lstStyle/>
+                    <a:p>
+                      <a:pPr algn="l">
+                        <a:lnSpc>
+                          <a:spcPct val="120000"/>
+                        </a:lnSpc>
+                      </a:pPr>
+                      <a:r>
+                        <a:rPr sz="1000" b="1">
+                          <a:solidFill>
+                            <a:srgbClr val="101715"/>
+                          </a:solidFill>
+                          <a:latin typeface="Apple SD Gothic Neo"/>
+                        </a:rPr>
+                        <a:t>30대가 동시에 올린다</a:t>
+                      </a:r>
+                    </a:p>
+                  </a:txBody>
+                  <a:tcPr marL="91440" marR="91440" marT="45720" marB="45720" anchor="ctr">
+                    <a:solidFill>
+                      <a:srgbClr val="FFFFFF"/>
+                    </a:solidFill>
+                  </a:tcPr>
+                </a:tc>
+                <a:tc>
+                  <a:txBody>
+                    <a:bodyPr wrap="square"/>
+                    <a:lstStyle/>
+                    <a:p>
+                      <a:pPr algn="l">
+                        <a:lnSpc>
+                          <a:spcPct val="120000"/>
+                        </a:lnSpc>
+                      </a:pPr>
+                      <a:r>
+                        <a:rPr sz="1000" b="1">
+                          <a:solidFill>
+                            <a:srgbClr val="0B6E5F"/>
+                          </a:solidFill>
+                          <a:latin typeface="Apple SD Gothic Neo"/>
+                        </a:rPr>
+                        <a:t>무해</a:t>
+                      </a:r>
+                    </a:p>
+                  </a:txBody>
+                  <a:tcPr marL="91440" marR="91440" marT="45720" marB="45720" anchor="ctr">
+                    <a:solidFill>
+                      <a:srgbClr val="FFFFFF"/>
+                    </a:solidFill>
+                  </a:tcPr>
+                </a:tc>
+                <a:tc>
+                  <a:txBody>
+                    <a:bodyPr wrap="square"/>
+                    <a:lstStyle/>
+                    <a:p>
+                      <a:pPr algn="l">
+                        <a:lnSpc>
+                          <a:spcPct val="120000"/>
+                        </a:lnSpc>
+                      </a:pPr>
+                      <a:r>
+                        <a:rPr sz="1000" b="0">
+                          <a:solidFill>
+                            <a:srgbClr val="4E5A57"/>
+                          </a:solidFill>
+                          <a:latin typeface="Apple SD Gothic Neo"/>
+                        </a:rPr>
+                        <a:t>총량 75–150 MB, Supabase 입장에서 미미하다. 재시도 지터가 이미 있어 동시 폭주도 흩어진다.</a:t>
+                      </a:r>
+                    </a:p>
+                  </a:txBody>
+                  <a:tcPr marL="91440" marR="91440" marT="45720" marB="45720" anchor="ctr">
+                    <a:solidFill>
+                      <a:srgbClr val="FFFFFF"/>
+                    </a:solidFill>
+                  </a:tcPr>
+                </a:tc>
+              </a:tr>
+              <a:tr h="502920">
                 <a:tc>
                   <a:txBody>
                     <a:bodyPr wrap="square"/>
@@ -13718,7 +14157,7 @@
                           </a:solidFill>
                           <a:latin typeface="Apple SD Gothic Neo"/>
                         </a:rPr>
-                        <a:t>제출 순서·시간 판정에 단말 시계를 쓰지 않는다. 내부 타이밍은 단조 시계로, 기록 시각은 서버 수신 시각으로.</a:t>
+                        <a:t>제출 순서·시간 판정에 단말 시계를 쓰지 않는다. 내부 타이밍은 단조 시계, 기록 시각은 서버 수신 시각.</a:t>
                       </a:r>
                     </a:p>
                   </a:txBody>
@@ -13729,7 +14168,7 @@
                   </a:tcPr>
                 </a:tc>
               </a:tr>
-              <a:tr h="548640">
+              <a:tr h="502920">
                 <a:tc>
                   <a:txBody>
                     <a:bodyPr wrap="square"/>
@@ -13747,7 +14186,7 @@
                           </a:solidFill>
                           <a:latin typeface="Apple SD Gothic Neo"/>
                         </a:rPr>
-                        <a:t>스피킹 녹음 업로드가 3회 실패한다</a:t>
+                        <a:t>스피킹 녹음이 3회 실패한다</a:t>
                       </a:r>
                     </a:p>
                   </a:txBody>
@@ -13801,7 +14240,7 @@
                           </a:solidFill>
                           <a:latin typeface="Apple SD Gothic Neo"/>
                         </a:rPr>
-                        <a:t>답안 텍스트는 올라가 있고 녹음만 미제출이 된다. 관리자 화면의 수동 재업로드가 필요 — 현재 재시도 경로 없음.</a:t>
+                        <a:t>답안 텍스트는 올라가 있고 녹음만 미제출이 된다. 관리자 화면의 수동 재업로드가 필요 — 현재 경로 없음.</a:t>
                       </a:r>
                     </a:p>
                   </a:txBody>
@@ -13812,7 +14251,7 @@
                   </a:tcPr>
                 </a:tc>
               </a:tr>
-              <a:tr h="548640">
+              <a:tr h="502920">
                 <a:tc>
                   <a:txBody>
                     <a:bodyPr wrap="square"/>
@@ -13884,7 +14323,7 @@
                           </a:solidFill>
                           <a:latin typeface="Apple SD Gothic Neo"/>
                         </a:rPr>
-                        <a:t>브라우저 로컬 저장은 원리상 학생이 열어볼 수 있다. 서버 재채점 + 불일치 플래그로 탐지. 정답 키 원본은 절대 번들 금지.</a:t>
+                        <a:t>로컬 저장은 원리상 학생이 열어볼 수 있다. 서버 재채점 + 불일치 플래그로 탐지. 정답 키 원본은 번들 금지.</a:t>
                       </a:r>
                     </a:p>
                   </a:txBody>
@@ -13895,7 +14334,7 @@
                   </a:tcPr>
                 </a:tc>
               </a:tr>
-              <a:tr h="548640">
+              <a:tr h="502920">
                 <a:tc>
                   <a:txBody>
                     <a:bodyPr wrap="square"/>
@@ -13913,7 +14352,8 @@
                           </a:solidFill>
                           <a:latin typeface="Apple SD Gothic Neo"/>
                         </a:rPr>
-                        <a:t>시험 후 PC를 초기화한다 (A안)</a:t>
+                        <a:t>PC가 게스트 모드거나
+세션 종료 시 초기화된다</a:t>
                       </a:r>
                     </a:p>
                   </a:txBody>
@@ -13967,7 +14407,7 @@
                           </a:solidFill>
                           <a:latin typeface="Apple SD Gothic Neo"/>
                         </a:rPr>
-                        <a:t>사본이 한 벌뿐이라 복구 불가. B안(교실 허브)이 유일한 구조적 방어. A안만 쓴다면 운영 규칙 + JSON 내보내기 강제로 대체.</a:t>
+                        <a:t>회수 전에 저장소가 통째로 날아간다. 시험용 프로필을 일반 모드로 고정하고, persist() 거부 시 시험 진입을 막는다.</a:t>
                       </a:r>
                     </a:p>
                   </a:txBody>
@@ -13982,6 +14422,45 @@
           </a:graphicData>
         </a:graphic>
       </p:graphicFrame>
+      <p:sp>
+        <p:nvSpPr>
+          <p:cNvPr id="7" name="TextBox 6"/>
+          <p:cNvSpPr txBox="1"/>
+          <p:nvPr/>
+        </p:nvSpPr>
+        <p:spPr>
+          <a:xfrm>
+            <a:off x="685800" y="6199632"/>
+            <a:ext cx="10789920" cy="365760"/>
+          </a:xfrm>
+          <a:prstGeom prst="rect">
+            <a:avLst/>
+          </a:prstGeom>
+          <a:noFill/>
+        </p:spPr>
+        <p:txBody>
+          <a:bodyPr wrap="square" lIns="0" rIns="0" tIns="0" bIns="0" anchor="t">
+            <a:spAutoFit/>
+          </a:bodyPr>
+          <a:lstStyle/>
+          <a:p>
+            <a:pPr algn="l">
+              <a:lnSpc>
+                <a:spcPct val="135000"/>
+              </a:lnSpc>
+            </a:pPr>
+            <a:r>
+              <a:rPr sz="1050" b="0">
+                <a:solidFill>
+                  <a:srgbClr val="78837F"/>
+                </a:solidFill>
+                <a:latin typeface="Apple SD Gothic Neo"/>
+              </a:rPr>
+              <a:t>유일하게 남은 치명 위험은 공용 PC 세팅이다 — 계정 분리로도 허브로도 막을 수 없다. PC 관리 방식을 먼저 확인해야 한다.</a:t>
+            </a:r>
+          </a:p>
+        </p:txBody>
+      </p:sp>
     </p:spTree>
   </p:cSld>
   <p:clrMapOvr>
